--- a/20260929_チェングロウス_LINE施策のビジュアル（①〜④）ver1.1.pptx
+++ b/20260929_チェングロウス_LINE施策のビジュアル（①〜④）ver1.1.pptx
@@ -3556,7 +3556,7 @@
                 <a:ea typeface="メイリオ"/>
                 <a:cs typeface="メイリオ"/>
               </a:rPr>
-              <a:t>※サイト側で実装（リニューアルの要件）／LINE Profile+は申請・審査のうえ別途</a:t>
+              <a:t>※サイト側で実装（LINE連携の開発は都度お見積もり）／LINE Profile+は申請・審査のうえ別途</a:t>
             </a:r>
           </a:p>
         </p:txBody>
@@ -3984,7 +3984,25 @@
                 <a:ea typeface="メイリオ"/>
                 <a:cs typeface="メイリオ"/>
               </a:rPr>
-              <a:t>対象（想定数）→ 訴求 → 開封率×クリック率×応募率 → 件数（月・9月時点）。合計は約15件＝SIM ver2.6の9月の応募数。</a:t>
+              <a:t>対象（想定数）→ 訴求 → 開封率×クリック率 → クリック数 × 応募率2.0% → 件数（月・9月時点）。</a:t>
+            </a:r>
+          </a:p>
+          <a:p>
+            <a:pPr algn="l">
+              <a:lnSpc>
+                <a:spcPct val="130000"/>
+              </a:lnSpc>
+            </a:pPr>
+            <a:r>
+              <a:rPr sz="1250">
+                <a:solidFill>
+                  <a:srgbClr val="333333"/>
+                </a:solidFill>
+                <a:latin typeface="メイリオ"/>
+                <a:ea typeface="メイリオ"/>
+                <a:cs typeface="メイリオ"/>
+              </a:rPr>
+              <a:t>クリック数・件数の合計は、SIM ver2.6の9月（クリック752回・応募15件）と一致します。</a:t>
             </a:r>
           </a:p>
         </p:txBody>
@@ -4034,7 +4052,7 @@
         </p:nvGraphicFramePr>
         <p:xfrm>
           <a:off x="432000" y="1512000"/>
-          <a:ext cx="6840000" cy="3960000"/>
+          <a:ext cx="7415999" cy="4068000"/>
         </p:xfrm>
         <a:graphic>
           <a:graphicData uri="http://schemas.openxmlformats.org/drawingml/2006/table">
@@ -4043,15 +4061,16 @@
                 <a:tableStyleId>{5C22544A-7EE6-4342-B048-85BDC9FD1C3A}</a:tableStyleId>
               </a:tblPr>
               <a:tblGrid>
-                <a:gridCol w="432000"/>
-                <a:gridCol w="756000"/>
-                <a:gridCol w="972000"/>
-                <a:gridCol w="1404000"/>
-                <a:gridCol w="1800000"/>
-                <a:gridCol w="900000"/>
-                <a:gridCol w="576000"/>
+                <a:gridCol w="360000"/>
+                <a:gridCol w="612000"/>
+                <a:gridCol w="936000"/>
+                <a:gridCol w="1188000"/>
+                <a:gridCol w="1512000"/>
+                <a:gridCol w="936000"/>
+                <a:gridCol w="827999"/>
+                <a:gridCol w="1044000"/>
               </a:tblGrid>
-              <a:tr h="360000">
+              <a:tr h="406800">
                 <a:tc>
                   <a:txBody>
                     <a:bodyPr wrap="square" lIns="43200" rIns="43200" tIns="7200" bIns="7200" anchor="ctr"/>
@@ -4059,7 +4078,7 @@
                     <a:p>
                       <a:pPr algn="ctr"/>
                       <a:r>
-                        <a:rPr sz="900" b="1">
+                        <a:rPr sz="850" b="1">
                           <a:solidFill>
                             <a:srgbClr val="FFFFFF"/>
                           </a:solidFill>
@@ -4084,7 +4103,7 @@
                     <a:p>
                       <a:pPr algn="ctr"/>
                       <a:r>
-                        <a:rPr sz="900" b="1">
+                        <a:rPr sz="850" b="1">
                           <a:solidFill>
                             <a:srgbClr val="FFFFFF"/>
                           </a:solidFill>
@@ -4109,7 +4128,7 @@
                     <a:p>
                       <a:pPr algn="ctr"/>
                       <a:r>
-                        <a:rPr sz="900" b="1">
+                        <a:rPr sz="850" b="1">
                           <a:solidFill>
                             <a:srgbClr val="FFFFFF"/>
                           </a:solidFill>
@@ -4134,7 +4153,7 @@
                     <a:p>
                       <a:pPr algn="ctr"/>
                       <a:r>
-                        <a:rPr sz="900" b="1">
+                        <a:rPr sz="850" b="1">
                           <a:solidFill>
                             <a:srgbClr val="FFFFFF"/>
                           </a:solidFill>
@@ -4159,7 +4178,7 @@
                     <a:p>
                       <a:pPr algn="ctr"/>
                       <a:r>
-                        <a:rPr sz="900" b="1">
+                        <a:rPr sz="850" b="1">
                           <a:solidFill>
                             <a:srgbClr val="FFFFFF"/>
                           </a:solidFill>
@@ -4184,7 +4203,7 @@
                     <a:p>
                       <a:pPr algn="ctr"/>
                       <a:r>
-                        <a:rPr sz="900" b="1">
+                        <a:rPr sz="850" b="1">
                           <a:solidFill>
                             <a:srgbClr val="FFFFFF"/>
                           </a:solidFill>
@@ -4192,7 +4211,8 @@
                           <a:ea typeface="メイリオ"/>
                           <a:cs typeface="メイリオ"/>
                         </a:rPr>
-                        <a:t>開封×クリック×応募</a:t>
+                        <a:t>開封×クリック
+→ クリック数</a:t>
                       </a:r>
                     </a:p>
                   </a:txBody>
@@ -4209,7 +4229,7 @@
                     <a:p>
                       <a:pPr algn="ctr"/>
                       <a:r>
-                        <a:rPr sz="900" b="1">
+                        <a:rPr sz="850" b="1">
                           <a:solidFill>
                             <a:srgbClr val="FFFFFF"/>
                           </a:solidFill>
@@ -4217,7 +4237,33 @@
                           <a:ea typeface="メイリオ"/>
                           <a:cs typeface="メイリオ"/>
                         </a:rPr>
-                        <a:t>件数／月</a:t>
+                        <a:t>×応募率
+→ 件数</a:t>
+                      </a:r>
+                    </a:p>
+                  </a:txBody>
+                  <a:tcPr anchor="ctr">
+                    <a:solidFill>
+                      <a:srgbClr val="1F285A"/>
+                    </a:solidFill>
+                  </a:tcPr>
+                </a:tc>
+                <a:tc>
+                  <a:txBody>
+                    <a:bodyPr wrap="square" lIns="43200" rIns="43200" tIns="7200" bIns="7200" anchor="ctr"/>
+                    <a:lstStyle/>
+                    <a:p>
+                      <a:pPr algn="ctr"/>
+                      <a:r>
+                        <a:rPr sz="850" b="1">
+                          <a:solidFill>
+                            <a:srgbClr val="FFFFFF"/>
+                          </a:solidFill>
+                          <a:latin typeface="メイリオ"/>
+                          <a:ea typeface="メイリオ"/>
+                          <a:cs typeface="メイリオ"/>
+                        </a:rPr>
+                        <a:t>費用</a:t>
                       </a:r>
                     </a:p>
                   </a:txBody>
@@ -4228,7 +4274,7 @@
                   </a:tcPr>
                 </a:tc>
               </a:tr>
-              <a:tr h="360000">
+              <a:tr h="406800">
                 <a:tc>
                   <a:txBody>
                     <a:bodyPr wrap="square" lIns="43200" rIns="43200" tIns="7200" bIns="7200" anchor="ctr"/>
@@ -4236,7 +4282,7 @@
                     <a:p>
                       <a:pPr algn="ctr"/>
                       <a:r>
-                        <a:rPr sz="850" b="0">
+                        <a:rPr sz="800" b="0">
                           <a:solidFill>
                             <a:srgbClr val="333333"/>
                           </a:solidFill>
@@ -4261,7 +4307,7 @@
                     <a:p>
                       <a:pPr algn="ctr"/>
                       <a:r>
-                        <a:rPr sz="850" b="0">
+                        <a:rPr sz="800" b="0">
                           <a:solidFill>
                             <a:srgbClr val="333333"/>
                           </a:solidFill>
@@ -4286,7 +4332,7 @@
                     <a:p>
                       <a:pPr algn="ctr"/>
                       <a:r>
-                        <a:rPr sz="850" b="0">
+                        <a:rPr sz="800" b="0">
                           <a:solidFill>
                             <a:srgbClr val="333333"/>
                           </a:solidFill>
@@ -4294,7 +4340,8 @@
                           <a:ea typeface="メイリオ"/>
                           <a:cs typeface="メイリオ"/>
                         </a:rPr>
-                        <a:t>1〜14日後（全10通）</a:t>
+                        <a:t>0〜14日後
+（全10通）</a:t>
                       </a:r>
                     </a:p>
                   </a:txBody>
@@ -4311,7 +4358,7 @@
                     <a:p>
                       <a:pPr algn="l"/>
                       <a:r>
-                        <a:rPr sz="850" b="0">
+                        <a:rPr sz="800" b="0">
                           <a:solidFill>
                             <a:srgbClr val="333333"/>
                           </a:solidFill>
@@ -4319,7 +4366,8 @@
                           <a:ea typeface="メイリオ"/>
                           <a:cs typeface="メイリオ"/>
                         </a:rPr>
-                        <a:t>離脱防止から追加した方（約27人）</a:t>
+                        <a:t>離脱防止から
+追加した方（約22人）</a:t>
                       </a:r>
                     </a:p>
                   </a:txBody>
@@ -4336,7 +4384,7 @@
                     <a:p>
                       <a:pPr algn="l"/>
                       <a:r>
-                        <a:rPr sz="850" b="0">
+                        <a:rPr sz="800" b="0">
                           <a:solidFill>
                             <a:srgbClr val="333333"/>
                           </a:solidFill>
@@ -4344,7 +4392,8 @@
                           <a:ea typeface="メイリオ"/>
                           <a:cs typeface="メイリオ"/>
                         </a:rPr>
-                        <a:t>希望の職種を聞く→条件に合う求人→会員登録・応募のご案内</a:t>
+                        <a:t>職種を聞く→合う求人→
+会員登録・応募のご案内</a:t>
                       </a:r>
                     </a:p>
                   </a:txBody>
@@ -4361,7 +4410,7 @@
                     <a:p>
                       <a:pPr algn="ctr"/>
                       <a:r>
-                        <a:rPr sz="850" b="0">
+                        <a:rPr sz="800" b="0">
                           <a:solidFill>
                             <a:srgbClr val="333333"/>
                           </a:solidFill>
@@ -4369,7 +4418,8 @@
                           <a:ea typeface="メイリオ"/>
                           <a:cs typeface="メイリオ"/>
                         </a:rPr>
-                        <a:t>72.5%×12%×2.0%</a:t>
+                        <a:t>72.5%×12%
+→ 57回</a:t>
                       </a:r>
                     </a:p>
                   </a:txBody>
@@ -4386,7 +4436,7 @@
                     <a:p>
                       <a:pPr algn="ctr"/>
                       <a:r>
-                        <a:rPr sz="850" b="0">
+                        <a:rPr sz="800" b="0">
                           <a:solidFill>
                             <a:srgbClr val="333333"/>
                           </a:solidFill>
@@ -4394,7 +4444,34 @@
                           <a:ea typeface="メイリオ"/>
                           <a:cs typeface="メイリオ"/>
                         </a:rPr>
-                        <a:t>約1件</a:t>
+                        <a:t>2.0%
+→ 1.1件</a:t>
+                      </a:r>
+                    </a:p>
+                  </a:txBody>
+                  <a:tcPr anchor="ctr">
+                    <a:solidFill>
+                      <a:srgbClr val="FFFFFF"/>
+                    </a:solidFill>
+                  </a:tcPr>
+                </a:tc>
+                <a:tc>
+                  <a:txBody>
+                    <a:bodyPr wrap="square" lIns="43200" rIns="43200" tIns="7200" bIns="7200" anchor="ctr"/>
+                    <a:lstStyle/>
+                    <a:p>
+                      <a:pPr algn="ctr"/>
+                      <a:r>
+                        <a:rPr sz="800" b="0">
+                          <a:solidFill>
+                            <a:srgbClr val="333333"/>
+                          </a:solidFill>
+                          <a:latin typeface="メイリオ"/>
+                          <a:ea typeface="メイリオ"/>
+                          <a:cs typeface="メイリオ"/>
+                        </a:rPr>
+                        <a:t>コンサル費
+に含む</a:t>
                       </a:r>
                     </a:p>
                   </a:txBody>
@@ -4405,7 +4482,7 @@
                   </a:tcPr>
                 </a:tc>
               </a:tr>
-              <a:tr h="360000">
+              <a:tr h="406800">
                 <a:tc>
                   <a:txBody>
                     <a:bodyPr wrap="square" lIns="43200" rIns="43200" tIns="7200" bIns="7200" anchor="ctr"/>
@@ -4413,7 +4490,7 @@
                     <a:p>
                       <a:pPr algn="ctr"/>
                       <a:r>
-                        <a:rPr sz="850" b="0">
+                        <a:rPr sz="800" b="0">
                           <a:solidFill>
                             <a:srgbClr val="333333"/>
                           </a:solidFill>
@@ -4438,7 +4515,7 @@
                     <a:p>
                       <a:pPr algn="ctr"/>
                       <a:r>
-                        <a:rPr sz="850" b="0">
+                        <a:rPr sz="800" b="0">
                           <a:solidFill>
                             <a:srgbClr val="333333"/>
                           </a:solidFill>
@@ -4463,7 +4540,7 @@
                     <a:p>
                       <a:pPr algn="ctr"/>
                       <a:r>
-                        <a:rPr sz="850" b="0">
+                        <a:rPr sz="800" b="0">
                           <a:solidFill>
                             <a:srgbClr val="333333"/>
                           </a:solidFill>
@@ -4471,7 +4548,8 @@
                           <a:ea typeface="メイリオ"/>
                           <a:cs typeface="メイリオ"/>
                         </a:rPr>
-                        <a:t>月4本（1〜2月は強化）</a:t>
+                        <a:t>月4本／ステップ
+終了後の方</a:t>
                       </a:r>
                     </a:p>
                   </a:txBody>
@@ -4488,7 +4566,7 @@
                     <a:p>
                       <a:pPr algn="l"/>
                       <a:r>
-                        <a:rPr sz="850" b="0">
+                        <a:rPr sz="800" b="0">
                           <a:solidFill>
                             <a:srgbClr val="333333"/>
                           </a:solidFill>
@@ -4496,7 +4574,8 @@
                           <a:ea typeface="メイリオ"/>
                           <a:cs typeface="メイリオ"/>
                         </a:rPr>
-                        <a:t>離脱防止から追加した方（約110人）</a:t>
+                        <a:t>離脱防止から
+追加した方（約88人）</a:t>
                       </a:r>
                     </a:p>
                   </a:txBody>
@@ -4513,7 +4592,7 @@
                     <a:p>
                       <a:pPr algn="l"/>
                       <a:r>
-                        <a:rPr sz="850" b="0">
+                        <a:rPr sz="800" b="0">
                           <a:solidFill>
                             <a:srgbClr val="333333"/>
                           </a:solidFill>
@@ -4521,7 +4600,8 @@
                           <a:ea typeface="メイリオ"/>
                           <a:cs typeface="メイリオ"/>
                         </a:rPr>
-                        <a:t>新着求人・資格取得支援・働き方の特集</a:t>
+                        <a:t>新着求人・資格取得支援・
+働き方の特集</a:t>
                       </a:r>
                     </a:p>
                   </a:txBody>
@@ -4538,7 +4618,7 @@
                     <a:p>
                       <a:pPr algn="ctr"/>
                       <a:r>
-                        <a:rPr sz="850" b="0">
+                        <a:rPr sz="800" b="0">
                           <a:solidFill>
                             <a:srgbClr val="333333"/>
                           </a:solidFill>
@@ -4546,7 +4626,8 @@
                           <a:ea typeface="メイリオ"/>
                           <a:cs typeface="メイリオ"/>
                         </a:rPr>
-                        <a:t>78%×10%×2.0%</a:t>
+                        <a:t>78%×10%
+→ 82回</a:t>
                       </a:r>
                     </a:p>
                   </a:txBody>
@@ -4563,7 +4644,7 @@
                     <a:p>
                       <a:pPr algn="ctr"/>
                       <a:r>
-                        <a:rPr sz="850" b="0">
+                        <a:rPr sz="800" b="0">
                           <a:solidFill>
                             <a:srgbClr val="333333"/>
                           </a:solidFill>
@@ -4571,7 +4652,34 @@
                           <a:ea typeface="メイリオ"/>
                           <a:cs typeface="メイリオ"/>
                         </a:rPr>
-                        <a:t>約2件</a:t>
+                        <a:t>2.0%
+→ 1.6件</a:t>
+                      </a:r>
+                    </a:p>
+                  </a:txBody>
+                  <a:tcPr anchor="ctr">
+                    <a:solidFill>
+                      <a:srgbClr val="F4F7FF"/>
+                    </a:solidFill>
+                  </a:tcPr>
+                </a:tc>
+                <a:tc>
+                  <a:txBody>
+                    <a:bodyPr wrap="square" lIns="43200" rIns="43200" tIns="7200" bIns="7200" anchor="ctr"/>
+                    <a:lstStyle/>
+                    <a:p>
+                      <a:pPr algn="ctr"/>
+                      <a:r>
+                        <a:rPr sz="800" b="0">
+                          <a:solidFill>
+                            <a:srgbClr val="333333"/>
+                          </a:solidFill>
+                          <a:latin typeface="メイリオ"/>
+                          <a:ea typeface="メイリオ"/>
+                          <a:cs typeface="メイリオ"/>
+                        </a:rPr>
+                        <a:t>コンサル費
+に含む</a:t>
                       </a:r>
                     </a:p>
                   </a:txBody>
@@ -4582,7 +4690,7 @@
                   </a:tcPr>
                 </a:tc>
               </a:tr>
-              <a:tr h="360000">
+              <a:tr h="406800">
                 <a:tc>
                   <a:txBody>
                     <a:bodyPr wrap="square" lIns="43200" rIns="43200" tIns="7200" bIns="7200" anchor="ctr"/>
@@ -4590,7 +4698,7 @@
                     <a:p>
                       <a:pPr algn="ctr"/>
                       <a:r>
-                        <a:rPr sz="850" b="0">
+                        <a:rPr sz="800" b="0">
                           <a:solidFill>
                             <a:srgbClr val="333333"/>
                           </a:solidFill>
@@ -4615,7 +4723,7 @@
                     <a:p>
                       <a:pPr algn="ctr"/>
                       <a:r>
-                        <a:rPr sz="850" b="0">
+                        <a:rPr sz="800" b="0">
                           <a:solidFill>
                             <a:srgbClr val="333333"/>
                           </a:solidFill>
@@ -4623,7 +4731,8 @@
                           <a:ea typeface="メイリオ"/>
                           <a:cs typeface="メイリオ"/>
                         </a:rPr>
-                        <a:t>リッチメニュー</a:t>
+                        <a:t>リッチ
+メニュー</a:t>
                       </a:r>
                     </a:p>
                   </a:txBody>
@@ -4640,7 +4749,7 @@
                     <a:p>
                       <a:pPr algn="ctr"/>
                       <a:r>
-                        <a:rPr sz="850" b="0">
+                        <a:rPr sz="800" b="0">
                           <a:solidFill>
                             <a:srgbClr val="333333"/>
                           </a:solidFill>
@@ -4665,7 +4774,7 @@
                     <a:p>
                       <a:pPr algn="l"/>
                       <a:r>
-                        <a:rPr sz="850" b="0">
+                        <a:rPr sz="800" b="0">
                           <a:solidFill>
                             <a:srgbClr val="333333"/>
                           </a:solidFill>
@@ -4673,7 +4782,8 @@
                           <a:ea typeface="メイリオ"/>
                           <a:cs typeface="メイリオ"/>
                         </a:rPr>
-                        <a:t>有効な友だち（約137人）</a:t>
+                        <a:t>有効な友だち
+（約137人）</a:t>
                       </a:r>
                     </a:p>
                   </a:txBody>
@@ -4690,7 +4800,7 @@
                     <a:p>
                       <a:pPr algn="l"/>
                       <a:r>
-                        <a:rPr sz="850" b="0">
+                        <a:rPr sz="800" b="0">
                           <a:solidFill>
                             <a:srgbClr val="333333"/>
                           </a:solidFill>
@@ -4698,7 +4808,8 @@
                           <a:ea typeface="メイリオ"/>
                           <a:cs typeface="メイリオ"/>
                         </a:rPr>
-                        <a:t>職種・地域・資格で求人を探す</a:t>
+                        <a:t>職種・地域・資格で
+求人を探す</a:t>
                       </a:r>
                     </a:p>
                   </a:txBody>
@@ -4715,7 +4826,7 @@
                     <a:p>
                       <a:pPr algn="ctr"/>
                       <a:r>
-                        <a:rPr sz="850" b="0">
+                        <a:rPr sz="800" b="0">
                           <a:solidFill>
                             <a:srgbClr val="333333"/>
                           </a:solidFill>
@@ -4723,7 +4834,8 @@
                           <a:ea typeface="メイリオ"/>
                           <a:cs typeface="メイリオ"/>
                         </a:rPr>
-                        <a:t>月30%×2回×2.0%</a:t>
+                        <a:t>月30%×2回
+→ 82回</a:t>
                       </a:r>
                     </a:p>
                   </a:txBody>
@@ -4740,7 +4852,7 @@
                     <a:p>
                       <a:pPr algn="ctr"/>
                       <a:r>
-                        <a:rPr sz="850" b="0">
+                        <a:rPr sz="800" b="0">
                           <a:solidFill>
                             <a:srgbClr val="333333"/>
                           </a:solidFill>
@@ -4748,7 +4860,34 @@
                           <a:ea typeface="メイリオ"/>
                           <a:cs typeface="メイリオ"/>
                         </a:rPr>
-                        <a:t>約1件</a:t>
+                        <a:t>2.0%
+→ 1.6件</a:t>
+                      </a:r>
+                    </a:p>
+                  </a:txBody>
+                  <a:tcPr anchor="ctr">
+                    <a:solidFill>
+                      <a:srgbClr val="FFFFFF"/>
+                    </a:solidFill>
+                  </a:tcPr>
+                </a:tc>
+                <a:tc>
+                  <a:txBody>
+                    <a:bodyPr wrap="square" lIns="43200" rIns="43200" tIns="7200" bIns="7200" anchor="ctr"/>
+                    <a:lstStyle/>
+                    <a:p>
+                      <a:pPr algn="ctr"/>
+                      <a:r>
+                        <a:rPr sz="800" b="0">
+                          <a:solidFill>
+                            <a:srgbClr val="333333"/>
+                          </a:solidFill>
+                          <a:latin typeface="メイリオ"/>
+                          <a:ea typeface="メイリオ"/>
+                          <a:cs typeface="メイリオ"/>
+                        </a:rPr>
+                        <a:t>コンサル費
+に含む</a:t>
                       </a:r>
                     </a:p>
                   </a:txBody>
@@ -4759,7 +4898,7 @@
                   </a:tcPr>
                 </a:tc>
               </a:tr>
-              <a:tr h="360000">
+              <a:tr h="406800">
                 <a:tc>
                   <a:txBody>
                     <a:bodyPr wrap="square" lIns="43200" rIns="43200" tIns="7200" bIns="7200" anchor="ctr"/>
@@ -4767,7 +4906,7 @@
                     <a:p>
                       <a:pPr algn="ctr"/>
                       <a:r>
-                        <a:rPr sz="850" b="0">
+                        <a:rPr sz="800" b="0">
                           <a:solidFill>
                             <a:srgbClr val="333333"/>
                           </a:solidFill>
@@ -4792,7 +4931,7 @@
                     <a:p>
                       <a:pPr algn="ctr"/>
                       <a:r>
-                        <a:rPr sz="850" b="0">
+                        <a:rPr sz="800" b="0">
                           <a:solidFill>
                             <a:srgbClr val="333333"/>
                           </a:solidFill>
@@ -4817,7 +4956,7 @@
                     <a:p>
                       <a:pPr algn="ctr"/>
                       <a:r>
-                        <a:rPr sz="850" b="0">
+                        <a:rPr sz="800" b="0">
                           <a:solidFill>
                             <a:srgbClr val="333333"/>
                           </a:solidFill>
@@ -4825,7 +4964,8 @@
                           <a:ea typeface="メイリオ"/>
                           <a:cs typeface="メイリオ"/>
                         </a:rPr>
-                        <a:t>1〜14日後（全10通）</a:t>
+                        <a:t>0〜14日後
+（全10通）</a:t>
                       </a:r>
                     </a:p>
                   </a:txBody>
@@ -4842,7 +4982,7 @@
                     <a:p>
                       <a:pPr algn="l"/>
                       <a:r>
-                        <a:rPr sz="850" b="0">
+                        <a:rPr sz="800" b="0">
                           <a:solidFill>
                             <a:srgbClr val="333333"/>
                           </a:solidFill>
@@ -4850,7 +4990,8 @@
                           <a:ea typeface="メイリオ"/>
                           <a:cs typeface="メイリオ"/>
                         </a:rPr>
-                        <a:t>LINEで登録した方（約66人）</a:t>
+                        <a:t>LINEで登録した方
+（約52人）</a:t>
                       </a:r>
                     </a:p>
                   </a:txBody>
@@ -4867,7 +5008,7 @@
                     <a:p>
                       <a:pPr algn="l"/>
                       <a:r>
-                        <a:rPr sz="850" b="0">
+                        <a:rPr sz="800" b="0">
                           <a:solidFill>
                             <a:srgbClr val="333333"/>
                           </a:solidFill>
@@ -4875,7 +5016,8 @@
                           <a:ea typeface="メイリオ"/>
                           <a:cs typeface="メイリオ"/>
                         </a:rPr>
-                        <a:t>希望の職種を聞く→条件に合う求人→応募のご案内</a:t>
+                        <a:t>職種を聞く→合う求人→
+応募のご案内</a:t>
                       </a:r>
                     </a:p>
                   </a:txBody>
@@ -4892,7 +5034,7 @@
                     <a:p>
                       <a:pPr algn="ctr"/>
                       <a:r>
-                        <a:rPr sz="850" b="0">
+                        <a:rPr sz="800" b="0">
                           <a:solidFill>
                             <a:srgbClr val="333333"/>
                           </a:solidFill>
@@ -4900,7 +5042,8 @@
                           <a:ea typeface="メイリオ"/>
                           <a:cs typeface="メイリオ"/>
                         </a:rPr>
-                        <a:t>72.5%×12%×2.0%</a:t>
+                        <a:t>72.5%×12%
+→ 137回</a:t>
                       </a:r>
                     </a:p>
                   </a:txBody>
@@ -4917,7 +5060,7 @@
                     <a:p>
                       <a:pPr algn="ctr"/>
                       <a:r>
-                        <a:rPr sz="850" b="0">
+                        <a:rPr sz="800" b="0">
                           <a:solidFill>
                             <a:srgbClr val="333333"/>
                           </a:solidFill>
@@ -4925,7 +5068,34 @@
                           <a:ea typeface="メイリオ"/>
                           <a:cs typeface="メイリオ"/>
                         </a:rPr>
-                        <a:t>約3件</a:t>
+                        <a:t>2.0%
+→ 2.7件</a:t>
+                      </a:r>
+                    </a:p>
+                  </a:txBody>
+                  <a:tcPr anchor="ctr">
+                    <a:solidFill>
+                      <a:srgbClr val="F4F7FF"/>
+                    </a:solidFill>
+                  </a:tcPr>
+                </a:tc>
+                <a:tc>
+                  <a:txBody>
+                    <a:bodyPr wrap="square" lIns="43200" rIns="43200" tIns="7200" bIns="7200" anchor="ctr"/>
+                    <a:lstStyle/>
+                    <a:p>
+                      <a:pPr algn="ctr"/>
+                      <a:r>
+                        <a:rPr sz="800" b="0">
+                          <a:solidFill>
+                            <a:srgbClr val="333333"/>
+                          </a:solidFill>
+                          <a:latin typeface="メイリオ"/>
+                          <a:ea typeface="メイリオ"/>
+                          <a:cs typeface="メイリオ"/>
+                        </a:rPr>
+                        <a:t>コンサル費
+に含む</a:t>
                       </a:r>
                     </a:p>
                   </a:txBody>
@@ -4936,7 +5106,7 @@
                   </a:tcPr>
                 </a:tc>
               </a:tr>
-              <a:tr h="360000">
+              <a:tr h="406800">
                 <a:tc>
                   <a:txBody>
                     <a:bodyPr wrap="square" lIns="43200" rIns="43200" tIns="7200" bIns="7200" anchor="ctr"/>
@@ -4944,7 +5114,7 @@
                     <a:p>
                       <a:pPr algn="ctr"/>
                       <a:r>
-                        <a:rPr sz="850" b="0">
+                        <a:rPr sz="800" b="0">
                           <a:solidFill>
                             <a:srgbClr val="333333"/>
                           </a:solidFill>
@@ -4969,7 +5139,7 @@
                     <a:p>
                       <a:pPr algn="ctr"/>
                       <a:r>
-                        <a:rPr sz="850" b="0">
+                        <a:rPr sz="800" b="0">
                           <a:solidFill>
                             <a:srgbClr val="333333"/>
                           </a:solidFill>
@@ -4994,7 +5164,7 @@
                     <a:p>
                       <a:pPr algn="ctr"/>
                       <a:r>
-                        <a:rPr sz="850" b="0">
+                        <a:rPr sz="800" b="0">
                           <a:solidFill>
                             <a:srgbClr val="333333"/>
                           </a:solidFill>
@@ -5002,7 +5172,8 @@
                           <a:ea typeface="メイリオ"/>
                           <a:cs typeface="メイリオ"/>
                         </a:rPr>
-                        <a:t>月4本（1〜2月は強化）</a:t>
+                        <a:t>月4本／ステップ
+終了後の方</a:t>
                       </a:r>
                     </a:p>
                   </a:txBody>
@@ -5019,7 +5190,7 @@
                     <a:p>
                       <a:pPr algn="l"/>
                       <a:r>
-                        <a:rPr sz="850" b="0">
+                        <a:rPr sz="800" b="0">
                           <a:solidFill>
                             <a:srgbClr val="333333"/>
                           </a:solidFill>
@@ -5027,7 +5198,8 @@
                           <a:ea typeface="メイリオ"/>
                           <a:cs typeface="メイリオ"/>
                         </a:rPr>
-                        <a:t>LINEで登録した方（約262人）</a:t>
+                        <a:t>LINEで登録した方
+（約210人）</a:t>
                       </a:r>
                     </a:p>
                   </a:txBody>
@@ -5044,7 +5216,7 @@
                     <a:p>
                       <a:pPr algn="l"/>
                       <a:r>
-                        <a:rPr sz="850" b="0">
+                        <a:rPr sz="800" b="0">
                           <a:solidFill>
                             <a:srgbClr val="333333"/>
                           </a:solidFill>
@@ -5052,7 +5224,8 @@
                           <a:ea typeface="メイリオ"/>
                           <a:cs typeface="メイリオ"/>
                         </a:rPr>
-                        <a:t>新着求人・資格取得支援・働き方の特集</a:t>
+                        <a:t>新着求人・資格取得支援・
+働き方の特集</a:t>
                       </a:r>
                     </a:p>
                   </a:txBody>
@@ -5069,7 +5242,7 @@
                     <a:p>
                       <a:pPr algn="ctr"/>
                       <a:r>
-                        <a:rPr sz="850" b="0">
+                        <a:rPr sz="800" b="0">
                           <a:solidFill>
                             <a:srgbClr val="333333"/>
                           </a:solidFill>
@@ -5077,7 +5250,8 @@
                           <a:ea typeface="メイリオ"/>
                           <a:cs typeface="メイリオ"/>
                         </a:rPr>
-                        <a:t>78%×10%×2.0%</a:t>
+                        <a:t>78%×10%
+→ 197回</a:t>
                       </a:r>
                     </a:p>
                   </a:txBody>
@@ -5094,7 +5268,7 @@
                     <a:p>
                       <a:pPr algn="ctr"/>
                       <a:r>
-                        <a:rPr sz="850" b="0">
+                        <a:rPr sz="800" b="0">
                           <a:solidFill>
                             <a:srgbClr val="333333"/>
                           </a:solidFill>
@@ -5102,7 +5276,34 @@
                           <a:ea typeface="メイリオ"/>
                           <a:cs typeface="メイリオ"/>
                         </a:rPr>
-                        <a:t>約4件</a:t>
+                        <a:t>2.0%
+→ 3.9件</a:t>
+                      </a:r>
+                    </a:p>
+                  </a:txBody>
+                  <a:tcPr anchor="ctr">
+                    <a:solidFill>
+                      <a:srgbClr val="FFFFFF"/>
+                    </a:solidFill>
+                  </a:tcPr>
+                </a:tc>
+                <a:tc>
+                  <a:txBody>
+                    <a:bodyPr wrap="square" lIns="43200" rIns="43200" tIns="7200" bIns="7200" anchor="ctr"/>
+                    <a:lstStyle/>
+                    <a:p>
+                      <a:pPr algn="ctr"/>
+                      <a:r>
+                        <a:rPr sz="800" b="0">
+                          <a:solidFill>
+                            <a:srgbClr val="333333"/>
+                          </a:solidFill>
+                          <a:latin typeface="メイリオ"/>
+                          <a:ea typeface="メイリオ"/>
+                          <a:cs typeface="メイリオ"/>
+                        </a:rPr>
+                        <a:t>コンサル費
+に含む</a:t>
                       </a:r>
                     </a:p>
                   </a:txBody>
@@ -5113,7 +5314,7 @@
                   </a:tcPr>
                 </a:tc>
               </a:tr>
-              <a:tr h="360000">
+              <a:tr h="406800">
                 <a:tc>
                   <a:txBody>
                     <a:bodyPr wrap="square" lIns="43200" rIns="43200" tIns="7200" bIns="7200" anchor="ctr"/>
@@ -5121,7 +5322,7 @@
                     <a:p>
                       <a:pPr algn="ctr"/>
                       <a:r>
-                        <a:rPr sz="850" b="0">
+                        <a:rPr sz="800" b="0">
                           <a:solidFill>
                             <a:srgbClr val="333333"/>
                           </a:solidFill>
@@ -5146,7 +5347,7 @@
                     <a:p>
                       <a:pPr algn="ctr"/>
                       <a:r>
-                        <a:rPr sz="850" b="0">
+                        <a:rPr sz="800" b="0">
                           <a:solidFill>
                             <a:srgbClr val="333333"/>
                           </a:solidFill>
@@ -5154,7 +5355,8 @@
                           <a:ea typeface="メイリオ"/>
                           <a:cs typeface="メイリオ"/>
                         </a:rPr>
-                        <a:t>リッチメニュー</a:t>
+                        <a:t>リッチ
+メニュー</a:t>
                       </a:r>
                     </a:p>
                   </a:txBody>
@@ -5171,7 +5373,7 @@
                     <a:p>
                       <a:pPr algn="ctr"/>
                       <a:r>
-                        <a:rPr sz="850" b="0">
+                        <a:rPr sz="800" b="0">
                           <a:solidFill>
                             <a:srgbClr val="333333"/>
                           </a:solidFill>
@@ -5196,7 +5398,7 @@
                     <a:p>
                       <a:pPr algn="l"/>
                       <a:r>
-                        <a:rPr sz="850" b="0">
+                        <a:rPr sz="800" b="0">
                           <a:solidFill>
                             <a:srgbClr val="333333"/>
                           </a:solidFill>
@@ -5204,7 +5406,8 @@
                           <a:ea typeface="メイリオ"/>
                           <a:cs typeface="メイリオ"/>
                         </a:rPr>
-                        <a:t>有効な友だち（約328人）</a:t>
+                        <a:t>有効な友だち
+（約328人）</a:t>
                       </a:r>
                     </a:p>
                   </a:txBody>
@@ -5221,7 +5424,7 @@
                     <a:p>
                       <a:pPr algn="l"/>
                       <a:r>
-                        <a:rPr sz="850" b="0">
+                        <a:rPr sz="800" b="0">
                           <a:solidFill>
                             <a:srgbClr val="333333"/>
                           </a:solidFill>
@@ -5229,7 +5432,8 @@
                           <a:ea typeface="メイリオ"/>
                           <a:cs typeface="メイリオ"/>
                         </a:rPr>
-                        <a:t>職種・地域・資格で求人を探す</a:t>
+                        <a:t>職種・地域・資格で
+求人を探す</a:t>
                       </a:r>
                     </a:p>
                   </a:txBody>
@@ -5246,7 +5450,7 @@
                     <a:p>
                       <a:pPr algn="ctr"/>
                       <a:r>
-                        <a:rPr sz="850" b="0">
+                        <a:rPr sz="800" b="0">
                           <a:solidFill>
                             <a:srgbClr val="333333"/>
                           </a:solidFill>
@@ -5254,7 +5458,8 @@
                           <a:ea typeface="メイリオ"/>
                           <a:cs typeface="メイリオ"/>
                         </a:rPr>
-                        <a:t>月30%×2回×2.0%</a:t>
+                        <a:t>月30%×2回
+→ 197回</a:t>
                       </a:r>
                     </a:p>
                   </a:txBody>
@@ -5271,7 +5476,7 @@
                     <a:p>
                       <a:pPr algn="ctr"/>
                       <a:r>
-                        <a:rPr sz="850" b="0">
+                        <a:rPr sz="800" b="0">
                           <a:solidFill>
                             <a:srgbClr val="333333"/>
                           </a:solidFill>
@@ -5279,7 +5484,34 @@
                           <a:ea typeface="メイリオ"/>
                           <a:cs typeface="メイリオ"/>
                         </a:rPr>
-                        <a:t>約4件</a:t>
+                        <a:t>2.0%
+→ 3.9件</a:t>
+                      </a:r>
+                    </a:p>
+                  </a:txBody>
+                  <a:tcPr anchor="ctr">
+                    <a:solidFill>
+                      <a:srgbClr val="F4F7FF"/>
+                    </a:solidFill>
+                  </a:tcPr>
+                </a:tc>
+                <a:tc>
+                  <a:txBody>
+                    <a:bodyPr wrap="square" lIns="43200" rIns="43200" tIns="7200" bIns="7200" anchor="ctr"/>
+                    <a:lstStyle/>
+                    <a:p>
+                      <a:pPr algn="ctr"/>
+                      <a:r>
+                        <a:rPr sz="800" b="0">
+                          <a:solidFill>
+                            <a:srgbClr val="333333"/>
+                          </a:solidFill>
+                          <a:latin typeface="メイリオ"/>
+                          <a:ea typeface="メイリオ"/>
+                          <a:cs typeface="メイリオ"/>
+                        </a:rPr>
+                        <a:t>コンサル費
+に含む</a:t>
                       </a:r>
                     </a:p>
                   </a:txBody>
@@ -5290,7 +5522,7 @@
                   </a:tcPr>
                 </a:tc>
               </a:tr>
-              <a:tr h="360000">
+              <a:tr h="406800">
                 <a:tc>
                   <a:txBody>
                     <a:bodyPr wrap="square" lIns="43200" rIns="43200" tIns="7200" bIns="7200" anchor="ctr"/>
@@ -5298,7 +5530,7 @@
                     <a:p>
                       <a:pPr algn="ctr"/>
                       <a:r>
-                        <a:rPr sz="850" b="0">
+                        <a:rPr sz="800" b="0">
                           <a:solidFill>
                             <a:srgbClr val="333333"/>
                           </a:solidFill>
@@ -5323,7 +5555,7 @@
                     <a:p>
                       <a:pPr algn="ctr"/>
                       <a:r>
-                        <a:rPr sz="850" b="0">
+                        <a:rPr sz="800" b="0">
                           <a:solidFill>
                             <a:srgbClr val="333333"/>
                           </a:solidFill>
@@ -5348,7 +5580,7 @@
                     <a:p>
                       <a:pPr algn="ctr"/>
                       <a:r>
-                        <a:rPr sz="850" b="0">
+                        <a:rPr sz="800" b="0">
                           <a:solidFill>
                             <a:srgbClr val="333333"/>
                           </a:solidFill>
@@ -5356,7 +5588,8 @@
                           <a:ea typeface="メイリオ"/>
                           <a:cs typeface="メイリオ"/>
                         </a:rPr>
-                        <a:t>応募当日</a:t>
+                        <a:t>応募当日／
+面談前日・当日</a:t>
                       </a:r>
                     </a:p>
                   </a:txBody>
@@ -5373,7 +5606,7 @@
                     <a:p>
                       <a:pPr algn="l"/>
                       <a:r>
-                        <a:rPr sz="850" b="0">
+                        <a:rPr sz="800" b="0">
                           <a:solidFill>
                             <a:srgbClr val="333333"/>
                           </a:solidFill>
@@ -5381,7 +5614,8 @@
                           <a:ea typeface="メイリオ"/>
                           <a:cs typeface="メイリオ"/>
                         </a:rPr>
-                        <a:t>応募した方（月約17人）</a:t>
+                        <a:t>応募した方
+（月約17人）</a:t>
                       </a:r>
                     </a:p>
                   </a:txBody>
@@ -5398,7 +5632,7 @@
                     <a:p>
                       <a:pPr algn="l"/>
                       <a:r>
-                        <a:rPr sz="850" b="0">
+                        <a:rPr sz="800" b="0">
                           <a:solidFill>
                             <a:srgbClr val="333333"/>
                           </a:solidFill>
@@ -5406,7 +5640,8 @@
                           <a:ea typeface="メイリオ"/>
                           <a:cs typeface="メイリオ"/>
                         </a:rPr>
-                        <a:t>応募受付のお礼・面談までの流れ</a:t>
+                        <a:t>応募受付のお礼・面談の
+日時・場所・持ち物</a:t>
                       </a:r>
                     </a:p>
                   </a:txBody>
@@ -5423,7 +5658,7 @@
                     <a:p>
                       <a:pPr algn="ctr"/>
                       <a:r>
-                        <a:rPr sz="850" b="0">
+                        <a:rPr sz="800" b="0">
                           <a:solidFill>
                             <a:srgbClr val="333333"/>
                           </a:solidFill>
@@ -5448,7 +5683,7 @@
                     <a:p>
                       <a:pPr algn="ctr"/>
                       <a:r>
-                        <a:rPr sz="850" b="0">
+                        <a:rPr sz="800" b="0">
                           <a:solidFill>
                             <a:srgbClr val="333333"/>
                           </a:solidFill>
@@ -5456,7 +5691,34 @@
                           <a:ea typeface="メイリオ"/>
                           <a:cs typeface="メイリオ"/>
                         </a:rPr>
-                        <a:t>対象外</a:t>
+                        <a:t>対象外
+（採用向け）</a:t>
+                      </a:r>
+                    </a:p>
+                  </a:txBody>
+                  <a:tcPr anchor="ctr">
+                    <a:solidFill>
+                      <a:srgbClr val="FFFFFF"/>
+                    </a:solidFill>
+                  </a:tcPr>
+                </a:tc>
+                <a:tc>
+                  <a:txBody>
+                    <a:bodyPr wrap="square" lIns="43200" rIns="43200" tIns="7200" bIns="7200" anchor="ctr"/>
+                    <a:lstStyle/>
+                    <a:p>
+                      <a:pPr algn="ctr"/>
+                      <a:r>
+                        <a:rPr sz="800" b="0">
+                          <a:solidFill>
+                            <a:srgbClr val="333333"/>
+                          </a:solidFill>
+                          <a:latin typeface="メイリオ"/>
+                          <a:ea typeface="メイリオ"/>
+                          <a:cs typeface="メイリオ"/>
+                        </a:rPr>
+                        <a:t>サンクスLINE
+に含む</a:t>
                       </a:r>
                     </a:p>
                   </a:txBody>
@@ -5467,7 +5729,7 @@
                   </a:tcPr>
                 </a:tc>
               </a:tr>
-              <a:tr h="360000">
+              <a:tr h="406800">
                 <a:tc>
                   <a:txBody>
                     <a:bodyPr wrap="square" lIns="43200" rIns="43200" tIns="7200" bIns="7200" anchor="ctr"/>
@@ -5475,7 +5737,7 @@
                     <a:p>
                       <a:pPr algn="ctr"/>
                       <a:r>
-                        <a:rPr sz="850" b="0">
+                        <a:rPr sz="800" b="0">
                           <a:solidFill>
                             <a:srgbClr val="333333"/>
                           </a:solidFill>
@@ -5500,7 +5762,7 @@
                     <a:p>
                       <a:pPr algn="ctr"/>
                       <a:r>
-                        <a:rPr sz="850" b="0">
+                        <a:rPr sz="800" b="0">
                           <a:solidFill>
                             <a:srgbClr val="333333"/>
                           </a:solidFill>
@@ -5508,7 +5770,7 @@
                           <a:ea typeface="メイリオ"/>
                           <a:cs typeface="メイリオ"/>
                         </a:rPr>
-                        <a:t>ステップ</a:t>
+                        <a:t>企画配信</a:t>
                       </a:r>
                     </a:p>
                   </a:txBody>
@@ -5525,7 +5787,7 @@
                     <a:p>
                       <a:pPr algn="ctr"/>
                       <a:r>
-                        <a:rPr sz="850" b="0">
+                        <a:rPr sz="800" b="0">
                           <a:solidFill>
                             <a:srgbClr val="333333"/>
                           </a:solidFill>
@@ -5533,7 +5795,7 @@
                           <a:ea typeface="メイリオ"/>
                           <a:cs typeface="メイリオ"/>
                         </a:rPr>
-                        <a:t>面談前日・当日</a:t>
+                        <a:t>―</a:t>
                       </a:r>
                     </a:p>
                   </a:txBody>
@@ -5550,7 +5812,7 @@
                     <a:p>
                       <a:pPr algn="l"/>
                       <a:r>
-                        <a:rPr sz="850" b="0">
+                        <a:rPr sz="800" b="0">
                           <a:solidFill>
                             <a:srgbClr val="333333"/>
                           </a:solidFill>
@@ -5558,7 +5820,7 @@
                           <a:ea typeface="メイリオ"/>
                           <a:cs typeface="メイリオ"/>
                         </a:rPr>
-                        <a:t>面談予定の方</a:t>
+                        <a:t>送らない</a:t>
                       </a:r>
                     </a:p>
                   </a:txBody>
@@ -5575,7 +5837,7 @@
                     <a:p>
                       <a:pPr algn="l"/>
                       <a:r>
-                        <a:rPr sz="850" b="0">
+                        <a:rPr sz="800" b="0">
                           <a:solidFill>
                             <a:srgbClr val="333333"/>
                           </a:solidFill>
@@ -5583,7 +5845,8 @@
                           <a:ea typeface="メイリオ"/>
                           <a:cs typeface="メイリオ"/>
                         </a:rPr>
-                        <a:t>日時・場所・持ち物のご案内（無断キャンセルを防ぐ）</a:t>
+                        <a:t>応募済みの方に
+求人の案内は送らない</a:t>
                       </a:r>
                     </a:p>
                   </a:txBody>
@@ -5600,7 +5863,7 @@
                     <a:p>
                       <a:pPr algn="ctr"/>
                       <a:r>
-                        <a:rPr sz="850" b="0">
+                        <a:rPr sz="800" b="0">
                           <a:solidFill>
                             <a:srgbClr val="333333"/>
                           </a:solidFill>
@@ -5625,7 +5888,7 @@
                     <a:p>
                       <a:pPr algn="ctr"/>
                       <a:r>
-                        <a:rPr sz="850" b="0">
+                        <a:rPr sz="800" b="0">
                           <a:solidFill>
                             <a:srgbClr val="333333"/>
                           </a:solidFill>
@@ -5633,7 +5896,32 @@
                           <a:ea typeface="メイリオ"/>
                           <a:cs typeface="メイリオ"/>
                         </a:rPr>
-                        <a:t>対象外</a:t>
+                        <a:t>―</a:t>
+                      </a:r>
+                    </a:p>
+                  </a:txBody>
+                  <a:tcPr anchor="ctr">
+                    <a:solidFill>
+                      <a:srgbClr val="F4F7FF"/>
+                    </a:solidFill>
+                  </a:tcPr>
+                </a:tc>
+                <a:tc>
+                  <a:txBody>
+                    <a:bodyPr wrap="square" lIns="43200" rIns="43200" tIns="7200" bIns="7200" anchor="ctr"/>
+                    <a:lstStyle/>
+                    <a:p>
+                      <a:pPr algn="ctr"/>
+                      <a:r>
+                        <a:rPr sz="800" b="0">
+                          <a:solidFill>
+                            <a:srgbClr val="333333"/>
+                          </a:solidFill>
+                          <a:latin typeface="メイリオ"/>
+                          <a:ea typeface="メイリオ"/>
+                          <a:cs typeface="メイリオ"/>
+                        </a:rPr>
+                        <a:t>―</a:t>
                       </a:r>
                     </a:p>
                   </a:txBody>
@@ -5644,7 +5932,7 @@
                   </a:tcPr>
                 </a:tc>
               </a:tr>
-              <a:tr h="360000">
+              <a:tr h="406800">
                 <a:tc>
                   <a:txBody>
                     <a:bodyPr wrap="square" lIns="43200" rIns="43200" tIns="7200" bIns="7200" anchor="ctr"/>
@@ -5652,7 +5940,7 @@
                     <a:p>
                       <a:pPr algn="ctr"/>
                       <a:r>
-                        <a:rPr sz="850" b="0">
+                        <a:rPr sz="800" b="1">
                           <a:solidFill>
                             <a:srgbClr val="333333"/>
                           </a:solidFill>
@@ -5660,7 +5948,7 @@
                           <a:ea typeface="メイリオ"/>
                           <a:cs typeface="メイリオ"/>
                         </a:rPr>
-                        <a:t>02</a:t>
+                        <a:t/>
                       </a:r>
                     </a:p>
                   </a:txBody>
@@ -5677,7 +5965,7 @@
                     <a:p>
                       <a:pPr algn="ctr"/>
                       <a:r>
-                        <a:rPr sz="850" b="0">
+                        <a:rPr sz="800" b="1">
                           <a:solidFill>
                             <a:srgbClr val="333333"/>
                           </a:solidFill>
@@ -5685,7 +5973,7 @@
                           <a:ea typeface="メイリオ"/>
                           <a:cs typeface="メイリオ"/>
                         </a:rPr>
-                        <a:t>企画配信</a:t>
+                        <a:t>合計</a:t>
                       </a:r>
                     </a:p>
                   </a:txBody>
@@ -5702,7 +5990,7 @@
                     <a:p>
                       <a:pPr algn="ctr"/>
                       <a:r>
-                        <a:rPr sz="850" b="0">
+                        <a:rPr sz="800" b="1">
                           <a:solidFill>
                             <a:srgbClr val="333333"/>
                           </a:solidFill>
@@ -5710,7 +5998,7 @@
                           <a:ea typeface="メイリオ"/>
                           <a:cs typeface="メイリオ"/>
                         </a:rPr>
-                        <a:t>―</a:t>
+                        <a:t/>
                       </a:r>
                     </a:p>
                   </a:txBody>
@@ -5727,7 +6015,7 @@
                     <a:p>
                       <a:pPr algn="l"/>
                       <a:r>
-                        <a:rPr sz="850" b="0">
+                        <a:rPr sz="800" b="1">
                           <a:solidFill>
                             <a:srgbClr val="333333"/>
                           </a:solidFill>
@@ -5735,7 +6023,7 @@
                           <a:ea typeface="メイリオ"/>
                           <a:cs typeface="メイリオ"/>
                         </a:rPr>
-                        <a:t>送らない</a:t>
+                        <a:t/>
                       </a:r>
                     </a:p>
                   </a:txBody>
@@ -5752,7 +6040,7 @@
                     <a:p>
                       <a:pPr algn="l"/>
                       <a:r>
-                        <a:rPr sz="850" b="0">
+                        <a:rPr sz="800" b="1">
                           <a:solidFill>
                             <a:srgbClr val="333333"/>
                           </a:solidFill>
@@ -5760,7 +6048,7 @@
                           <a:ea typeface="メイリオ"/>
                           <a:cs typeface="メイリオ"/>
                         </a:rPr>
-                        <a:t>応募済みの方には求人の案内を送らない</a:t>
+                        <a:t/>
                       </a:r>
                     </a:p>
                   </a:txBody>
@@ -5777,7 +6065,7 @@
                     <a:p>
                       <a:pPr algn="ctr"/>
                       <a:r>
-                        <a:rPr sz="850" b="0">
+                        <a:rPr sz="800" b="1">
                           <a:solidFill>
                             <a:srgbClr val="333333"/>
                           </a:solidFill>
@@ -5785,7 +6073,7 @@
                           <a:ea typeface="メイリオ"/>
                           <a:cs typeface="メイリオ"/>
                         </a:rPr>
-                        <a:t>―</a:t>
+                        <a:t>752回</a:t>
                       </a:r>
                     </a:p>
                   </a:txBody>
@@ -5802,15 +6090,15 @@
                     <a:p>
                       <a:pPr algn="ctr"/>
                       <a:r>
-                        <a:rPr sz="850" b="0">
+                        <a:rPr sz="800" b="1">
                           <a:solidFill>
-                            <a:srgbClr val="333333"/>
+                            <a:srgbClr val="C00000"/>
                           </a:solidFill>
                           <a:latin typeface="メイリオ"/>
                           <a:ea typeface="メイリオ"/>
                           <a:cs typeface="メイリオ"/>
                         </a:rPr>
-                        <a:t>―</a:t>
+                        <a:t>約15件</a:t>
                       </a:r>
                     </a:p>
                   </a:txBody>
@@ -5820,8 +6108,6 @@
                     </a:solidFill>
                   </a:tcPr>
                 </a:tc>
-              </a:tr>
-              <a:tr h="360000">
                 <a:tc>
                   <a:txBody>
                     <a:bodyPr wrap="square" lIns="43200" rIns="43200" tIns="7200" bIns="7200" anchor="ctr"/>
@@ -5829,7 +6115,7 @@
                     <a:p>
                       <a:pPr algn="ctr"/>
                       <a:r>
-                        <a:rPr sz="850" b="1">
+                        <a:rPr sz="800" b="1">
                           <a:solidFill>
                             <a:srgbClr val="333333"/>
                           </a:solidFill>
@@ -5843,157 +6129,7 @@
                   </a:txBody>
                   <a:tcPr anchor="ctr">
                     <a:solidFill>
-                      <a:srgbClr val="F4F7FF"/>
-                    </a:solidFill>
-                  </a:tcPr>
-                </a:tc>
-                <a:tc>
-                  <a:txBody>
-                    <a:bodyPr wrap="square" lIns="43200" rIns="43200" tIns="7200" bIns="7200" anchor="ctr"/>
-                    <a:lstStyle/>
-                    <a:p>
-                      <a:pPr algn="ctr"/>
-                      <a:r>
-                        <a:rPr sz="850" b="1">
-                          <a:solidFill>
-                            <a:srgbClr val="333333"/>
-                          </a:solidFill>
-                          <a:latin typeface="メイリオ"/>
-                          <a:ea typeface="メイリオ"/>
-                          <a:cs typeface="メイリオ"/>
-                        </a:rPr>
-                        <a:t>合計</a:t>
-                      </a:r>
-                    </a:p>
-                  </a:txBody>
-                  <a:tcPr anchor="ctr">
-                    <a:solidFill>
-                      <a:srgbClr val="F4F7FF"/>
-                    </a:solidFill>
-                  </a:tcPr>
-                </a:tc>
-                <a:tc>
-                  <a:txBody>
-                    <a:bodyPr wrap="square" lIns="43200" rIns="43200" tIns="7200" bIns="7200" anchor="ctr"/>
-                    <a:lstStyle/>
-                    <a:p>
-                      <a:pPr algn="ctr"/>
-                      <a:r>
-                        <a:rPr sz="850" b="1">
-                          <a:solidFill>
-                            <a:srgbClr val="333333"/>
-                          </a:solidFill>
-                          <a:latin typeface="メイリオ"/>
-                          <a:ea typeface="メイリオ"/>
-                          <a:cs typeface="メイリオ"/>
-                        </a:rPr>
-                        <a:t/>
-                      </a:r>
-                    </a:p>
-                  </a:txBody>
-                  <a:tcPr anchor="ctr">
-                    <a:solidFill>
-                      <a:srgbClr val="F4F7FF"/>
-                    </a:solidFill>
-                  </a:tcPr>
-                </a:tc>
-                <a:tc>
-                  <a:txBody>
-                    <a:bodyPr wrap="square" lIns="43200" rIns="43200" tIns="7200" bIns="7200" anchor="ctr"/>
-                    <a:lstStyle/>
-                    <a:p>
-                      <a:pPr algn="l"/>
-                      <a:r>
-                        <a:rPr sz="850" b="1">
-                          <a:solidFill>
-                            <a:srgbClr val="333333"/>
-                          </a:solidFill>
-                          <a:latin typeface="メイリオ"/>
-                          <a:ea typeface="メイリオ"/>
-                          <a:cs typeface="メイリオ"/>
-                        </a:rPr>
-                        <a:t/>
-                      </a:r>
-                    </a:p>
-                  </a:txBody>
-                  <a:tcPr anchor="ctr">
-                    <a:solidFill>
-                      <a:srgbClr val="F4F7FF"/>
-                    </a:solidFill>
-                  </a:tcPr>
-                </a:tc>
-                <a:tc>
-                  <a:txBody>
-                    <a:bodyPr wrap="square" lIns="43200" rIns="43200" tIns="7200" bIns="7200" anchor="ctr"/>
-                    <a:lstStyle/>
-                    <a:p>
-                      <a:pPr algn="l"/>
-                      <a:r>
-                        <a:rPr sz="850" b="1">
-                          <a:solidFill>
-                            <a:srgbClr val="333333"/>
-                          </a:solidFill>
-                          <a:latin typeface="メイリオ"/>
-                          <a:ea typeface="メイリオ"/>
-                          <a:cs typeface="メイリオ"/>
-                        </a:rPr>
-                        <a:t/>
-                      </a:r>
-                    </a:p>
-                  </a:txBody>
-                  <a:tcPr anchor="ctr">
-                    <a:solidFill>
-                      <a:srgbClr val="F4F7FF"/>
-                    </a:solidFill>
-                  </a:tcPr>
-                </a:tc>
-                <a:tc>
-                  <a:txBody>
-                    <a:bodyPr wrap="square" lIns="43200" rIns="43200" tIns="7200" bIns="7200" anchor="ctr"/>
-                    <a:lstStyle/>
-                    <a:p>
-                      <a:pPr algn="ctr"/>
-                      <a:r>
-                        <a:rPr sz="850" b="1">
-                          <a:solidFill>
-                            <a:srgbClr val="333333"/>
-                          </a:solidFill>
-                          <a:latin typeface="メイリオ"/>
-                          <a:ea typeface="メイリオ"/>
-                          <a:cs typeface="メイリオ"/>
-                        </a:rPr>
-                        <a:t/>
-                      </a:r>
-                    </a:p>
-                  </a:txBody>
-                  <a:tcPr anchor="ctr">
-                    <a:solidFill>
-                      <a:srgbClr val="F4F7FF"/>
-                    </a:solidFill>
-                  </a:tcPr>
-                </a:tc>
-                <a:tc>
-                  <a:txBody>
-                    <a:bodyPr wrap="square" lIns="43200" rIns="43200" tIns="7200" bIns="7200" anchor="ctr"/>
-                    <a:lstStyle/>
-                    <a:p>
-                      <a:pPr algn="ctr"/>
-                      <a:r>
-                        <a:rPr sz="850" b="1">
-                          <a:solidFill>
-                            <a:srgbClr val="C00000"/>
-                          </a:solidFill>
-                          <a:latin typeface="メイリオ"/>
-                          <a:ea typeface="メイリオ"/>
-                          <a:cs typeface="メイリオ"/>
-                        </a:rPr>
-                        <a:t>約15件</a:t>
-                      </a:r>
-                    </a:p>
-                  </a:txBody>
-                  <a:tcPr anchor="ctr">
-                    <a:solidFill>
-                      <a:srgbClr val="F4F7FF"/>
+                      <a:srgbClr val="FFFFFF"/>
                     </a:solidFill>
                   </a:tcPr>
                 </a:tc>
@@ -6018,8 +6154,8 @@
         </p:blipFill>
         <p:spPr>
           <a:xfrm>
-            <a:off x="7380000" y="1515600"/>
-            <a:ext cx="2095200" cy="1396800"/>
+            <a:off x="7956000" y="1527600"/>
+            <a:ext cx="1519200" cy="1012799"/>
           </a:xfrm>
           <a:prstGeom prst="rect">
             <a:avLst/>
@@ -6047,8 +6183,8 @@
         </p:blipFill>
         <p:spPr>
           <a:xfrm>
-            <a:off x="7733668" y="3006000"/>
-            <a:ext cx="1387862" cy="2466000"/>
+            <a:off x="7956000" y="2754317"/>
+            <a:ext cx="1519200" cy="2699364"/>
           </a:xfrm>
           <a:prstGeom prst="rect">
             <a:avLst/>
@@ -6068,8 +6204,8 @@
         </p:nvSpPr>
         <p:spPr>
           <a:xfrm>
-            <a:off x="432000" y="5526000"/>
-            <a:ext cx="6840000" cy="468000"/>
+            <a:off x="432000" y="5670000"/>
+            <a:ext cx="9043200" cy="503999"/>
           </a:xfrm>
           <a:prstGeom prst="rect">
             <a:avLst/>
@@ -6088,7 +6224,7 @@
               </a:lnSpc>
             </a:pPr>
             <a:r>
-              <a:rPr sz="950">
+              <a:rPr sz="900">
                 <a:solidFill>
                   <a:srgbClr val="333333"/>
                 </a:solidFill>
@@ -6096,7 +6232,7 @@
                 <a:ea typeface="メイリオ"/>
                 <a:cs typeface="メイリオ"/>
               </a:rPr>
-              <a:t>ステップの中身（例）：1日後 職種の違い → 2日後 働き方 → 3日後 求人のご案内① → 5日後 他の職種との比較 → 7日後 資格別の年収 → 10日後 現場の様子 → 14日後 求人のご案内②</a:t>
+              <a:t>ステップの中身（全10通の例）：0日 あいさつ・職種を聞く → 1日 職種の違い → 2日 働き方 → 3日 求人のご案内① → 4日 資格取得支援 → 5日 他の職種との比較 → 7日 資格別の年収 → 10日 現場の様子 → 12日 地域別の新着求人 → 14日 求人のご案内②</a:t>
             </a:r>
           </a:p>
         </p:txBody>
@@ -6137,7 +6273,7 @@
                 <a:ea typeface="メイリオ"/>
                 <a:cs typeface="メイリオ"/>
               </a:rPr>
-              <a:t>※件数は9月の応募数15件を、動線ごとの友だち数とクリック数の比率で振り分けたもの（反応率の補正・複数回のクリックを含むため、掛け算の結果とは一致しません）／配信・リッチメニューの作成はコンサル費（月20万円）に含む／画面はイメージです</a:t>
+              <a:t>※クリック数はSIM ver2.6の9月の値を、動線ごとの友だち数（離脱防止29%・LINEで登録71%）と配信ごとのクリック比率で振り分けたもの。反応率の補正（1.46倍）と複数回のクリック（2.05倍）を含むため、対象×開封率×クリック率の単純な掛け算とは一致しません／コンサル費＝月20万円（初期20万円）、サンクスLINE＝月5万円（初期10万円）／画面はイメージです</a:t>
             </a:r>
           </a:p>
         </p:txBody>

--- a/20260929_チェングロウス_LINE施策のビジュアル（①〜④）ver1.1.pptx
+++ b/20260929_チェングロウス_LINE施策のビジュアル（①〜④）ver1.1.pptx
@@ -5717,7 +5717,7 @@
                           <a:ea typeface="メイリオ"/>
                           <a:cs typeface="メイリオ"/>
                         </a:rPr>
-                        <a:t>サンクスLINE
+                        <a:t>コンサル費
 に含む</a:t>
                       </a:r>
                     </a:p>
@@ -6273,7 +6273,7 @@
                 <a:ea typeface="メイリオ"/>
                 <a:cs typeface="メイリオ"/>
               </a:rPr>
-              <a:t>※クリック数はSIM ver2.6の9月の値を、動線ごとの友だち数（離脱防止29%・LINEで登録71%）と配信ごとのクリック比率で振り分けたもの。反応率の補正（1.46倍）と複数回のクリック（2.05倍）を含むため、対象×開封率×クリック率の単純な掛け算とは一致しません／コンサル費＝月20万円（初期20万円）、サンクスLINE＝月5万円（初期10万円）／画面はイメージです</a:t>
+              <a:t>※クリック数はSIM ver2.6の9月の値を、動線ごとの友だち数（離脱防止29%・LINEで登録71%）と配信ごとのクリック比率で振り分けたもの。反応率の補正（1.46倍）と複数回のクリック（2.05倍）を含むため、対象×開封率×クリック率の単純な掛け算とは一致しません／コンサル費＝月20万円（初期20万円）、サンクスLINE（完了画面からの友だち追加の仕組み）＝月5万円（初期10万円）／画面はイメージです</a:t>
             </a:r>
           </a:p>
         </p:txBody>

--- a/20260929_チェングロウス_LINE施策のビジュアル（①〜④）ver1.1.pptx
+++ b/20260929_チェングロウス_LINE施策のビジュアル（①〜④）ver1.1.pptx
@@ -6,16 +6,16 @@
     <p:sldMasterId id="2147483687" r:id="rId2"/>
   </p:sldMasterIdLst>
   <p:notesMasterIdLst>
-    <p:notesMasterId r:id="rId26"/>
+    <p:notesMasterId r:id="rId7"/>
   </p:notesMasterIdLst>
   <p:handoutMasterIdLst>
-    <p:handoutMasterId r:id="rId27"/>
+    <p:handoutMasterId r:id="rId8"/>
   </p:handoutMasterIdLst>
   <p:sldIdLst>
-    <p:sldId id="2977" r:id="rId13"/>
-    <p:sldId id="2979" r:id="rId14"/>
-    <p:sldId id="3000" r:id="rId15"/>
-    <p:sldId id="2968" r:id="rId16"/>
+    <p:sldId id="2977" r:id="rId3"/>
+    <p:sldId id="2979" r:id="rId4"/>
+    <p:sldId id="3000" r:id="rId5"/>
+    <p:sldId id="2968" r:id="rId6"/>
   </p:sldIdLst>
   <p:sldSz cx="9906000" cy="6858000" type="A4"/>
   <p:notesSz cx="6807200" cy="9939338"/>
@@ -616,7 +616,223 @@
 </p:notesMaster>
 </file>
 
-<file path=ppt/notesSlides/notesSlide10.xml><?xml version="1.0" encoding="utf-8"?>
+<file path=ppt/notesSlides/notesSlide1.xml><?xml version="1.0" encoding="utf-8"?>
+<p:notes xmlns:a="http://schemas.openxmlformats.org/drawingml/2006/main" xmlns:r="http://schemas.openxmlformats.org/officeDocument/2006/relationships" xmlns:p="http://schemas.openxmlformats.org/presentationml/2006/main">
+  <p:cSld>
+    <p:spTree>
+      <p:nvGrpSpPr>
+        <p:cNvPr id="1" name="">
+          <a:extLst>
+            <a:ext uri="{FF2B5EF4-FFF2-40B4-BE49-F238E27FC236}">
+              <a16:creationId xmlns:a16="http://schemas.microsoft.com/office/drawing/2014/main" id="{2C2C3D0E-521D-4421-8E6F-5B072E39273D}"/>
+            </a:ext>
+          </a:extLst>
+        </p:cNvPr>
+        <p:cNvGrpSpPr/>
+        <p:nvPr/>
+      </p:nvGrpSpPr>
+      <p:grpSpPr>
+        <a:xfrm>
+          <a:off x="0" y="0"/>
+          <a:ext cx="0" cy="0"/>
+          <a:chOff x="0" y="0"/>
+          <a:chExt cx="0" cy="0"/>
+        </a:xfrm>
+      </p:grpSpPr>
+      <p:sp>
+        <p:nvSpPr>
+          <p:cNvPr id="2" name="スライド イメージ プレースホルダー 1">
+            <a:extLst>
+              <a:ext uri="{FF2B5EF4-FFF2-40B4-BE49-F238E27FC236}">
+                <a16:creationId xmlns:a16="http://schemas.microsoft.com/office/drawing/2014/main" id="{8DA4E99E-E573-FB69-824A-6A64B973F185}"/>
+              </a:ext>
+            </a:extLst>
+          </p:cNvPr>
+          <p:cNvSpPr>
+            <a:spLocks noGrp="1" noRot="1" noChangeAspect="1"/>
+          </p:cNvSpPr>
+          <p:nvPr>
+            <p:ph type="sldImg"/>
+          </p:nvPr>
+        </p:nvSpPr>
+        <p:spPr/>
+      </p:sp>
+      <p:sp>
+        <p:nvSpPr>
+          <p:cNvPr id="3" name="ノート プレースホルダー 2">
+            <a:extLst>
+              <a:ext uri="{FF2B5EF4-FFF2-40B4-BE49-F238E27FC236}">
+                <a16:creationId xmlns:a16="http://schemas.microsoft.com/office/drawing/2014/main" id="{3C7418EF-CD86-6501-70F8-B9DD0191527F}"/>
+              </a:ext>
+            </a:extLst>
+          </p:cNvPr>
+          <p:cNvSpPr>
+            <a:spLocks noGrp="1"/>
+          </p:cNvSpPr>
+          <p:nvPr>
+            <p:ph type="body" idx="1"/>
+          </p:nvPr>
+        </p:nvSpPr>
+        <p:spPr/>
+        <p:txBody>
+          <a:bodyPr/>
+          <a:lstStyle/>
+          <a:p>
+            <a:endParaRPr kumimoji="1" lang="ja-JP" altLang="en-US" dirty="0"/>
+          </a:p>
+        </p:txBody>
+      </p:sp>
+      <p:sp>
+        <p:nvSpPr>
+          <p:cNvPr id="4" name="スライド番号プレースホルダー 3">
+            <a:extLst>
+              <a:ext uri="{FF2B5EF4-FFF2-40B4-BE49-F238E27FC236}">
+                <a16:creationId xmlns:a16="http://schemas.microsoft.com/office/drawing/2014/main" id="{3CB86D95-C452-2BDC-5841-170929F80D7E}"/>
+              </a:ext>
+            </a:extLst>
+          </p:cNvPr>
+          <p:cNvSpPr>
+            <a:spLocks noGrp="1"/>
+          </p:cNvSpPr>
+          <p:nvPr>
+            <p:ph type="sldNum" sz="quarter" idx="10"/>
+          </p:nvPr>
+        </p:nvSpPr>
+        <p:spPr/>
+        <p:txBody>
+          <a:bodyPr/>
+          <a:lstStyle/>
+          <a:p>
+            <a:fld id="{022E43C0-6795-4B13-B37C-259C826D4B6A}" type="slidenum">
+              <a:rPr kumimoji="1" lang="ja-JP" altLang="en-US" smtClean="0"/>
+              <a:t>1</a:t>
+            </a:fld>
+            <a:endParaRPr kumimoji="1" lang="ja-JP" altLang="en-US"/>
+          </a:p>
+        </p:txBody>
+      </p:sp>
+    </p:spTree>
+    <p:extLst>
+      <p:ext uri="{BB962C8B-B14F-4D97-AF65-F5344CB8AC3E}">
+        <p14:creationId xmlns:p14="http://schemas.microsoft.com/office/powerpoint/2010/main" val="3994786465"/>
+      </p:ext>
+    </p:extLst>
+  </p:cSld>
+  <p:clrMapOvr>
+    <a:masterClrMapping/>
+  </p:clrMapOvr>
+</p:notes>
+</file>
+
+<file path=ppt/notesSlides/notesSlide2.xml><?xml version="1.0" encoding="utf-8"?>
+<p:notes xmlns:a="http://schemas.openxmlformats.org/drawingml/2006/main" xmlns:r="http://schemas.openxmlformats.org/officeDocument/2006/relationships" xmlns:p="http://schemas.openxmlformats.org/presentationml/2006/main">
+  <p:cSld>
+    <p:spTree>
+      <p:nvGrpSpPr>
+        <p:cNvPr id="1" name="">
+          <a:extLst>
+            <a:ext uri="{FF2B5EF4-FFF2-40B4-BE49-F238E27FC236}">
+              <a16:creationId xmlns:a16="http://schemas.microsoft.com/office/drawing/2014/main" id="{8A11E9D4-0876-C25C-8529-8B74AB559B8E}"/>
+            </a:ext>
+          </a:extLst>
+        </p:cNvPr>
+        <p:cNvGrpSpPr/>
+        <p:nvPr/>
+      </p:nvGrpSpPr>
+      <p:grpSpPr>
+        <a:xfrm>
+          <a:off x="0" y="0"/>
+          <a:ext cx="0" cy="0"/>
+          <a:chOff x="0" y="0"/>
+          <a:chExt cx="0" cy="0"/>
+        </a:xfrm>
+      </p:grpSpPr>
+      <p:sp>
+        <p:nvSpPr>
+          <p:cNvPr id="2" name="スライド イメージ プレースホルダー 1">
+            <a:extLst>
+              <a:ext uri="{FF2B5EF4-FFF2-40B4-BE49-F238E27FC236}">
+                <a16:creationId xmlns:a16="http://schemas.microsoft.com/office/drawing/2014/main" id="{5CF43F49-5B7A-3752-251E-82690E66FE6F}"/>
+              </a:ext>
+            </a:extLst>
+          </p:cNvPr>
+          <p:cNvSpPr>
+            <a:spLocks noGrp="1" noRot="1" noChangeAspect="1"/>
+          </p:cNvSpPr>
+          <p:nvPr>
+            <p:ph type="sldImg"/>
+          </p:nvPr>
+        </p:nvSpPr>
+        <p:spPr/>
+      </p:sp>
+      <p:sp>
+        <p:nvSpPr>
+          <p:cNvPr id="3" name="ノート プレースホルダー 2">
+            <a:extLst>
+              <a:ext uri="{FF2B5EF4-FFF2-40B4-BE49-F238E27FC236}">
+                <a16:creationId xmlns:a16="http://schemas.microsoft.com/office/drawing/2014/main" id="{35863D13-39F9-D392-9C29-D9EAD3D1EA4D}"/>
+              </a:ext>
+            </a:extLst>
+          </p:cNvPr>
+          <p:cNvSpPr>
+            <a:spLocks noGrp="1"/>
+          </p:cNvSpPr>
+          <p:nvPr>
+            <p:ph type="body" idx="1"/>
+          </p:nvPr>
+        </p:nvSpPr>
+        <p:spPr/>
+        <p:txBody>
+          <a:bodyPr/>
+          <a:lstStyle/>
+          <a:p>
+            <a:endParaRPr kumimoji="1" lang="ja-JP" altLang="en-US" dirty="0"/>
+          </a:p>
+        </p:txBody>
+      </p:sp>
+      <p:sp>
+        <p:nvSpPr>
+          <p:cNvPr id="4" name="スライド番号プレースホルダー 3">
+            <a:extLst>
+              <a:ext uri="{FF2B5EF4-FFF2-40B4-BE49-F238E27FC236}">
+                <a16:creationId xmlns:a16="http://schemas.microsoft.com/office/drawing/2014/main" id="{073CE111-A992-AC9F-119C-E1210F4D3DD7}"/>
+              </a:ext>
+            </a:extLst>
+          </p:cNvPr>
+          <p:cNvSpPr>
+            <a:spLocks noGrp="1"/>
+          </p:cNvSpPr>
+          <p:nvPr>
+            <p:ph type="sldNum" sz="quarter" idx="10"/>
+          </p:nvPr>
+        </p:nvSpPr>
+        <p:spPr/>
+        <p:txBody>
+          <a:bodyPr/>
+          <a:lstStyle/>
+          <a:p>
+            <a:fld id="{022E43C0-6795-4B13-B37C-259C826D4B6A}" type="slidenum">
+              <a:rPr kumimoji="1" lang="ja-JP" altLang="en-US" smtClean="0"/>
+              <a:t>2</a:t>
+            </a:fld>
+            <a:endParaRPr kumimoji="1" lang="ja-JP" altLang="en-US"/>
+          </a:p>
+        </p:txBody>
+      </p:sp>
+    </p:spTree>
+    <p:extLst>
+      <p:ext uri="{BB962C8B-B14F-4D97-AF65-F5344CB8AC3E}">
+        <p14:creationId xmlns:p14="http://schemas.microsoft.com/office/powerpoint/2010/main" val="1158505943"/>
+      </p:ext>
+    </p:extLst>
+  </p:cSld>
+  <p:clrMapOvr>
+    <a:masterClrMapping/>
+  </p:clrMapOvr>
+</p:notes>
+</file>
+
+<file path=ppt/notesSlides/notesSlide3.xml><?xml version="1.0" encoding="utf-8"?>
 <p:notes xmlns:a="http://schemas.openxmlformats.org/drawingml/2006/main" xmlns:r="http://schemas.openxmlformats.org/officeDocument/2006/relationships" xmlns:p="http://schemas.openxmlformats.org/presentationml/2006/main">
   <p:cSld>
     <p:spTree>
@@ -705,7 +921,7 @@
           <a:p>
             <a:fld id="{022E43C0-6795-4B13-B37C-259C826D4B6A}" type="slidenum">
               <a:rPr kumimoji="1" lang="ja-JP" altLang="en-US" smtClean="0"/>
-              <a:t>13</a:t>
+              <a:t>3</a:t>
             </a:fld>
             <a:endParaRPr kumimoji="1" lang="ja-JP" altLang="en-US"/>
           </a:p>
@@ -715,222 +931,6 @@
     <p:extLst>
       <p:ext uri="{BB962C8B-B14F-4D97-AF65-F5344CB8AC3E}">
         <p14:creationId xmlns:p14="http://schemas.microsoft.com/office/powerpoint/2010/main" val="2829730440"/>
-      </p:ext>
-    </p:extLst>
-  </p:cSld>
-  <p:clrMapOvr>
-    <a:masterClrMapping/>
-  </p:clrMapOvr>
-</p:notes>
-</file>
-
-<file path=ppt/notesSlides/notesSlide8.xml><?xml version="1.0" encoding="utf-8"?>
-<p:notes xmlns:a="http://schemas.openxmlformats.org/drawingml/2006/main" xmlns:r="http://schemas.openxmlformats.org/officeDocument/2006/relationships" xmlns:p="http://schemas.openxmlformats.org/presentationml/2006/main">
-  <p:cSld>
-    <p:spTree>
-      <p:nvGrpSpPr>
-        <p:cNvPr id="1" name="">
-          <a:extLst>
-            <a:ext uri="{FF2B5EF4-FFF2-40B4-BE49-F238E27FC236}">
-              <a16:creationId xmlns:a16="http://schemas.microsoft.com/office/drawing/2014/main" id="{2C2C3D0E-521D-4421-8E6F-5B072E39273D}"/>
-            </a:ext>
-          </a:extLst>
-        </p:cNvPr>
-        <p:cNvGrpSpPr/>
-        <p:nvPr/>
-      </p:nvGrpSpPr>
-      <p:grpSpPr>
-        <a:xfrm>
-          <a:off x="0" y="0"/>
-          <a:ext cx="0" cy="0"/>
-          <a:chOff x="0" y="0"/>
-          <a:chExt cx="0" cy="0"/>
-        </a:xfrm>
-      </p:grpSpPr>
-      <p:sp>
-        <p:nvSpPr>
-          <p:cNvPr id="2" name="スライド イメージ プレースホルダー 1">
-            <a:extLst>
-              <a:ext uri="{FF2B5EF4-FFF2-40B4-BE49-F238E27FC236}">
-                <a16:creationId xmlns:a16="http://schemas.microsoft.com/office/drawing/2014/main" id="{8DA4E99E-E573-FB69-824A-6A64B973F185}"/>
-              </a:ext>
-            </a:extLst>
-          </p:cNvPr>
-          <p:cNvSpPr>
-            <a:spLocks noGrp="1" noRot="1" noChangeAspect="1"/>
-          </p:cNvSpPr>
-          <p:nvPr>
-            <p:ph type="sldImg"/>
-          </p:nvPr>
-        </p:nvSpPr>
-        <p:spPr/>
-      </p:sp>
-      <p:sp>
-        <p:nvSpPr>
-          <p:cNvPr id="3" name="ノート プレースホルダー 2">
-            <a:extLst>
-              <a:ext uri="{FF2B5EF4-FFF2-40B4-BE49-F238E27FC236}">
-                <a16:creationId xmlns:a16="http://schemas.microsoft.com/office/drawing/2014/main" id="{3C7418EF-CD86-6501-70F8-B9DD0191527F}"/>
-              </a:ext>
-            </a:extLst>
-          </p:cNvPr>
-          <p:cNvSpPr>
-            <a:spLocks noGrp="1"/>
-          </p:cNvSpPr>
-          <p:nvPr>
-            <p:ph type="body" idx="1"/>
-          </p:nvPr>
-        </p:nvSpPr>
-        <p:spPr/>
-        <p:txBody>
-          <a:bodyPr/>
-          <a:lstStyle/>
-          <a:p>
-            <a:endParaRPr kumimoji="1" lang="ja-JP" altLang="en-US" dirty="0"/>
-          </a:p>
-        </p:txBody>
-      </p:sp>
-      <p:sp>
-        <p:nvSpPr>
-          <p:cNvPr id="4" name="スライド番号プレースホルダー 3">
-            <a:extLst>
-              <a:ext uri="{FF2B5EF4-FFF2-40B4-BE49-F238E27FC236}">
-                <a16:creationId xmlns:a16="http://schemas.microsoft.com/office/drawing/2014/main" id="{3CB86D95-C452-2BDC-5841-170929F80D7E}"/>
-              </a:ext>
-            </a:extLst>
-          </p:cNvPr>
-          <p:cNvSpPr>
-            <a:spLocks noGrp="1"/>
-          </p:cNvSpPr>
-          <p:nvPr>
-            <p:ph type="sldNum" sz="quarter" idx="10"/>
-          </p:nvPr>
-        </p:nvSpPr>
-        <p:spPr/>
-        <p:txBody>
-          <a:bodyPr/>
-          <a:lstStyle/>
-          <a:p>
-            <a:fld id="{022E43C0-6795-4B13-B37C-259C826D4B6A}" type="slidenum">
-              <a:rPr kumimoji="1" lang="ja-JP" altLang="en-US" smtClean="0"/>
-              <a:t>11</a:t>
-            </a:fld>
-            <a:endParaRPr kumimoji="1" lang="ja-JP" altLang="en-US"/>
-          </a:p>
-        </p:txBody>
-      </p:sp>
-    </p:spTree>
-    <p:extLst>
-      <p:ext uri="{BB962C8B-B14F-4D97-AF65-F5344CB8AC3E}">
-        <p14:creationId xmlns:p14="http://schemas.microsoft.com/office/powerpoint/2010/main" val="3994786465"/>
-      </p:ext>
-    </p:extLst>
-  </p:cSld>
-  <p:clrMapOvr>
-    <a:masterClrMapping/>
-  </p:clrMapOvr>
-</p:notes>
-</file>
-
-<file path=ppt/notesSlides/notesSlide9.xml><?xml version="1.0" encoding="utf-8"?>
-<p:notes xmlns:a="http://schemas.openxmlformats.org/drawingml/2006/main" xmlns:r="http://schemas.openxmlformats.org/officeDocument/2006/relationships" xmlns:p="http://schemas.openxmlformats.org/presentationml/2006/main">
-  <p:cSld>
-    <p:spTree>
-      <p:nvGrpSpPr>
-        <p:cNvPr id="1" name="">
-          <a:extLst>
-            <a:ext uri="{FF2B5EF4-FFF2-40B4-BE49-F238E27FC236}">
-              <a16:creationId xmlns:a16="http://schemas.microsoft.com/office/drawing/2014/main" id="{8A11E9D4-0876-C25C-8529-8B74AB559B8E}"/>
-            </a:ext>
-          </a:extLst>
-        </p:cNvPr>
-        <p:cNvGrpSpPr/>
-        <p:nvPr/>
-      </p:nvGrpSpPr>
-      <p:grpSpPr>
-        <a:xfrm>
-          <a:off x="0" y="0"/>
-          <a:ext cx="0" cy="0"/>
-          <a:chOff x="0" y="0"/>
-          <a:chExt cx="0" cy="0"/>
-        </a:xfrm>
-      </p:grpSpPr>
-      <p:sp>
-        <p:nvSpPr>
-          <p:cNvPr id="2" name="スライド イメージ プレースホルダー 1">
-            <a:extLst>
-              <a:ext uri="{FF2B5EF4-FFF2-40B4-BE49-F238E27FC236}">
-                <a16:creationId xmlns:a16="http://schemas.microsoft.com/office/drawing/2014/main" id="{5CF43F49-5B7A-3752-251E-82690E66FE6F}"/>
-              </a:ext>
-            </a:extLst>
-          </p:cNvPr>
-          <p:cNvSpPr>
-            <a:spLocks noGrp="1" noRot="1" noChangeAspect="1"/>
-          </p:cNvSpPr>
-          <p:nvPr>
-            <p:ph type="sldImg"/>
-          </p:nvPr>
-        </p:nvSpPr>
-        <p:spPr/>
-      </p:sp>
-      <p:sp>
-        <p:nvSpPr>
-          <p:cNvPr id="3" name="ノート プレースホルダー 2">
-            <a:extLst>
-              <a:ext uri="{FF2B5EF4-FFF2-40B4-BE49-F238E27FC236}">
-                <a16:creationId xmlns:a16="http://schemas.microsoft.com/office/drawing/2014/main" id="{35863D13-39F9-D392-9C29-D9EAD3D1EA4D}"/>
-              </a:ext>
-            </a:extLst>
-          </p:cNvPr>
-          <p:cNvSpPr>
-            <a:spLocks noGrp="1"/>
-          </p:cNvSpPr>
-          <p:nvPr>
-            <p:ph type="body" idx="1"/>
-          </p:nvPr>
-        </p:nvSpPr>
-        <p:spPr/>
-        <p:txBody>
-          <a:bodyPr/>
-          <a:lstStyle/>
-          <a:p>
-            <a:endParaRPr kumimoji="1" lang="ja-JP" altLang="en-US" dirty="0"/>
-          </a:p>
-        </p:txBody>
-      </p:sp>
-      <p:sp>
-        <p:nvSpPr>
-          <p:cNvPr id="4" name="スライド番号プレースホルダー 3">
-            <a:extLst>
-              <a:ext uri="{FF2B5EF4-FFF2-40B4-BE49-F238E27FC236}">
-                <a16:creationId xmlns:a16="http://schemas.microsoft.com/office/drawing/2014/main" id="{073CE111-A992-AC9F-119C-E1210F4D3DD7}"/>
-              </a:ext>
-            </a:extLst>
-          </p:cNvPr>
-          <p:cNvSpPr>
-            <a:spLocks noGrp="1"/>
-          </p:cNvSpPr>
-          <p:nvPr>
-            <p:ph type="sldNum" sz="quarter" idx="10"/>
-          </p:nvPr>
-        </p:nvSpPr>
-        <p:spPr/>
-        <p:txBody>
-          <a:bodyPr/>
-          <a:lstStyle/>
-          <a:p>
-            <a:fld id="{022E43C0-6795-4B13-B37C-259C826D4B6A}" type="slidenum">
-              <a:rPr kumimoji="1" lang="ja-JP" altLang="en-US" smtClean="0"/>
-              <a:t>12</a:t>
-            </a:fld>
-            <a:endParaRPr kumimoji="1" lang="ja-JP" altLang="en-US"/>
-          </a:p>
-        </p:txBody>
-      </p:sp>
-    </p:spTree>
-    <p:extLst>
-      <p:ext uri="{BB962C8B-B14F-4D97-AF65-F5344CB8AC3E}">
-        <p14:creationId xmlns:p14="http://schemas.microsoft.com/office/powerpoint/2010/main" val="1158505943"/>
       </p:ext>
     </p:extLst>
   </p:cSld>
@@ -2966,7 +2966,7 @@
 </p:sldMaster>
 </file>
 
-<file path=ppt/slides/slide11.xml><?xml version="1.0" encoding="utf-8"?>
+<file path=ppt/slides/slide1.xml><?xml version="1.0" encoding="utf-8"?>
 <p:sld xmlns:a="http://schemas.openxmlformats.org/drawingml/2006/main" xmlns:r="http://schemas.openxmlformats.org/officeDocument/2006/relationships" xmlns:p="http://schemas.openxmlformats.org/presentationml/2006/main">
   <p:cSld>
     <p:spTree>
@@ -3006,7 +3006,7 @@
           <a:noFill/>
         </p:spPr>
         <p:txBody>
-          <a:bodyPr wrap="square" lIns="0" rIns="0" tIns="21600" bIns="21600" anchor="ctr">
+          <a:bodyPr wrap="square" lIns="0" tIns="21600" rIns="0" bIns="21600" anchor="ctr">
             <a:spAutoFit/>
           </a:bodyPr>
           <a:lstStyle/>
@@ -3034,8 +3034,8 @@
         </p:nvSpPr>
         <p:spPr>
           <a:xfrm>
-            <a:off x="432000" y="648000"/>
-            <a:ext cx="9036000" cy="684000"/>
+            <a:off x="432000" y="850368"/>
+            <a:ext cx="9036000" cy="279264"/>
           </a:xfrm>
           <a:prstGeom prst="rect">
             <a:avLst/>
@@ -3043,7 +3043,7 @@
           <a:noFill/>
         </p:spPr>
         <p:txBody>
-          <a:bodyPr wrap="square" lIns="0" rIns="0" tIns="21600" bIns="21600" anchor="ctr">
+          <a:bodyPr wrap="square" lIns="0" tIns="21600" rIns="0" bIns="21600" anchor="ctr">
             <a:spAutoFit/>
           </a:bodyPr>
           <a:lstStyle/>
@@ -3054,7 +3054,7 @@
               </a:lnSpc>
             </a:pPr>
             <a:r>
-              <a:rPr sz="1250">
+              <a:rPr sz="1250" dirty="0">
                 <a:solidFill>
                   <a:srgbClr val="333333"/>
                 </a:solidFill>
@@ -3062,7 +3062,95 @@
                 <a:ea typeface="メイリオ"/>
                 <a:cs typeface="メイリオ"/>
               </a:rPr>
-              <a:t>（箇所）→ 訴求 → LINE追加　※費用（月額／初期）。人数はシミュレーション（SIM ver2.6）の9月時点。</a:t>
+              <a:t>（</a:t>
+            </a:r>
+            <a:r>
+              <a:rPr sz="1250" dirty="0" err="1">
+                <a:solidFill>
+                  <a:srgbClr val="333333"/>
+                </a:solidFill>
+                <a:latin typeface="メイリオ"/>
+                <a:ea typeface="メイリオ"/>
+                <a:cs typeface="メイリオ"/>
+              </a:rPr>
+              <a:t>箇所</a:t>
+            </a:r>
+            <a:r>
+              <a:rPr sz="1250" dirty="0">
+                <a:solidFill>
+                  <a:srgbClr val="333333"/>
+                </a:solidFill>
+                <a:latin typeface="メイリオ"/>
+                <a:ea typeface="メイリオ"/>
+                <a:cs typeface="メイリオ"/>
+              </a:rPr>
+              <a:t>）→ </a:t>
+            </a:r>
+            <a:r>
+              <a:rPr sz="1250" dirty="0" err="1">
+                <a:solidFill>
+                  <a:srgbClr val="333333"/>
+                </a:solidFill>
+                <a:latin typeface="メイリオ"/>
+                <a:ea typeface="メイリオ"/>
+                <a:cs typeface="メイリオ"/>
+              </a:rPr>
+              <a:t>訴求</a:t>
+            </a:r>
+            <a:r>
+              <a:rPr sz="1250" dirty="0">
+                <a:solidFill>
+                  <a:srgbClr val="333333"/>
+                </a:solidFill>
+                <a:latin typeface="メイリオ"/>
+                <a:ea typeface="メイリオ"/>
+                <a:cs typeface="メイリオ"/>
+              </a:rPr>
+              <a:t> → </a:t>
+            </a:r>
+            <a:r>
+              <a:rPr sz="1250" dirty="0" err="1">
+                <a:solidFill>
+                  <a:srgbClr val="333333"/>
+                </a:solidFill>
+                <a:latin typeface="メイリオ"/>
+                <a:ea typeface="メイリオ"/>
+                <a:cs typeface="メイリオ"/>
+              </a:rPr>
+              <a:t>LINE追加</a:t>
+            </a:r>
+            <a:r>
+              <a:rPr sz="1250" dirty="0">
+                <a:solidFill>
+                  <a:srgbClr val="333333"/>
+                </a:solidFill>
+                <a:latin typeface="メイリオ"/>
+                <a:ea typeface="メイリオ"/>
+                <a:cs typeface="メイリオ"/>
+              </a:rPr>
+              <a:t>　※</a:t>
+            </a:r>
+            <a:r>
+              <a:rPr sz="1250" dirty="0" err="1">
+                <a:solidFill>
+                  <a:srgbClr val="333333"/>
+                </a:solidFill>
+                <a:latin typeface="メイリオ"/>
+                <a:ea typeface="メイリオ"/>
+                <a:cs typeface="メイリオ"/>
+              </a:rPr>
+              <a:t>費用（月額／初期</a:t>
+            </a:r>
+            <a:r>
+              <a:rPr sz="1250" dirty="0">
+                <a:solidFill>
+                  <a:srgbClr val="333333"/>
+                </a:solidFill>
+                <a:latin typeface="メイリオ"/>
+                <a:ea typeface="メイリオ"/>
+                <a:cs typeface="メイリオ"/>
+              </a:rPr>
+              <a:t>）。</a:t>
             </a:r>
           </a:p>
         </p:txBody>
@@ -3141,7 +3229,7 @@
           </a:fontRef>
         </p:style>
         <p:txBody>
-          <a:bodyPr rtlCol="0" anchor="ctr" wrap="square" lIns="36000" rIns="36000" tIns="21600" bIns="21600"/>
+          <a:bodyPr wrap="square" lIns="36000" tIns="21600" rIns="36000" bIns="21600" rtlCol="0" anchor="ctr"/>
           <a:lstStyle/>
           <a:p>
             <a:pPr algn="ctr">
@@ -3232,7 +3320,7 @@
           </a:fontRef>
         </p:style>
         <p:txBody>
-          <a:bodyPr rtlCol="0" anchor="ctr" wrap="square" lIns="125999" rIns="72000" tIns="21600" bIns="21600"/>
+          <a:bodyPr wrap="square" lIns="125999" tIns="21600" rIns="72000" bIns="21600" rtlCol="0" anchor="ctr"/>
           <a:lstStyle/>
           <a:p>
             <a:pPr algn="l">
@@ -3244,7 +3332,7 @@
               </a:spcAft>
             </a:pPr>
             <a:r>
-              <a:rPr sz="1150" b="0">
+              <a:rPr sz="1150" b="0" dirty="0" err="1">
                 <a:solidFill>
                   <a:srgbClr val="333333"/>
                 </a:solidFill>
@@ -3254,6 +3342,14 @@
               </a:rPr>
               <a:t>求人ページから離れようとした方</a:t>
             </a:r>
+            <a:endParaRPr sz="1150" b="0" dirty="0">
+              <a:solidFill>
+                <a:srgbClr val="333333"/>
+              </a:solidFill>
+              <a:latin typeface="メイリオ"/>
+              <a:ea typeface="メイリオ"/>
+              <a:cs typeface="メイリオ"/>
+            </a:endParaRPr>
           </a:p>
           <a:p>
             <a:pPr algn="l">
@@ -3265,7 +3361,7 @@
               </a:spcAft>
             </a:pPr>
             <a:r>
-              <a:rPr sz="1150" b="0">
+              <a:rPr sz="1150" b="0" dirty="0">
                 <a:solidFill>
                   <a:srgbClr val="333333"/>
                 </a:solidFill>
@@ -3273,7 +3369,29 @@
                 <a:ea typeface="メイリオ"/>
                 <a:cs typeface="メイリオ"/>
               </a:rPr>
-              <a:t>→「条件に合う新着求人をLINEでお届けします」</a:t>
+              <a:t>→「</a:t>
+            </a:r>
+            <a:r>
+              <a:rPr sz="1150" b="0" dirty="0" err="1">
+                <a:solidFill>
+                  <a:srgbClr val="333333"/>
+                </a:solidFill>
+                <a:latin typeface="メイリオ"/>
+                <a:ea typeface="メイリオ"/>
+                <a:cs typeface="メイリオ"/>
+              </a:rPr>
+              <a:t>条件に合う新着求人をLINEでお届けします</a:t>
+            </a:r>
+            <a:r>
+              <a:rPr sz="1150" b="0" dirty="0">
+                <a:solidFill>
+                  <a:srgbClr val="333333"/>
+                </a:solidFill>
+                <a:latin typeface="メイリオ"/>
+                <a:ea typeface="メイリオ"/>
+                <a:cs typeface="メイリオ"/>
+              </a:rPr>
+              <a:t>」</a:t>
             </a:r>
           </a:p>
           <a:p>
@@ -3286,7 +3404,7 @@
               </a:spcAft>
             </a:pPr>
             <a:r>
-              <a:rPr sz="1150" b="1">
+              <a:rPr sz="1150" b="1" dirty="0">
                 <a:solidFill>
                   <a:srgbClr val="333333"/>
                 </a:solidFill>
@@ -3294,8 +3412,27 @@
                 <a:ea typeface="メイリオ"/>
                 <a:cs typeface="メイリオ"/>
               </a:rPr>
-              <a:t>→ LINE追加（月約41人）</a:t>
-            </a:r>
+              <a:t>→ </a:t>
+            </a:r>
+            <a:r>
+              <a:rPr sz="1150" b="1" dirty="0" err="1">
+                <a:solidFill>
+                  <a:srgbClr val="333333"/>
+                </a:solidFill>
+                <a:latin typeface="メイリオ"/>
+                <a:ea typeface="メイリオ"/>
+                <a:cs typeface="メイリオ"/>
+              </a:rPr>
+              <a:t>LINE追加</a:t>
+            </a:r>
+            <a:endParaRPr sz="1150" b="1" dirty="0">
+              <a:solidFill>
+                <a:srgbClr val="333333"/>
+              </a:solidFill>
+              <a:latin typeface="メイリオ"/>
+              <a:ea typeface="メイリオ"/>
+              <a:cs typeface="メイリオ"/>
+            </a:endParaRPr>
           </a:p>
           <a:p>
             <a:pPr algn="l">
@@ -3304,7 +3441,7 @@
               </a:spcAft>
             </a:pPr>
             <a:r>
-              <a:rPr sz="1000" b="1">
+              <a:rPr sz="1000" b="1" dirty="0">
                 <a:solidFill>
                   <a:srgbClr val="ED7D31"/>
                 </a:solidFill>
@@ -3385,7 +3522,7 @@
           </a:fontRef>
         </p:style>
         <p:txBody>
-          <a:bodyPr rtlCol="0" anchor="ctr" wrap="square" lIns="36000" rIns="36000" tIns="21600" bIns="21600"/>
+          <a:bodyPr wrap="square" lIns="36000" tIns="21600" rIns="36000" bIns="21600" rtlCol="0" anchor="ctr"/>
           <a:lstStyle/>
           <a:p>
             <a:pPr algn="ctr">
@@ -3476,7 +3613,7 @@
           </a:fontRef>
         </p:style>
         <p:txBody>
-          <a:bodyPr rtlCol="0" anchor="ctr" wrap="square" lIns="125999" rIns="72000" tIns="21600" bIns="21600"/>
+          <a:bodyPr wrap="square" lIns="125999" tIns="21600" rIns="72000" bIns="21600" rtlCol="0" anchor="ctr"/>
           <a:lstStyle/>
           <a:p>
             <a:pPr algn="l">
@@ -3488,7 +3625,7 @@
               </a:spcAft>
             </a:pPr>
             <a:r>
-              <a:rPr sz="1150" b="0">
+              <a:rPr sz="1150" b="0" dirty="0" err="1">
                 <a:solidFill>
                   <a:srgbClr val="333333"/>
                 </a:solidFill>
@@ -3498,6 +3635,14 @@
               </a:rPr>
               <a:t>求人詳細・会員登録ページ</a:t>
             </a:r>
+            <a:endParaRPr sz="1150" b="0" dirty="0">
+              <a:solidFill>
+                <a:srgbClr val="333333"/>
+              </a:solidFill>
+              <a:latin typeface="メイリオ"/>
+              <a:ea typeface="メイリオ"/>
+              <a:cs typeface="メイリオ"/>
+            </a:endParaRPr>
           </a:p>
           <a:p>
             <a:pPr algn="l">
@@ -3509,7 +3654,7 @@
               </a:spcAft>
             </a:pPr>
             <a:r>
-              <a:rPr sz="1150" b="0">
+              <a:rPr sz="1150" b="0" dirty="0">
                 <a:solidFill>
                   <a:srgbClr val="333333"/>
                 </a:solidFill>
@@ -3517,7 +3662,29 @@
                 <a:ea typeface="メイリオ"/>
                 <a:cs typeface="メイリオ"/>
               </a:rPr>
-              <a:t>→「LINEで登録（入力はほぼ不要）」</a:t>
+              <a:t>→「</a:t>
+            </a:r>
+            <a:r>
+              <a:rPr sz="1150" b="0" dirty="0" err="1">
+                <a:solidFill>
+                  <a:srgbClr val="333333"/>
+                </a:solidFill>
+                <a:latin typeface="メイリオ"/>
+                <a:ea typeface="メイリオ"/>
+                <a:cs typeface="メイリオ"/>
+              </a:rPr>
+              <a:t>LINEで登録（入力はほぼ不要</a:t>
+            </a:r>
+            <a:r>
+              <a:rPr sz="1150" b="0" dirty="0">
+                <a:solidFill>
+                  <a:srgbClr val="333333"/>
+                </a:solidFill>
+                <a:latin typeface="メイリオ"/>
+                <a:ea typeface="メイリオ"/>
+                <a:cs typeface="メイリオ"/>
+              </a:rPr>
+              <a:t>）」</a:t>
             </a:r>
           </a:p>
           <a:p>
@@ -3530,7 +3697,7 @@
               </a:spcAft>
             </a:pPr>
             <a:r>
-              <a:rPr sz="1150" b="1">
+              <a:rPr sz="1150" b="1" dirty="0">
                 <a:solidFill>
                   <a:srgbClr val="333333"/>
                 </a:solidFill>
@@ -3538,8 +3705,49 @@
                 <a:ea typeface="メイリオ"/>
                 <a:cs typeface="メイリオ"/>
               </a:rPr>
-              <a:t>→ 会員登録（CV①）＋LINE追加（月約98人）</a:t>
-            </a:r>
+              <a:t>→ </a:t>
+            </a:r>
+            <a:r>
+              <a:rPr sz="1150" b="1" dirty="0" err="1">
+                <a:solidFill>
+                  <a:srgbClr val="333333"/>
+                </a:solidFill>
+                <a:latin typeface="メイリオ"/>
+                <a:ea typeface="メイリオ"/>
+                <a:cs typeface="メイリオ"/>
+              </a:rPr>
+              <a:t>会員登録（CV</a:t>
+            </a:r>
+            <a:r>
+              <a:rPr sz="1150" b="1" dirty="0">
+                <a:solidFill>
+                  <a:srgbClr val="333333"/>
+                </a:solidFill>
+                <a:latin typeface="メイリオ"/>
+                <a:ea typeface="メイリオ"/>
+                <a:cs typeface="メイリオ"/>
+              </a:rPr>
+              <a:t>①）＋</a:t>
+            </a:r>
+            <a:r>
+              <a:rPr sz="1150" b="1" dirty="0" err="1">
+                <a:solidFill>
+                  <a:srgbClr val="333333"/>
+                </a:solidFill>
+                <a:latin typeface="メイリオ"/>
+                <a:ea typeface="メイリオ"/>
+                <a:cs typeface="メイリオ"/>
+              </a:rPr>
+              <a:t>LINE追加</a:t>
+            </a:r>
+            <a:endParaRPr sz="1150" b="1" dirty="0">
+              <a:solidFill>
+                <a:srgbClr val="333333"/>
+              </a:solidFill>
+              <a:latin typeface="メイリオ"/>
+              <a:ea typeface="メイリオ"/>
+              <a:cs typeface="メイリオ"/>
+            </a:endParaRPr>
           </a:p>
           <a:p>
             <a:pPr algn="l">
@@ -3548,7 +3756,7 @@
               </a:spcAft>
             </a:pPr>
             <a:r>
-              <a:rPr sz="1000" b="1">
+              <a:rPr sz="1000" b="1" dirty="0">
                 <a:solidFill>
                   <a:srgbClr val="ED7D31"/>
                 </a:solidFill>
@@ -3556,8 +3764,49 @@
                 <a:ea typeface="メイリオ"/>
                 <a:cs typeface="メイリオ"/>
               </a:rPr>
-              <a:t>※サイト側で実装（LINE連携の開発は都度お見積もり）／LINE Profile+は申請・審査のうえ別途</a:t>
-            </a:r>
+              <a:t>※</a:t>
+            </a:r>
+            <a:r>
+              <a:rPr sz="1000" b="1" dirty="0" err="1">
+                <a:solidFill>
+                  <a:srgbClr val="ED7D31"/>
+                </a:solidFill>
+                <a:latin typeface="メイリオ"/>
+                <a:ea typeface="メイリオ"/>
+                <a:cs typeface="メイリオ"/>
+              </a:rPr>
+              <a:t>サイト側で実装（LINE連携の開発は都度お見積もり</a:t>
+            </a:r>
+            <a:r>
+              <a:rPr sz="1000" b="1" dirty="0">
+                <a:solidFill>
+                  <a:srgbClr val="ED7D31"/>
+                </a:solidFill>
+                <a:latin typeface="メイリオ"/>
+                <a:ea typeface="メイリオ"/>
+                <a:cs typeface="メイリオ"/>
+              </a:rPr>
+              <a:t>）／LINE </a:t>
+            </a:r>
+            <a:r>
+              <a:rPr sz="1000" b="1" dirty="0" err="1">
+                <a:solidFill>
+                  <a:srgbClr val="ED7D31"/>
+                </a:solidFill>
+                <a:latin typeface="メイリオ"/>
+                <a:ea typeface="メイリオ"/>
+                <a:cs typeface="メイリオ"/>
+              </a:rPr>
+              <a:t>Profile+は申請・審査のうえ別途</a:t>
+            </a:r>
+            <a:endParaRPr sz="1000" b="1" dirty="0">
+              <a:solidFill>
+                <a:srgbClr val="ED7D31"/>
+              </a:solidFill>
+              <a:latin typeface="メイリオ"/>
+              <a:ea typeface="メイリオ"/>
+              <a:cs typeface="メイリオ"/>
+            </a:endParaRPr>
           </a:p>
         </p:txBody>
       </p:sp>
@@ -3629,7 +3878,7 @@
           </a:fontRef>
         </p:style>
         <p:txBody>
-          <a:bodyPr rtlCol="0" anchor="ctr" wrap="square" lIns="36000" rIns="36000" tIns="21600" bIns="21600"/>
+          <a:bodyPr wrap="square" lIns="36000" tIns="21600" rIns="36000" bIns="21600" rtlCol="0" anchor="ctr"/>
           <a:lstStyle/>
           <a:p>
             <a:pPr algn="ctr">
@@ -3720,7 +3969,7 @@
           </a:fontRef>
         </p:style>
         <p:txBody>
-          <a:bodyPr rtlCol="0" anchor="ctr" wrap="square" lIns="125999" rIns="72000" tIns="21600" bIns="21600"/>
+          <a:bodyPr wrap="square" lIns="125999" tIns="21600" rIns="72000" bIns="21600" rtlCol="0" anchor="ctr"/>
           <a:lstStyle/>
           <a:p>
             <a:pPr algn="l">
@@ -3732,7 +3981,7 @@
               </a:spcAft>
             </a:pPr>
             <a:r>
-              <a:rPr sz="1150" b="0">
+              <a:rPr sz="1150" b="0" dirty="0" err="1">
                 <a:solidFill>
                   <a:srgbClr val="333333"/>
                 </a:solidFill>
@@ -3742,6 +3991,14 @@
               </a:rPr>
               <a:t>応募の完了画面</a:t>
             </a:r>
+            <a:endParaRPr sz="1150" b="0" dirty="0">
+              <a:solidFill>
+                <a:srgbClr val="333333"/>
+              </a:solidFill>
+              <a:latin typeface="メイリオ"/>
+              <a:ea typeface="メイリオ"/>
+              <a:cs typeface="メイリオ"/>
+            </a:endParaRPr>
           </a:p>
           <a:p>
             <a:pPr algn="l">
@@ -3753,7 +4010,7 @@
               </a:spcAft>
             </a:pPr>
             <a:r>
-              <a:rPr sz="1150" b="0">
+              <a:rPr sz="1150" b="0" dirty="0">
                 <a:solidFill>
                   <a:srgbClr val="333333"/>
                 </a:solidFill>
@@ -3761,7 +4018,29 @@
                 <a:ea typeface="メイリオ"/>
                 <a:cs typeface="メイリオ"/>
               </a:rPr>
-              <a:t>→「今後のご連絡はこのLINEでお送りします」</a:t>
+              <a:t>→「</a:t>
+            </a:r>
+            <a:r>
+              <a:rPr sz="1150" b="0" dirty="0" err="1">
+                <a:solidFill>
+                  <a:srgbClr val="333333"/>
+                </a:solidFill>
+                <a:latin typeface="メイリオ"/>
+                <a:ea typeface="メイリオ"/>
+                <a:cs typeface="メイリオ"/>
+              </a:rPr>
+              <a:t>今後のご連絡はこのLINEでお送りします</a:t>
+            </a:r>
+            <a:r>
+              <a:rPr sz="1150" b="0" dirty="0">
+                <a:solidFill>
+                  <a:srgbClr val="333333"/>
+                </a:solidFill>
+                <a:latin typeface="メイリオ"/>
+                <a:ea typeface="メイリオ"/>
+                <a:cs typeface="メイリオ"/>
+              </a:rPr>
+              <a:t>」</a:t>
             </a:r>
           </a:p>
           <a:p>
@@ -3774,7 +4053,7 @@
               </a:spcAft>
             </a:pPr>
             <a:r>
-              <a:rPr sz="1150" b="1">
+              <a:rPr sz="1150" b="1" dirty="0">
                 <a:solidFill>
                   <a:srgbClr val="333333"/>
                 </a:solidFill>
@@ -3782,17 +4061,31 @@
                 <a:ea typeface="メイリオ"/>
                 <a:cs typeface="メイリオ"/>
               </a:rPr>
-              <a:t>→ LINE追加（月約17人の想定）</a:t>
-            </a:r>
-          </a:p>
-          <a:p>
-            <a:pPr algn="l">
-              <a:spcAft>
-                <a:spcPts val="0"/>
-              </a:spcAft>
-            </a:pPr>
-            <a:r>
-              <a:rPr sz="1000" b="1">
+              <a:t>→ </a:t>
+            </a:r>
+            <a:r>
+              <a:rPr sz="1150" b="1" dirty="0" err="1">
+                <a:solidFill>
+                  <a:srgbClr val="333333"/>
+                </a:solidFill>
+                <a:latin typeface="メイリオ"/>
+                <a:ea typeface="メイリオ"/>
+                <a:cs typeface="メイリオ"/>
+              </a:rPr>
+              <a:t>LINE追加</a:t>
+            </a:r>
+            <a:br>
+              <a:rPr lang="en-US" sz="1150" b="1" dirty="0">
+                <a:solidFill>
+                  <a:srgbClr val="333333"/>
+                </a:solidFill>
+                <a:latin typeface="メイリオ"/>
+                <a:ea typeface="メイリオ"/>
+                <a:cs typeface="メイリオ"/>
+              </a:rPr>
+            </a:br>
+            <a:r>
+              <a:rPr sz="1000" b="1" dirty="0">
                 <a:solidFill>
                   <a:srgbClr val="ED7D31"/>
                 </a:solidFill>
@@ -3800,8 +4093,27 @@
                 <a:ea typeface="メイリオ"/>
                 <a:cs typeface="メイリオ"/>
               </a:rPr>
-              <a:t>※月5万円（初期10万円）／シミュレーションの応募数・費用には含めない</a:t>
-            </a:r>
+              <a:t>※月5万円（初期10万円）／</a:t>
+            </a:r>
+            <a:r>
+              <a:rPr sz="1000" b="1" dirty="0" err="1">
+                <a:solidFill>
+                  <a:srgbClr val="ED7D31"/>
+                </a:solidFill>
+                <a:latin typeface="メイリオ"/>
+                <a:ea typeface="メイリオ"/>
+                <a:cs typeface="メイリオ"/>
+              </a:rPr>
+              <a:t>シミュレーションの応募数・費用には含めない</a:t>
+            </a:r>
+            <a:endParaRPr sz="1000" b="1" dirty="0">
+              <a:solidFill>
+                <a:srgbClr val="ED7D31"/>
+              </a:solidFill>
+              <a:latin typeface="メイリオ"/>
+              <a:ea typeface="メイリオ"/>
+              <a:cs typeface="メイリオ"/>
+            </a:endParaRPr>
           </a:p>
         </p:txBody>
       </p:sp>
@@ -3851,7 +4163,7 @@
           <a:noFill/>
         </p:spPr>
         <p:txBody>
-          <a:bodyPr wrap="square" lIns="0" rIns="0" tIns="21600" bIns="21600" anchor="t">
+          <a:bodyPr wrap="square" lIns="0" tIns="21600" rIns="0" bIns="21600" anchor="t">
             <a:spAutoFit/>
           </a:bodyPr>
           <a:lstStyle/>
@@ -3888,7 +4200,7 @@
 </p:sld>
 </file>
 
-<file path=ppt/slides/slide12.xml><?xml version="1.0" encoding="utf-8"?>
+<file path=ppt/slides/slide2.xml><?xml version="1.0" encoding="utf-8"?>
 <p:sld xmlns:a="http://schemas.openxmlformats.org/drawingml/2006/main" xmlns:r="http://schemas.openxmlformats.org/officeDocument/2006/relationships" xmlns:p="http://schemas.openxmlformats.org/presentationml/2006/main">
   <p:cSld>
     <p:spTree>
@@ -3928,7 +4240,7 @@
           <a:noFill/>
         </p:spPr>
         <p:txBody>
-          <a:bodyPr wrap="square" lIns="0" rIns="0" tIns="21600" bIns="21600" anchor="ctr">
+          <a:bodyPr wrap="square" lIns="0" tIns="21600" rIns="0" bIns="21600" anchor="ctr">
             <a:spAutoFit/>
           </a:bodyPr>
           <a:lstStyle/>
@@ -3956,8 +4268,8 @@
         </p:nvSpPr>
         <p:spPr>
           <a:xfrm>
-            <a:off x="432000" y="648000"/>
-            <a:ext cx="9036000" cy="684000"/>
+            <a:off x="432000" y="836230"/>
+            <a:ext cx="9036000" cy="307540"/>
           </a:xfrm>
           <a:prstGeom prst="rect">
             <a:avLst/>
@@ -3965,7 +4277,7 @@
           <a:noFill/>
         </p:spPr>
         <p:txBody>
-          <a:bodyPr wrap="square" lIns="0" rIns="0" tIns="21600" bIns="21600" anchor="ctr">
+          <a:bodyPr wrap="square" lIns="0" tIns="21600" rIns="0" bIns="21600" anchor="ctr">
             <a:spAutoFit/>
           </a:bodyPr>
           <a:lstStyle/>
@@ -3976,7 +4288,7 @@
               </a:lnSpc>
             </a:pPr>
             <a:r>
-              <a:rPr sz="1250">
+              <a:rPr sz="1400" dirty="0" err="1">
                 <a:solidFill>
                   <a:srgbClr val="333333"/>
                 </a:solidFill>
@@ -3984,17 +4296,10 @@
                 <a:ea typeface="メイリオ"/>
                 <a:cs typeface="メイリオ"/>
               </a:rPr>
-              <a:t>対象（想定数）→ 訴求 → 開封率×クリック率 → クリック数 × 応募率2.0% → 件数（月・9月時点）。</a:t>
-            </a:r>
-          </a:p>
-          <a:p>
-            <a:pPr algn="l">
-              <a:lnSpc>
-                <a:spcPct val="130000"/>
-              </a:lnSpc>
-            </a:pPr>
-            <a:r>
-              <a:rPr sz="1250">
+              <a:t>対象（想定数</a:t>
+            </a:r>
+            <a:r>
+              <a:rPr sz="1400" dirty="0">
                 <a:solidFill>
                   <a:srgbClr val="333333"/>
                 </a:solidFill>
@@ -4002,8 +4307,93 @@
                 <a:ea typeface="メイリオ"/>
                 <a:cs typeface="メイリオ"/>
               </a:rPr>
-              <a:t>クリック数・件数の合計は、SIM ver2.6の9月（クリック752回・応募15件）と一致します。</a:t>
-            </a:r>
+              <a:t>）→ </a:t>
+            </a:r>
+            <a:r>
+              <a:rPr sz="1400" dirty="0" err="1">
+                <a:solidFill>
+                  <a:srgbClr val="333333"/>
+                </a:solidFill>
+                <a:latin typeface="メイリオ"/>
+                <a:ea typeface="メイリオ"/>
+                <a:cs typeface="メイリオ"/>
+              </a:rPr>
+              <a:t>訴求</a:t>
+            </a:r>
+            <a:r>
+              <a:rPr sz="1400" dirty="0">
+                <a:solidFill>
+                  <a:srgbClr val="333333"/>
+                </a:solidFill>
+                <a:latin typeface="メイリオ"/>
+                <a:ea typeface="メイリオ"/>
+                <a:cs typeface="メイリオ"/>
+              </a:rPr>
+              <a:t> → </a:t>
+            </a:r>
+            <a:r>
+              <a:rPr sz="1400" dirty="0" err="1">
+                <a:solidFill>
+                  <a:srgbClr val="333333"/>
+                </a:solidFill>
+                <a:latin typeface="メイリオ"/>
+                <a:ea typeface="メイリオ"/>
+                <a:cs typeface="メイリオ"/>
+              </a:rPr>
+              <a:t>開封率×クリック率</a:t>
+            </a:r>
+            <a:r>
+              <a:rPr sz="1400" dirty="0">
+                <a:solidFill>
+                  <a:srgbClr val="333333"/>
+                </a:solidFill>
+                <a:latin typeface="メイリオ"/>
+                <a:ea typeface="メイリオ"/>
+                <a:cs typeface="メイリオ"/>
+              </a:rPr>
+              <a:t> → </a:t>
+            </a:r>
+            <a:r>
+              <a:rPr sz="1400" dirty="0" err="1">
+                <a:solidFill>
+                  <a:srgbClr val="333333"/>
+                </a:solidFill>
+                <a:latin typeface="メイリオ"/>
+                <a:ea typeface="メイリオ"/>
+                <a:cs typeface="メイリオ"/>
+              </a:rPr>
+              <a:t>クリック数</a:t>
+            </a:r>
+            <a:r>
+              <a:rPr sz="1400" dirty="0">
+                <a:solidFill>
+                  <a:srgbClr val="333333"/>
+                </a:solidFill>
+                <a:latin typeface="メイリオ"/>
+                <a:ea typeface="メイリオ"/>
+                <a:cs typeface="メイリオ"/>
+              </a:rPr>
+              <a:t> × 応募率2.0% → </a:t>
+            </a:r>
+            <a:r>
+              <a:rPr sz="1400" dirty="0" err="1">
+                <a:solidFill>
+                  <a:srgbClr val="333333"/>
+                </a:solidFill>
+                <a:latin typeface="メイリオ"/>
+                <a:ea typeface="メイリオ"/>
+                <a:cs typeface="メイリオ"/>
+              </a:rPr>
+              <a:t>件数</a:t>
+            </a:r>
+            <a:endParaRPr sz="1400" dirty="0">
+              <a:solidFill>
+                <a:srgbClr val="333333"/>
+              </a:solidFill>
+              <a:latin typeface="メイリオ"/>
+              <a:ea typeface="メイリオ"/>
+              <a:cs typeface="メイリオ"/>
+            </a:endParaRPr>
           </a:p>
         </p:txBody>
       </p:sp>
@@ -4048,11 +4438,17 @@
           <p:cNvGraphicFramePr>
             <a:graphicFrameLocks noGrp="1"/>
           </p:cNvGraphicFramePr>
-          <p:nvPr/>
+          <p:nvPr>
+            <p:extLst>
+              <p:ext uri="{D42A27DB-BD31-4B8C-83A1-F6EECF244321}">
+                <p14:modId xmlns:p14="http://schemas.microsoft.com/office/powerpoint/2010/main" val="748826462"/>
+              </p:ext>
+            </p:extLst>
+          </p:nvPr>
         </p:nvGraphicFramePr>
         <p:xfrm>
           <a:off x="432000" y="1512000"/>
-          <a:ext cx="7415999" cy="4068000"/>
+          <a:ext cx="7524000" cy="4068000"/>
         </p:xfrm>
         <a:graphic>
           <a:graphicData uri="http://schemas.openxmlformats.org/drawingml/2006/table">
@@ -4061,19 +4457,67 @@
                 <a:tableStyleId>{5C22544A-7EE6-4342-B048-85BDC9FD1C3A}</a:tableStyleId>
               </a:tblPr>
               <a:tblGrid>
-                <a:gridCol w="360000"/>
-                <a:gridCol w="612000"/>
-                <a:gridCol w="936000"/>
-                <a:gridCol w="1188000"/>
-                <a:gridCol w="1512000"/>
-                <a:gridCol w="936000"/>
-                <a:gridCol w="827999"/>
-                <a:gridCol w="1044000"/>
+                <a:gridCol w="365243">
+                  <a:extLst>
+                    <a:ext uri="{9D8B030D-6E8A-4147-A177-3AD203B41FA5}">
+                      <a16:colId xmlns:a16="http://schemas.microsoft.com/office/drawing/2014/main" val="20000"/>
+                    </a:ext>
+                  </a:extLst>
+                </a:gridCol>
+                <a:gridCol w="620913">
+                  <a:extLst>
+                    <a:ext uri="{9D8B030D-6E8A-4147-A177-3AD203B41FA5}">
+                      <a16:colId xmlns:a16="http://schemas.microsoft.com/office/drawing/2014/main" val="20001"/>
+                    </a:ext>
+                  </a:extLst>
+                </a:gridCol>
+                <a:gridCol w="985410">
+                  <a:extLst>
+                    <a:ext uri="{9D8B030D-6E8A-4147-A177-3AD203B41FA5}">
+                      <a16:colId xmlns:a16="http://schemas.microsoft.com/office/drawing/2014/main" val="20002"/>
+                    </a:ext>
+                  </a:extLst>
+                </a:gridCol>
+                <a:gridCol w="1239162">
+                  <a:extLst>
+                    <a:ext uri="{9D8B030D-6E8A-4147-A177-3AD203B41FA5}">
+                      <a16:colId xmlns:a16="http://schemas.microsoft.com/office/drawing/2014/main" val="20003"/>
+                    </a:ext>
+                  </a:extLst>
+                </a:gridCol>
+                <a:gridCol w="1493182">
+                  <a:extLst>
+                    <a:ext uri="{9D8B030D-6E8A-4147-A177-3AD203B41FA5}">
+                      <a16:colId xmlns:a16="http://schemas.microsoft.com/office/drawing/2014/main" val="20004"/>
+                    </a:ext>
+                  </a:extLst>
+                </a:gridCol>
+                <a:gridCol w="954222">
+                  <a:extLst>
+                    <a:ext uri="{9D8B030D-6E8A-4147-A177-3AD203B41FA5}">
+                      <a16:colId xmlns:a16="http://schemas.microsoft.com/office/drawing/2014/main" val="20005"/>
+                    </a:ext>
+                  </a:extLst>
+                </a:gridCol>
+                <a:gridCol w="806664">
+                  <a:extLst>
+                    <a:ext uri="{9D8B030D-6E8A-4147-A177-3AD203B41FA5}">
+                      <a16:colId xmlns:a16="http://schemas.microsoft.com/office/drawing/2014/main" val="20006"/>
+                    </a:ext>
+                  </a:extLst>
+                </a:gridCol>
+                <a:gridCol w="1059204">
+                  <a:extLst>
+                    <a:ext uri="{9D8B030D-6E8A-4147-A177-3AD203B41FA5}">
+                      <a16:colId xmlns:a16="http://schemas.microsoft.com/office/drawing/2014/main" val="20007"/>
+                    </a:ext>
+                  </a:extLst>
+                </a:gridCol>
               </a:tblGrid>
               <a:tr h="406800">
                 <a:tc>
                   <a:txBody>
-                    <a:bodyPr wrap="square" lIns="43200" rIns="43200" tIns="7200" bIns="7200" anchor="ctr"/>
+                    <a:bodyPr/>
                     <a:lstStyle/>
                     <a:p>
                       <a:pPr algn="ctr"/>
@@ -4098,7 +4542,7 @@
                 </a:tc>
                 <a:tc>
                   <a:txBody>
-                    <a:bodyPr wrap="square" lIns="43200" rIns="43200" tIns="7200" bIns="7200" anchor="ctr"/>
+                    <a:bodyPr/>
                     <a:lstStyle/>
                     <a:p>
                       <a:pPr algn="ctr"/>
@@ -4123,7 +4567,7 @@
                 </a:tc>
                 <a:tc>
                   <a:txBody>
-                    <a:bodyPr wrap="square" lIns="43200" rIns="43200" tIns="7200" bIns="7200" anchor="ctr"/>
+                    <a:bodyPr/>
                     <a:lstStyle/>
                     <a:p>
                       <a:pPr algn="ctr"/>
@@ -4148,7 +4592,7 @@
                 </a:tc>
                 <a:tc>
                   <a:txBody>
-                    <a:bodyPr wrap="square" lIns="43200" rIns="43200" tIns="7200" bIns="7200" anchor="ctr"/>
+                    <a:bodyPr/>
                     <a:lstStyle/>
                     <a:p>
                       <a:pPr algn="ctr"/>
@@ -4173,7 +4617,7 @@
                 </a:tc>
                 <a:tc>
                   <a:txBody>
-                    <a:bodyPr wrap="square" lIns="43200" rIns="43200" tIns="7200" bIns="7200" anchor="ctr"/>
+                    <a:bodyPr/>
                     <a:lstStyle/>
                     <a:p>
                       <a:pPr algn="ctr"/>
@@ -4198,7 +4642,7 @@
                 </a:tc>
                 <a:tc>
                   <a:txBody>
-                    <a:bodyPr wrap="square" lIns="43200" rIns="43200" tIns="7200" bIns="7200" anchor="ctr"/>
+                    <a:bodyPr/>
                     <a:lstStyle/>
                     <a:p>
                       <a:pPr algn="ctr"/>
@@ -4224,12 +4668,12 @@
                 </a:tc>
                 <a:tc>
                   <a:txBody>
-                    <a:bodyPr wrap="square" lIns="43200" rIns="43200" tIns="7200" bIns="7200" anchor="ctr"/>
+                    <a:bodyPr/>
                     <a:lstStyle/>
                     <a:p>
                       <a:pPr algn="ctr"/>
                       <a:r>
-                        <a:rPr sz="850" b="1">
+                        <a:rPr sz="850" b="1" dirty="0">
                           <a:solidFill>
                             <a:srgbClr val="FFFFFF"/>
                           </a:solidFill>
@@ -4237,9 +4681,50 @@
                           <a:ea typeface="メイリオ"/>
                           <a:cs typeface="メイリオ"/>
                         </a:rPr>
-                        <a:t>×応募率
-→ 件数</a:t>
+                        <a:t>×</a:t>
                       </a:r>
+                      <a:r>
+                        <a:rPr sz="850" b="1" dirty="0" err="1">
+                          <a:solidFill>
+                            <a:srgbClr val="FFFFFF"/>
+                          </a:solidFill>
+                          <a:latin typeface="メイリオ"/>
+                          <a:ea typeface="メイリオ"/>
+                          <a:cs typeface="メイリオ"/>
+                        </a:rPr>
+                        <a:t>応募率</a:t>
+                      </a:r>
+                      <a:r>
+                        <a:rPr sz="850" b="1" dirty="0">
+                          <a:solidFill>
+                            <a:srgbClr val="FFFFFF"/>
+                          </a:solidFill>
+                          <a:latin typeface="メイリオ"/>
+                          <a:ea typeface="メイリオ"/>
+                          <a:cs typeface="メイリオ"/>
+                        </a:rPr>
+                        <a:t>
+→ </a:t>
+                      </a:r>
+                      <a:r>
+                        <a:rPr sz="850" b="1" dirty="0" err="1">
+                          <a:solidFill>
+                            <a:srgbClr val="FFFFFF"/>
+                          </a:solidFill>
+                          <a:latin typeface="メイリオ"/>
+                          <a:ea typeface="メイリオ"/>
+                          <a:cs typeface="メイリオ"/>
+                        </a:rPr>
+                        <a:t>件数</a:t>
+                      </a:r>
+                      <a:endParaRPr sz="850" b="1" dirty="0">
+                        <a:solidFill>
+                          <a:srgbClr val="FFFFFF"/>
+                        </a:solidFill>
+                        <a:latin typeface="メイリオ"/>
+                        <a:ea typeface="メイリオ"/>
+                        <a:cs typeface="メイリオ"/>
+                      </a:endParaRPr>
                     </a:p>
                   </a:txBody>
                   <a:tcPr anchor="ctr">
@@ -4250,7 +4735,7 @@
                 </a:tc>
                 <a:tc>
                   <a:txBody>
-                    <a:bodyPr wrap="square" lIns="43200" rIns="43200" tIns="7200" bIns="7200" anchor="ctr"/>
+                    <a:bodyPr/>
                     <a:lstStyle/>
                     <a:p>
                       <a:pPr algn="ctr"/>
@@ -4273,11 +4758,16 @@
                     </a:solidFill>
                   </a:tcPr>
                 </a:tc>
+                <a:extLst>
+                  <a:ext uri="{0D108BD9-81ED-4DB2-BD59-A6C34878D82A}">
+                    <a16:rowId xmlns:a16="http://schemas.microsoft.com/office/drawing/2014/main" val="10000"/>
+                  </a:ext>
+                </a:extLst>
               </a:tr>
               <a:tr h="406800">
                 <a:tc>
                   <a:txBody>
-                    <a:bodyPr wrap="square" lIns="43200" rIns="43200" tIns="7200" bIns="7200" anchor="ctr"/>
+                    <a:bodyPr/>
                     <a:lstStyle/>
                     <a:p>
                       <a:pPr algn="ctr"/>
@@ -4302,7 +4792,7 @@
                 </a:tc>
                 <a:tc>
                   <a:txBody>
-                    <a:bodyPr wrap="square" lIns="43200" rIns="43200" tIns="7200" bIns="7200" anchor="ctr"/>
+                    <a:bodyPr/>
                     <a:lstStyle/>
                     <a:p>
                       <a:pPr algn="ctr"/>
@@ -4327,7 +4817,7 @@
                 </a:tc>
                 <a:tc>
                   <a:txBody>
-                    <a:bodyPr wrap="square" lIns="43200" rIns="43200" tIns="7200" bIns="7200" anchor="ctr"/>
+                    <a:bodyPr/>
                     <a:lstStyle/>
                     <a:p>
                       <a:pPr algn="ctr"/>
@@ -4353,12 +4843,12 @@
                 </a:tc>
                 <a:tc>
                   <a:txBody>
-                    <a:bodyPr wrap="square" lIns="43200" rIns="43200" tIns="7200" bIns="7200" anchor="ctr"/>
+                    <a:bodyPr/>
                     <a:lstStyle/>
                     <a:p>
                       <a:pPr algn="l"/>
                       <a:r>
-                        <a:rPr sz="800" b="0">
+                        <a:rPr sz="800" b="0" dirty="0" err="1">
                           <a:solidFill>
                             <a:srgbClr val="333333"/>
                           </a:solidFill>
@@ -4366,7 +4856,18 @@
                           <a:ea typeface="メイリオ"/>
                           <a:cs typeface="メイリオ"/>
                         </a:rPr>
-                        <a:t>離脱防止から
+                        <a:t>離脱防止から</a:t>
+                      </a:r>
+                      <a:r>
+                        <a:rPr sz="800" b="0" dirty="0">
+                          <a:solidFill>
+                            <a:srgbClr val="333333"/>
+                          </a:solidFill>
+                          <a:latin typeface="メイリオ"/>
+                          <a:ea typeface="メイリオ"/>
+                          <a:cs typeface="メイリオ"/>
+                        </a:rPr>
+                        <a:t>
 追加した方（約22人）</a:t>
                       </a:r>
                     </a:p>
@@ -4379,7 +4880,7 @@
                 </a:tc>
                 <a:tc>
                   <a:txBody>
-                    <a:bodyPr wrap="square" lIns="43200" rIns="43200" tIns="7200" bIns="7200" anchor="ctr"/>
+                    <a:bodyPr/>
                     <a:lstStyle/>
                     <a:p>
                       <a:pPr algn="l"/>
@@ -4405,7 +4906,7 @@
                 </a:tc>
                 <a:tc>
                   <a:txBody>
-                    <a:bodyPr wrap="square" lIns="43200" rIns="43200" tIns="7200" bIns="7200" anchor="ctr"/>
+                    <a:bodyPr/>
                     <a:lstStyle/>
                     <a:p>
                       <a:pPr algn="ctr"/>
@@ -4431,12 +4932,12 @@
                 </a:tc>
                 <a:tc>
                   <a:txBody>
-                    <a:bodyPr wrap="square" lIns="43200" rIns="43200" tIns="7200" bIns="7200" anchor="ctr"/>
+                    <a:bodyPr/>
                     <a:lstStyle/>
                     <a:p>
                       <a:pPr algn="ctr"/>
                       <a:r>
-                        <a:rPr sz="800" b="0">
+                        <a:rPr sz="800" b="0" dirty="0">
                           <a:solidFill>
                             <a:srgbClr val="333333"/>
                           </a:solidFill>
@@ -4445,7 +4946,7 @@
                           <a:cs typeface="メイリオ"/>
                         </a:rPr>
                         <a:t>2.0%
-→ 1.1件</a:t>
+→ 1件</a:t>
                       </a:r>
                     </a:p>
                   </a:txBody>
@@ -4457,7 +4958,7 @@
                 </a:tc>
                 <a:tc>
                   <a:txBody>
-                    <a:bodyPr wrap="square" lIns="43200" rIns="43200" tIns="7200" bIns="7200" anchor="ctr"/>
+                    <a:bodyPr/>
                     <a:lstStyle/>
                     <a:p>
                       <a:pPr algn="ctr"/>
@@ -4481,11 +4982,16 @@
                     </a:solidFill>
                   </a:tcPr>
                 </a:tc>
+                <a:extLst>
+                  <a:ext uri="{0D108BD9-81ED-4DB2-BD59-A6C34878D82A}">
+                    <a16:rowId xmlns:a16="http://schemas.microsoft.com/office/drawing/2014/main" val="10001"/>
+                  </a:ext>
+                </a:extLst>
               </a:tr>
               <a:tr h="406800">
                 <a:tc>
                   <a:txBody>
-                    <a:bodyPr wrap="square" lIns="43200" rIns="43200" tIns="7200" bIns="7200" anchor="ctr"/>
+                    <a:bodyPr/>
                     <a:lstStyle/>
                     <a:p>
                       <a:pPr algn="ctr"/>
@@ -4510,7 +5016,7 @@
                 </a:tc>
                 <a:tc>
                   <a:txBody>
-                    <a:bodyPr wrap="square" lIns="43200" rIns="43200" tIns="7200" bIns="7200" anchor="ctr"/>
+                    <a:bodyPr/>
                     <a:lstStyle/>
                     <a:p>
                       <a:pPr algn="ctr"/>
@@ -4535,7 +5041,7 @@
                 </a:tc>
                 <a:tc>
                   <a:txBody>
-                    <a:bodyPr wrap="square" lIns="43200" rIns="43200" tIns="7200" bIns="7200" anchor="ctr"/>
+                    <a:bodyPr/>
                     <a:lstStyle/>
                     <a:p>
                       <a:pPr algn="ctr"/>
@@ -4561,7 +5067,7 @@
                 </a:tc>
                 <a:tc>
                   <a:txBody>
-                    <a:bodyPr wrap="square" lIns="43200" rIns="43200" tIns="7200" bIns="7200" anchor="ctr"/>
+                    <a:bodyPr/>
                     <a:lstStyle/>
                     <a:p>
                       <a:pPr algn="l"/>
@@ -4587,7 +5093,7 @@
                 </a:tc>
                 <a:tc>
                   <a:txBody>
-                    <a:bodyPr wrap="square" lIns="43200" rIns="43200" tIns="7200" bIns="7200" anchor="ctr"/>
+                    <a:bodyPr/>
                     <a:lstStyle/>
                     <a:p>
                       <a:pPr algn="l"/>
@@ -4613,7 +5119,7 @@
                 </a:tc>
                 <a:tc>
                   <a:txBody>
-                    <a:bodyPr wrap="square" lIns="43200" rIns="43200" tIns="7200" bIns="7200" anchor="ctr"/>
+                    <a:bodyPr/>
                     <a:lstStyle/>
                     <a:p>
                       <a:pPr algn="ctr"/>
@@ -4639,12 +5145,12 @@
                 </a:tc>
                 <a:tc>
                   <a:txBody>
-                    <a:bodyPr wrap="square" lIns="43200" rIns="43200" tIns="7200" bIns="7200" anchor="ctr"/>
+                    <a:bodyPr/>
                     <a:lstStyle/>
                     <a:p>
                       <a:pPr algn="ctr"/>
                       <a:r>
-                        <a:rPr sz="800" b="0">
+                        <a:rPr sz="800" b="0" dirty="0">
                           <a:solidFill>
                             <a:srgbClr val="333333"/>
                           </a:solidFill>
@@ -4653,7 +5159,29 @@
                           <a:cs typeface="メイリオ"/>
                         </a:rPr>
                         <a:t>2.0%
-→ 1.6件</a:t>
+→ </a:t>
+                      </a:r>
+                      <a:r>
+                        <a:rPr lang="en-US" sz="800" b="0" dirty="0">
+                          <a:solidFill>
+                            <a:srgbClr val="333333"/>
+                          </a:solidFill>
+                          <a:latin typeface="メイリオ"/>
+                          <a:ea typeface="メイリオ"/>
+                          <a:cs typeface="メイリオ"/>
+                        </a:rPr>
+                        <a:t>2</a:t>
+                      </a:r>
+                      <a:r>
+                        <a:rPr sz="800" b="0" dirty="0">
+                          <a:solidFill>
+                            <a:srgbClr val="333333"/>
+                          </a:solidFill>
+                          <a:latin typeface="メイリオ"/>
+                          <a:ea typeface="メイリオ"/>
+                          <a:cs typeface="メイリオ"/>
+                        </a:rPr>
+                        <a:t>件</a:t>
                       </a:r>
                     </a:p>
                   </a:txBody>
@@ -4665,7 +5193,7 @@
                 </a:tc>
                 <a:tc>
                   <a:txBody>
-                    <a:bodyPr wrap="square" lIns="43200" rIns="43200" tIns="7200" bIns="7200" anchor="ctr"/>
+                    <a:bodyPr/>
                     <a:lstStyle/>
                     <a:p>
                       <a:pPr algn="ctr"/>
@@ -4689,11 +5217,16 @@
                     </a:solidFill>
                   </a:tcPr>
                 </a:tc>
+                <a:extLst>
+                  <a:ext uri="{0D108BD9-81ED-4DB2-BD59-A6C34878D82A}">
+                    <a16:rowId xmlns:a16="http://schemas.microsoft.com/office/drawing/2014/main" val="10002"/>
+                  </a:ext>
+                </a:extLst>
               </a:tr>
               <a:tr h="406800">
                 <a:tc>
                   <a:txBody>
-                    <a:bodyPr wrap="square" lIns="43200" rIns="43200" tIns="7200" bIns="7200" anchor="ctr"/>
+                    <a:bodyPr/>
                     <a:lstStyle/>
                     <a:p>
                       <a:pPr algn="ctr"/>
@@ -4718,7 +5251,7 @@
                 </a:tc>
                 <a:tc>
                   <a:txBody>
-                    <a:bodyPr wrap="square" lIns="43200" rIns="43200" tIns="7200" bIns="7200" anchor="ctr"/>
+                    <a:bodyPr/>
                     <a:lstStyle/>
                     <a:p>
                       <a:pPr algn="ctr"/>
@@ -4744,7 +5277,7 @@
                 </a:tc>
                 <a:tc>
                   <a:txBody>
-                    <a:bodyPr wrap="square" lIns="43200" rIns="43200" tIns="7200" bIns="7200" anchor="ctr"/>
+                    <a:bodyPr/>
                     <a:lstStyle/>
                     <a:p>
                       <a:pPr algn="ctr"/>
@@ -4769,7 +5302,7 @@
                 </a:tc>
                 <a:tc>
                   <a:txBody>
-                    <a:bodyPr wrap="square" lIns="43200" rIns="43200" tIns="7200" bIns="7200" anchor="ctr"/>
+                    <a:bodyPr/>
                     <a:lstStyle/>
                     <a:p>
                       <a:pPr algn="l"/>
@@ -4795,7 +5328,7 @@
                 </a:tc>
                 <a:tc>
                   <a:txBody>
-                    <a:bodyPr wrap="square" lIns="43200" rIns="43200" tIns="7200" bIns="7200" anchor="ctr"/>
+                    <a:bodyPr/>
                     <a:lstStyle/>
                     <a:p>
                       <a:pPr algn="l"/>
@@ -4821,7 +5354,7 @@
                 </a:tc>
                 <a:tc>
                   <a:txBody>
-                    <a:bodyPr wrap="square" lIns="43200" rIns="43200" tIns="7200" bIns="7200" anchor="ctr"/>
+                    <a:bodyPr/>
                     <a:lstStyle/>
                     <a:p>
                       <a:pPr algn="ctr"/>
@@ -4847,12 +5380,12 @@
                 </a:tc>
                 <a:tc>
                   <a:txBody>
-                    <a:bodyPr wrap="square" lIns="43200" rIns="43200" tIns="7200" bIns="7200" anchor="ctr"/>
+                    <a:bodyPr/>
                     <a:lstStyle/>
                     <a:p>
                       <a:pPr algn="ctr"/>
                       <a:r>
-                        <a:rPr sz="800" b="0">
+                        <a:rPr sz="800" b="0" dirty="0">
                           <a:solidFill>
                             <a:srgbClr val="333333"/>
                           </a:solidFill>
@@ -4861,7 +5394,7 @@
                           <a:cs typeface="メイリオ"/>
                         </a:rPr>
                         <a:t>2.0%
-→ 1.6件</a:t>
+→ 1件</a:t>
                       </a:r>
                     </a:p>
                   </a:txBody>
@@ -4873,7 +5406,7 @@
                 </a:tc>
                 <a:tc>
                   <a:txBody>
-                    <a:bodyPr wrap="square" lIns="43200" rIns="43200" tIns="7200" bIns="7200" anchor="ctr"/>
+                    <a:bodyPr/>
                     <a:lstStyle/>
                     <a:p>
                       <a:pPr algn="ctr"/>
@@ -4897,11 +5430,16 @@
                     </a:solidFill>
                   </a:tcPr>
                 </a:tc>
+                <a:extLst>
+                  <a:ext uri="{0D108BD9-81ED-4DB2-BD59-A6C34878D82A}">
+                    <a16:rowId xmlns:a16="http://schemas.microsoft.com/office/drawing/2014/main" val="10003"/>
+                  </a:ext>
+                </a:extLst>
               </a:tr>
               <a:tr h="406800">
                 <a:tc>
                   <a:txBody>
-                    <a:bodyPr wrap="square" lIns="43200" rIns="43200" tIns="7200" bIns="7200" anchor="ctr"/>
+                    <a:bodyPr/>
                     <a:lstStyle/>
                     <a:p>
                       <a:pPr algn="ctr"/>
@@ -4926,7 +5464,7 @@
                 </a:tc>
                 <a:tc>
                   <a:txBody>
-                    <a:bodyPr wrap="square" lIns="43200" rIns="43200" tIns="7200" bIns="7200" anchor="ctr"/>
+                    <a:bodyPr/>
                     <a:lstStyle/>
                     <a:p>
                       <a:pPr algn="ctr"/>
@@ -4951,7 +5489,7 @@
                 </a:tc>
                 <a:tc>
                   <a:txBody>
-                    <a:bodyPr wrap="square" lIns="43200" rIns="43200" tIns="7200" bIns="7200" anchor="ctr"/>
+                    <a:bodyPr/>
                     <a:lstStyle/>
                     <a:p>
                       <a:pPr algn="ctr"/>
@@ -4977,7 +5515,7 @@
                 </a:tc>
                 <a:tc>
                   <a:txBody>
-                    <a:bodyPr wrap="square" lIns="43200" rIns="43200" tIns="7200" bIns="7200" anchor="ctr"/>
+                    <a:bodyPr/>
                     <a:lstStyle/>
                     <a:p>
                       <a:pPr algn="l"/>
@@ -5003,7 +5541,7 @@
                 </a:tc>
                 <a:tc>
                   <a:txBody>
-                    <a:bodyPr wrap="square" lIns="43200" rIns="43200" tIns="7200" bIns="7200" anchor="ctr"/>
+                    <a:bodyPr/>
                     <a:lstStyle/>
                     <a:p>
                       <a:pPr algn="l"/>
@@ -5029,7 +5567,7 @@
                 </a:tc>
                 <a:tc>
                   <a:txBody>
-                    <a:bodyPr wrap="square" lIns="43200" rIns="43200" tIns="7200" bIns="7200" anchor="ctr"/>
+                    <a:bodyPr/>
                     <a:lstStyle/>
                     <a:p>
                       <a:pPr algn="ctr"/>
@@ -5055,12 +5593,12 @@
                 </a:tc>
                 <a:tc>
                   <a:txBody>
-                    <a:bodyPr wrap="square" lIns="43200" rIns="43200" tIns="7200" bIns="7200" anchor="ctr"/>
+                    <a:bodyPr/>
                     <a:lstStyle/>
                     <a:p>
                       <a:pPr algn="ctr"/>
                       <a:r>
-                        <a:rPr sz="800" b="0">
+                        <a:rPr sz="800" b="0" dirty="0">
                           <a:solidFill>
                             <a:srgbClr val="333333"/>
                           </a:solidFill>
@@ -5069,7 +5607,29 @@
                           <a:cs typeface="メイリオ"/>
                         </a:rPr>
                         <a:t>2.0%
-→ 2.7件</a:t>
+→ </a:t>
+                      </a:r>
+                      <a:r>
+                        <a:rPr lang="en-US" sz="800" b="0" dirty="0">
+                          <a:solidFill>
+                            <a:srgbClr val="333333"/>
+                          </a:solidFill>
+                          <a:latin typeface="メイリオ"/>
+                          <a:ea typeface="メイリオ"/>
+                          <a:cs typeface="メイリオ"/>
+                        </a:rPr>
+                        <a:t>3</a:t>
+                      </a:r>
+                      <a:r>
+                        <a:rPr sz="800" b="0" dirty="0">
+                          <a:solidFill>
+                            <a:srgbClr val="333333"/>
+                          </a:solidFill>
+                          <a:latin typeface="メイリオ"/>
+                          <a:ea typeface="メイリオ"/>
+                          <a:cs typeface="メイリオ"/>
+                        </a:rPr>
+                        <a:t>件</a:t>
                       </a:r>
                     </a:p>
                   </a:txBody>
@@ -5081,7 +5641,7 @@
                 </a:tc>
                 <a:tc>
                   <a:txBody>
-                    <a:bodyPr wrap="square" lIns="43200" rIns="43200" tIns="7200" bIns="7200" anchor="ctr"/>
+                    <a:bodyPr/>
                     <a:lstStyle/>
                     <a:p>
                       <a:pPr algn="ctr"/>
@@ -5105,11 +5665,16 @@
                     </a:solidFill>
                   </a:tcPr>
                 </a:tc>
+                <a:extLst>
+                  <a:ext uri="{0D108BD9-81ED-4DB2-BD59-A6C34878D82A}">
+                    <a16:rowId xmlns:a16="http://schemas.microsoft.com/office/drawing/2014/main" val="10004"/>
+                  </a:ext>
+                </a:extLst>
               </a:tr>
               <a:tr h="406800">
                 <a:tc>
                   <a:txBody>
-                    <a:bodyPr wrap="square" lIns="43200" rIns="43200" tIns="7200" bIns="7200" anchor="ctr"/>
+                    <a:bodyPr/>
                     <a:lstStyle/>
                     <a:p>
                       <a:pPr algn="ctr"/>
@@ -5134,7 +5699,7 @@
                 </a:tc>
                 <a:tc>
                   <a:txBody>
-                    <a:bodyPr wrap="square" lIns="43200" rIns="43200" tIns="7200" bIns="7200" anchor="ctr"/>
+                    <a:bodyPr/>
                     <a:lstStyle/>
                     <a:p>
                       <a:pPr algn="ctr"/>
@@ -5159,7 +5724,7 @@
                 </a:tc>
                 <a:tc>
                   <a:txBody>
-                    <a:bodyPr wrap="square" lIns="43200" rIns="43200" tIns="7200" bIns="7200" anchor="ctr"/>
+                    <a:bodyPr/>
                     <a:lstStyle/>
                     <a:p>
                       <a:pPr algn="ctr"/>
@@ -5185,7 +5750,7 @@
                 </a:tc>
                 <a:tc>
                   <a:txBody>
-                    <a:bodyPr wrap="square" lIns="43200" rIns="43200" tIns="7200" bIns="7200" anchor="ctr"/>
+                    <a:bodyPr/>
                     <a:lstStyle/>
                     <a:p>
                       <a:pPr algn="l"/>
@@ -5211,7 +5776,7 @@
                 </a:tc>
                 <a:tc>
                   <a:txBody>
-                    <a:bodyPr wrap="square" lIns="43200" rIns="43200" tIns="7200" bIns="7200" anchor="ctr"/>
+                    <a:bodyPr/>
                     <a:lstStyle/>
                     <a:p>
                       <a:pPr algn="l"/>
@@ -5237,7 +5802,7 @@
                 </a:tc>
                 <a:tc>
                   <a:txBody>
-                    <a:bodyPr wrap="square" lIns="43200" rIns="43200" tIns="7200" bIns="7200" anchor="ctr"/>
+                    <a:bodyPr/>
                     <a:lstStyle/>
                     <a:p>
                       <a:pPr algn="ctr"/>
@@ -5263,12 +5828,12 @@
                 </a:tc>
                 <a:tc>
                   <a:txBody>
-                    <a:bodyPr wrap="square" lIns="43200" rIns="43200" tIns="7200" bIns="7200" anchor="ctr"/>
+                    <a:bodyPr/>
                     <a:lstStyle/>
                     <a:p>
                       <a:pPr algn="ctr"/>
                       <a:r>
-                        <a:rPr sz="800" b="0">
+                        <a:rPr sz="800" b="0" dirty="0">
                           <a:solidFill>
                             <a:srgbClr val="333333"/>
                           </a:solidFill>
@@ -5277,7 +5842,29 @@
                           <a:cs typeface="メイリオ"/>
                         </a:rPr>
                         <a:t>2.0%
-→ 3.9件</a:t>
+→ </a:t>
+                      </a:r>
+                      <a:r>
+                        <a:rPr lang="en-US" sz="800" b="0" dirty="0">
+                          <a:solidFill>
+                            <a:srgbClr val="333333"/>
+                          </a:solidFill>
+                          <a:latin typeface="メイリオ"/>
+                          <a:ea typeface="メイリオ"/>
+                          <a:cs typeface="メイリオ"/>
+                        </a:rPr>
+                        <a:t>4</a:t>
+                      </a:r>
+                      <a:r>
+                        <a:rPr sz="800" b="0" dirty="0">
+                          <a:solidFill>
+                            <a:srgbClr val="333333"/>
+                          </a:solidFill>
+                          <a:latin typeface="メイリオ"/>
+                          <a:ea typeface="メイリオ"/>
+                          <a:cs typeface="メイリオ"/>
+                        </a:rPr>
+                        <a:t>件</a:t>
                       </a:r>
                     </a:p>
                   </a:txBody>
@@ -5289,12 +5876,12 @@
                 </a:tc>
                 <a:tc>
                   <a:txBody>
-                    <a:bodyPr wrap="square" lIns="43200" rIns="43200" tIns="7200" bIns="7200" anchor="ctr"/>
+                    <a:bodyPr/>
                     <a:lstStyle/>
                     <a:p>
                       <a:pPr algn="ctr"/>
                       <a:r>
-                        <a:rPr sz="800" b="0">
+                        <a:rPr sz="800" b="0" dirty="0" err="1">
                           <a:solidFill>
                             <a:srgbClr val="333333"/>
                           </a:solidFill>
@@ -5302,9 +5889,39 @@
                           <a:ea typeface="メイリオ"/>
                           <a:cs typeface="メイリオ"/>
                         </a:rPr>
-                        <a:t>コンサル費
-に含む</a:t>
+                        <a:t>コンサル費</a:t>
                       </a:r>
+                      <a:r>
+                        <a:rPr sz="800" b="0" dirty="0">
+                          <a:solidFill>
+                            <a:srgbClr val="333333"/>
+                          </a:solidFill>
+                          <a:latin typeface="メイリオ"/>
+                          <a:ea typeface="メイリオ"/>
+                          <a:cs typeface="メイリオ"/>
+                        </a:rPr>
+                        <a:t>
+</a:t>
+                      </a:r>
+                      <a:r>
+                        <a:rPr sz="800" b="0" dirty="0" err="1">
+                          <a:solidFill>
+                            <a:srgbClr val="333333"/>
+                          </a:solidFill>
+                          <a:latin typeface="メイリオ"/>
+                          <a:ea typeface="メイリオ"/>
+                          <a:cs typeface="メイリオ"/>
+                        </a:rPr>
+                        <a:t>に含む</a:t>
+                      </a:r>
+                      <a:endParaRPr sz="800" b="0" dirty="0">
+                        <a:solidFill>
+                          <a:srgbClr val="333333"/>
+                        </a:solidFill>
+                        <a:latin typeface="メイリオ"/>
+                        <a:ea typeface="メイリオ"/>
+                        <a:cs typeface="メイリオ"/>
+                      </a:endParaRPr>
                     </a:p>
                   </a:txBody>
                   <a:tcPr anchor="ctr">
@@ -5313,11 +5930,16 @@
                     </a:solidFill>
                   </a:tcPr>
                 </a:tc>
+                <a:extLst>
+                  <a:ext uri="{0D108BD9-81ED-4DB2-BD59-A6C34878D82A}">
+                    <a16:rowId xmlns:a16="http://schemas.microsoft.com/office/drawing/2014/main" val="10005"/>
+                  </a:ext>
+                </a:extLst>
               </a:tr>
               <a:tr h="406800">
                 <a:tc>
                   <a:txBody>
-                    <a:bodyPr wrap="square" lIns="43200" rIns="43200" tIns="7200" bIns="7200" anchor="ctr"/>
+                    <a:bodyPr/>
                     <a:lstStyle/>
                     <a:p>
                       <a:pPr algn="ctr"/>
@@ -5342,7 +5964,7 @@
                 </a:tc>
                 <a:tc>
                   <a:txBody>
-                    <a:bodyPr wrap="square" lIns="43200" rIns="43200" tIns="7200" bIns="7200" anchor="ctr"/>
+                    <a:bodyPr/>
                     <a:lstStyle/>
                     <a:p>
                       <a:pPr algn="ctr"/>
@@ -5368,7 +5990,7 @@
                 </a:tc>
                 <a:tc>
                   <a:txBody>
-                    <a:bodyPr wrap="square" lIns="43200" rIns="43200" tIns="7200" bIns="7200" anchor="ctr"/>
+                    <a:bodyPr/>
                     <a:lstStyle/>
                     <a:p>
                       <a:pPr algn="ctr"/>
@@ -5393,7 +6015,7 @@
                 </a:tc>
                 <a:tc>
                   <a:txBody>
-                    <a:bodyPr wrap="square" lIns="43200" rIns="43200" tIns="7200" bIns="7200" anchor="ctr"/>
+                    <a:bodyPr/>
                     <a:lstStyle/>
                     <a:p>
                       <a:pPr algn="l"/>
@@ -5419,7 +6041,7 @@
                 </a:tc>
                 <a:tc>
                   <a:txBody>
-                    <a:bodyPr wrap="square" lIns="43200" rIns="43200" tIns="7200" bIns="7200" anchor="ctr"/>
+                    <a:bodyPr/>
                     <a:lstStyle/>
                     <a:p>
                       <a:pPr algn="l"/>
@@ -5445,7 +6067,7 @@
                 </a:tc>
                 <a:tc>
                   <a:txBody>
-                    <a:bodyPr wrap="square" lIns="43200" rIns="43200" tIns="7200" bIns="7200" anchor="ctr"/>
+                    <a:bodyPr/>
                     <a:lstStyle/>
                     <a:p>
                       <a:pPr algn="ctr"/>
@@ -5471,12 +6093,12 @@
                 </a:tc>
                 <a:tc>
                   <a:txBody>
-                    <a:bodyPr wrap="square" lIns="43200" rIns="43200" tIns="7200" bIns="7200" anchor="ctr"/>
+                    <a:bodyPr/>
                     <a:lstStyle/>
                     <a:p>
                       <a:pPr algn="ctr"/>
                       <a:r>
-                        <a:rPr sz="800" b="0">
+                        <a:rPr sz="800" b="0" dirty="0">
                           <a:solidFill>
                             <a:srgbClr val="333333"/>
                           </a:solidFill>
@@ -5485,7 +6107,29 @@
                           <a:cs typeface="メイリオ"/>
                         </a:rPr>
                         <a:t>2.0%
-→ 3.9件</a:t>
+→ </a:t>
+                      </a:r>
+                      <a:r>
+                        <a:rPr lang="en-US" sz="800" b="0" dirty="0">
+                          <a:solidFill>
+                            <a:srgbClr val="333333"/>
+                          </a:solidFill>
+                          <a:latin typeface="メイリオ"/>
+                          <a:ea typeface="メイリオ"/>
+                          <a:cs typeface="メイリオ"/>
+                        </a:rPr>
+                        <a:t>4</a:t>
+                      </a:r>
+                      <a:r>
+                        <a:rPr sz="800" b="0" dirty="0">
+                          <a:solidFill>
+                            <a:srgbClr val="333333"/>
+                          </a:solidFill>
+                          <a:latin typeface="メイリオ"/>
+                          <a:ea typeface="メイリオ"/>
+                          <a:cs typeface="メイリオ"/>
+                        </a:rPr>
+                        <a:t>件</a:t>
                       </a:r>
                     </a:p>
                   </a:txBody>
@@ -5497,7 +6141,7 @@
                 </a:tc>
                 <a:tc>
                   <a:txBody>
-                    <a:bodyPr wrap="square" lIns="43200" rIns="43200" tIns="7200" bIns="7200" anchor="ctr"/>
+                    <a:bodyPr/>
                     <a:lstStyle/>
                     <a:p>
                       <a:pPr algn="ctr"/>
@@ -5521,11 +6165,16 @@
                     </a:solidFill>
                   </a:tcPr>
                 </a:tc>
+                <a:extLst>
+                  <a:ext uri="{0D108BD9-81ED-4DB2-BD59-A6C34878D82A}">
+                    <a16:rowId xmlns:a16="http://schemas.microsoft.com/office/drawing/2014/main" val="10006"/>
+                  </a:ext>
+                </a:extLst>
               </a:tr>
               <a:tr h="406800">
                 <a:tc>
                   <a:txBody>
-                    <a:bodyPr wrap="square" lIns="43200" rIns="43200" tIns="7200" bIns="7200" anchor="ctr"/>
+                    <a:bodyPr/>
                     <a:lstStyle/>
                     <a:p>
                       <a:pPr algn="ctr"/>
@@ -5550,7 +6199,7 @@
                 </a:tc>
                 <a:tc>
                   <a:txBody>
-                    <a:bodyPr wrap="square" lIns="43200" rIns="43200" tIns="7200" bIns="7200" anchor="ctr"/>
+                    <a:bodyPr/>
                     <a:lstStyle/>
                     <a:p>
                       <a:pPr algn="ctr"/>
@@ -5575,7 +6224,7 @@
                 </a:tc>
                 <a:tc>
                   <a:txBody>
-                    <a:bodyPr wrap="square" lIns="43200" rIns="43200" tIns="7200" bIns="7200" anchor="ctr"/>
+                    <a:bodyPr/>
                     <a:lstStyle/>
                     <a:p>
                       <a:pPr algn="ctr"/>
@@ -5601,7 +6250,7 @@
                 </a:tc>
                 <a:tc>
                   <a:txBody>
-                    <a:bodyPr wrap="square" lIns="43200" rIns="43200" tIns="7200" bIns="7200" anchor="ctr"/>
+                    <a:bodyPr/>
                     <a:lstStyle/>
                     <a:p>
                       <a:pPr algn="l"/>
@@ -5627,7 +6276,7 @@
                 </a:tc>
                 <a:tc>
                   <a:txBody>
-                    <a:bodyPr wrap="square" lIns="43200" rIns="43200" tIns="7200" bIns="7200" anchor="ctr"/>
+                    <a:bodyPr/>
                     <a:lstStyle/>
                     <a:p>
                       <a:pPr algn="l"/>
@@ -5653,7 +6302,7 @@
                 </a:tc>
                 <a:tc>
                   <a:txBody>
-                    <a:bodyPr wrap="square" lIns="43200" rIns="43200" tIns="7200" bIns="7200" anchor="ctr"/>
+                    <a:bodyPr/>
                     <a:lstStyle/>
                     <a:p>
                       <a:pPr algn="ctr"/>
@@ -5678,12 +6327,12 @@
                 </a:tc>
                 <a:tc>
                   <a:txBody>
-                    <a:bodyPr wrap="square" lIns="43200" rIns="43200" tIns="7200" bIns="7200" anchor="ctr"/>
+                    <a:bodyPr/>
                     <a:lstStyle/>
                     <a:p>
                       <a:pPr algn="ctr"/>
                       <a:r>
-                        <a:rPr sz="800" b="0">
+                        <a:rPr sz="800" b="0" dirty="0" err="1">
                           <a:solidFill>
                             <a:srgbClr val="333333"/>
                           </a:solidFill>
@@ -5691,8 +6340,41 @@
                           <a:ea typeface="メイリオ"/>
                           <a:cs typeface="メイリオ"/>
                         </a:rPr>
-                        <a:t>対象外
-（採用向け）</a:t>
+                        <a:t>対象外</a:t>
+                      </a:r>
+                      <a:r>
+                        <a:rPr sz="800" b="0" dirty="0">
+                          <a:solidFill>
+                            <a:srgbClr val="333333"/>
+                          </a:solidFill>
+                          <a:latin typeface="メイリオ"/>
+                          <a:ea typeface="メイリオ"/>
+                          <a:cs typeface="メイリオ"/>
+                        </a:rPr>
+                        <a:t>
+（</a:t>
+                      </a:r>
+                      <a:r>
+                        <a:rPr sz="800" b="0" dirty="0" err="1">
+                          <a:solidFill>
+                            <a:srgbClr val="333333"/>
+                          </a:solidFill>
+                          <a:latin typeface="メイリオ"/>
+                          <a:ea typeface="メイリオ"/>
+                          <a:cs typeface="メイリオ"/>
+                        </a:rPr>
+                        <a:t>採用向け</a:t>
+                      </a:r>
+                      <a:r>
+                        <a:rPr sz="800" b="0" dirty="0">
+                          <a:solidFill>
+                            <a:srgbClr val="333333"/>
+                          </a:solidFill>
+                          <a:latin typeface="メイリオ"/>
+                          <a:ea typeface="メイリオ"/>
+                          <a:cs typeface="メイリオ"/>
+                        </a:rPr>
+                        <a:t>）</a:t>
                       </a:r>
                     </a:p>
                   </a:txBody>
@@ -5704,12 +6386,12 @@
                 </a:tc>
                 <a:tc>
                   <a:txBody>
-                    <a:bodyPr wrap="square" lIns="43200" rIns="43200" tIns="7200" bIns="7200" anchor="ctr"/>
+                    <a:bodyPr/>
                     <a:lstStyle/>
                     <a:p>
                       <a:pPr algn="ctr"/>
                       <a:r>
-                        <a:rPr sz="800" b="0">
+                        <a:rPr lang="ja-JP" altLang="en-US" sz="800" b="0" dirty="0">
                           <a:solidFill>
                             <a:srgbClr val="333333"/>
                           </a:solidFill>
@@ -5717,9 +6399,39 @@
                           <a:ea typeface="メイリオ"/>
                           <a:cs typeface="メイリオ"/>
                         </a:rPr>
-                        <a:t>コンサル費
-に含む</a:t>
+                        <a:t>コンサル費</a:t>
                       </a:r>
+                      <a:r>
+                        <a:rPr sz="800" b="0" dirty="0">
+                          <a:solidFill>
+                            <a:srgbClr val="333333"/>
+                          </a:solidFill>
+                          <a:latin typeface="メイリオ"/>
+                          <a:ea typeface="メイリオ"/>
+                          <a:cs typeface="メイリオ"/>
+                        </a:rPr>
+                        <a:t>
+</a:t>
+                      </a:r>
+                      <a:r>
+                        <a:rPr sz="800" b="0" dirty="0" err="1">
+                          <a:solidFill>
+                            <a:srgbClr val="333333"/>
+                          </a:solidFill>
+                          <a:latin typeface="メイリオ"/>
+                          <a:ea typeface="メイリオ"/>
+                          <a:cs typeface="メイリオ"/>
+                        </a:rPr>
+                        <a:t>に含む</a:t>
+                      </a:r>
+                      <a:endParaRPr sz="800" b="0" dirty="0">
+                        <a:solidFill>
+                          <a:srgbClr val="333333"/>
+                        </a:solidFill>
+                        <a:latin typeface="メイリオ"/>
+                        <a:ea typeface="メイリオ"/>
+                        <a:cs typeface="メイリオ"/>
+                      </a:endParaRPr>
                     </a:p>
                   </a:txBody>
                   <a:tcPr anchor="ctr">
@@ -5728,11 +6440,16 @@
                     </a:solidFill>
                   </a:tcPr>
                 </a:tc>
+                <a:extLst>
+                  <a:ext uri="{0D108BD9-81ED-4DB2-BD59-A6C34878D82A}">
+                    <a16:rowId xmlns:a16="http://schemas.microsoft.com/office/drawing/2014/main" val="10007"/>
+                  </a:ext>
+                </a:extLst>
               </a:tr>
               <a:tr h="406800">
                 <a:tc>
                   <a:txBody>
-                    <a:bodyPr wrap="square" lIns="43200" rIns="43200" tIns="7200" bIns="7200" anchor="ctr"/>
+                    <a:bodyPr/>
                     <a:lstStyle/>
                     <a:p>
                       <a:pPr algn="ctr"/>
@@ -5757,7 +6474,7 @@
                 </a:tc>
                 <a:tc>
                   <a:txBody>
-                    <a:bodyPr wrap="square" lIns="43200" rIns="43200" tIns="7200" bIns="7200" anchor="ctr"/>
+                    <a:bodyPr/>
                     <a:lstStyle/>
                     <a:p>
                       <a:pPr algn="ctr"/>
@@ -5782,7 +6499,7 @@
                 </a:tc>
                 <a:tc>
                   <a:txBody>
-                    <a:bodyPr wrap="square" lIns="43200" rIns="43200" tIns="7200" bIns="7200" anchor="ctr"/>
+                    <a:bodyPr/>
                     <a:lstStyle/>
                     <a:p>
                       <a:pPr algn="ctr"/>
@@ -5807,7 +6524,7 @@
                 </a:tc>
                 <a:tc>
                   <a:txBody>
-                    <a:bodyPr wrap="square" lIns="43200" rIns="43200" tIns="7200" bIns="7200" anchor="ctr"/>
+                    <a:bodyPr/>
                     <a:lstStyle/>
                     <a:p>
                       <a:pPr algn="l"/>
@@ -5832,7 +6549,7 @@
                 </a:tc>
                 <a:tc>
                   <a:txBody>
-                    <a:bodyPr wrap="square" lIns="43200" rIns="43200" tIns="7200" bIns="7200" anchor="ctr"/>
+                    <a:bodyPr/>
                     <a:lstStyle/>
                     <a:p>
                       <a:pPr algn="l"/>
@@ -5858,7 +6575,7 @@
                 </a:tc>
                 <a:tc>
                   <a:txBody>
-                    <a:bodyPr wrap="square" lIns="43200" rIns="43200" tIns="7200" bIns="7200" anchor="ctr"/>
+                    <a:bodyPr/>
                     <a:lstStyle/>
                     <a:p>
                       <a:pPr algn="ctr"/>
@@ -5883,7 +6600,7 @@
                 </a:tc>
                 <a:tc>
                   <a:txBody>
-                    <a:bodyPr wrap="square" lIns="43200" rIns="43200" tIns="7200" bIns="7200" anchor="ctr"/>
+                    <a:bodyPr/>
                     <a:lstStyle/>
                     <a:p>
                       <a:pPr algn="ctr"/>
@@ -5908,7 +6625,7 @@
                 </a:tc>
                 <a:tc>
                   <a:txBody>
-                    <a:bodyPr wrap="square" lIns="43200" rIns="43200" tIns="7200" bIns="7200" anchor="ctr"/>
+                    <a:bodyPr/>
                     <a:lstStyle/>
                     <a:p>
                       <a:pPr algn="ctr"/>
@@ -5931,25 +6648,20 @@
                     </a:solidFill>
                   </a:tcPr>
                 </a:tc>
+                <a:extLst>
+                  <a:ext uri="{0D108BD9-81ED-4DB2-BD59-A6C34878D82A}">
+                    <a16:rowId xmlns:a16="http://schemas.microsoft.com/office/drawing/2014/main" val="10008"/>
+                  </a:ext>
+                </a:extLst>
               </a:tr>
               <a:tr h="406800">
                 <a:tc>
                   <a:txBody>
-                    <a:bodyPr wrap="square" lIns="43200" rIns="43200" tIns="7200" bIns="7200" anchor="ctr"/>
+                    <a:bodyPr/>
                     <a:lstStyle/>
                     <a:p>
                       <a:pPr algn="ctr"/>
-                      <a:r>
-                        <a:rPr sz="800" b="1">
-                          <a:solidFill>
-                            <a:srgbClr val="333333"/>
-                          </a:solidFill>
-                          <a:latin typeface="メイリオ"/>
-                          <a:ea typeface="メイリオ"/>
-                          <a:cs typeface="メイリオ"/>
-                        </a:rPr>
-                        <a:t/>
-                      </a:r>
+                      <a:endParaRPr/>
                     </a:p>
                   </a:txBody>
                   <a:tcPr anchor="ctr">
@@ -5960,7 +6672,7 @@
                 </a:tc>
                 <a:tc>
                   <a:txBody>
-                    <a:bodyPr wrap="square" lIns="43200" rIns="43200" tIns="7200" bIns="7200" anchor="ctr"/>
+                    <a:bodyPr/>
                     <a:lstStyle/>
                     <a:p>
                       <a:pPr algn="ctr"/>
@@ -5985,21 +6697,11 @@
                 </a:tc>
                 <a:tc>
                   <a:txBody>
-                    <a:bodyPr wrap="square" lIns="43200" rIns="43200" tIns="7200" bIns="7200" anchor="ctr"/>
+                    <a:bodyPr/>
                     <a:lstStyle/>
                     <a:p>
                       <a:pPr algn="ctr"/>
-                      <a:r>
-                        <a:rPr sz="800" b="1">
-                          <a:solidFill>
-                            <a:srgbClr val="333333"/>
-                          </a:solidFill>
-                          <a:latin typeface="メイリオ"/>
-                          <a:ea typeface="メイリオ"/>
-                          <a:cs typeface="メイリオ"/>
-                        </a:rPr>
-                        <a:t/>
-                      </a:r>
+                      <a:endParaRPr/>
                     </a:p>
                   </a:txBody>
                   <a:tcPr anchor="ctr">
@@ -6010,21 +6712,11 @@
                 </a:tc>
                 <a:tc>
                   <a:txBody>
-                    <a:bodyPr wrap="square" lIns="43200" rIns="43200" tIns="7200" bIns="7200" anchor="ctr"/>
+                    <a:bodyPr/>
                     <a:lstStyle/>
                     <a:p>
                       <a:pPr algn="l"/>
-                      <a:r>
-                        <a:rPr sz="800" b="1">
-                          <a:solidFill>
-                            <a:srgbClr val="333333"/>
-                          </a:solidFill>
-                          <a:latin typeface="メイリオ"/>
-                          <a:ea typeface="メイリオ"/>
-                          <a:cs typeface="メイリオ"/>
-                        </a:rPr>
-                        <a:t/>
-                      </a:r>
+                      <a:endParaRPr/>
                     </a:p>
                   </a:txBody>
                   <a:tcPr anchor="ctr">
@@ -6035,21 +6727,11 @@
                 </a:tc>
                 <a:tc>
                   <a:txBody>
-                    <a:bodyPr wrap="square" lIns="43200" rIns="43200" tIns="7200" bIns="7200" anchor="ctr"/>
+                    <a:bodyPr/>
                     <a:lstStyle/>
                     <a:p>
                       <a:pPr algn="l"/>
-                      <a:r>
-                        <a:rPr sz="800" b="1">
-                          <a:solidFill>
-                            <a:srgbClr val="333333"/>
-                          </a:solidFill>
-                          <a:latin typeface="メイリオ"/>
-                          <a:ea typeface="メイリオ"/>
-                          <a:cs typeface="メイリオ"/>
-                        </a:rPr>
-                        <a:t/>
-                      </a:r>
+                      <a:endParaRPr/>
                     </a:p>
                   </a:txBody>
                   <a:tcPr anchor="ctr">
@@ -6060,7 +6742,7 @@
                 </a:tc>
                 <a:tc>
                   <a:txBody>
-                    <a:bodyPr wrap="square" lIns="43200" rIns="43200" tIns="7200" bIns="7200" anchor="ctr"/>
+                    <a:bodyPr/>
                     <a:lstStyle/>
                     <a:p>
                       <a:pPr algn="ctr"/>
@@ -6085,12 +6767,12 @@
                 </a:tc>
                 <a:tc>
                   <a:txBody>
-                    <a:bodyPr wrap="square" lIns="43200" rIns="43200" tIns="7200" bIns="7200" anchor="ctr"/>
+                    <a:bodyPr/>
                     <a:lstStyle/>
                     <a:p>
                       <a:pPr algn="ctr"/>
                       <a:r>
-                        <a:rPr sz="800" b="1">
+                        <a:rPr sz="800" b="1" dirty="0">
                           <a:solidFill>
                             <a:srgbClr val="C00000"/>
                           </a:solidFill>
@@ -6098,7 +6780,7 @@
                           <a:ea typeface="メイリオ"/>
                           <a:cs typeface="メイリオ"/>
                         </a:rPr>
-                        <a:t>約15件</a:t>
+                        <a:t>15件</a:t>
                       </a:r>
                     </a:p>
                   </a:txBody>
@@ -6110,21 +6792,11 @@
                 </a:tc>
                 <a:tc>
                   <a:txBody>
-                    <a:bodyPr wrap="square" lIns="43200" rIns="43200" tIns="7200" bIns="7200" anchor="ctr"/>
+                    <a:bodyPr/>
                     <a:lstStyle/>
                     <a:p>
                       <a:pPr algn="ctr"/>
-                      <a:r>
-                        <a:rPr sz="800" b="1">
-                          <a:solidFill>
-                            <a:srgbClr val="333333"/>
-                          </a:solidFill>
-                          <a:latin typeface="メイリオ"/>
-                          <a:ea typeface="メイリオ"/>
-                          <a:cs typeface="メイリオ"/>
-                        </a:rPr>
-                        <a:t/>
-                      </a:r>
+                      <a:endParaRPr dirty="0"/>
                     </a:p>
                   </a:txBody>
                   <a:tcPr anchor="ctr">
@@ -6133,6 +6805,11 @@
                     </a:solidFill>
                   </a:tcPr>
                 </a:tc>
+                <a:extLst>
+                  <a:ext uri="{0D108BD9-81ED-4DB2-BD59-A6C34878D82A}">
+                    <a16:rowId xmlns:a16="http://schemas.microsoft.com/office/drawing/2014/main" val="10009"/>
+                  </a:ext>
+                </a:extLst>
               </a:tr>
             </a:tbl>
           </a:graphicData>
@@ -6154,7 +6831,7 @@
         </p:blipFill>
         <p:spPr>
           <a:xfrm>
-            <a:off x="7956000" y="1527600"/>
+            <a:off x="8095338" y="1532339"/>
             <a:ext cx="1519200" cy="1012799"/>
           </a:xfrm>
           <a:prstGeom prst="rect">
@@ -6183,7 +6860,7 @@
         </p:blipFill>
         <p:spPr>
           <a:xfrm>
-            <a:off x="7956000" y="2754317"/>
+            <a:off x="8095338" y="2759056"/>
             <a:ext cx="1519200" cy="2699364"/>
           </a:xfrm>
           <a:prstGeom prst="rect">
@@ -6205,7 +6882,7 @@
         <p:spPr>
           <a:xfrm>
             <a:off x="432000" y="5670000"/>
-            <a:ext cx="9043200" cy="503999"/>
+            <a:ext cx="9043200" cy="405259"/>
           </a:xfrm>
           <a:prstGeom prst="rect">
             <a:avLst/>
@@ -6213,7 +6890,7 @@
           <a:noFill/>
         </p:spPr>
         <p:txBody>
-          <a:bodyPr wrap="square" lIns="0" rIns="50400" tIns="21600" bIns="21600" anchor="t">
+          <a:bodyPr wrap="square" lIns="0" tIns="21600" rIns="50400" bIns="21600" anchor="t">
             <a:spAutoFit/>
           </a:bodyPr>
           <a:lstStyle/>
@@ -6224,7 +6901,7 @@
               </a:lnSpc>
             </a:pPr>
             <a:r>
-              <a:rPr sz="900">
+              <a:rPr sz="1000" dirty="0">
                 <a:solidFill>
                   <a:srgbClr val="333333"/>
                 </a:solidFill>
@@ -6232,7 +6909,227 @@
                 <a:ea typeface="メイリオ"/>
                 <a:cs typeface="メイリオ"/>
               </a:rPr>
-              <a:t>ステップの中身（全10通の例）：0日 あいさつ・職種を聞く → 1日 職種の違い → 2日 働き方 → 3日 求人のご案内① → 4日 資格取得支援 → 5日 他の職種との比較 → 7日 資格別の年収 → 10日 現場の様子 → 12日 地域別の新着求人 → 14日 求人のご案内②</a:t>
+              <a:t>ステップの中身（全10通の例）：0日 </a:t>
+            </a:r>
+            <a:r>
+              <a:rPr sz="1000" dirty="0" err="1">
+                <a:solidFill>
+                  <a:srgbClr val="333333"/>
+                </a:solidFill>
+                <a:latin typeface="メイリオ"/>
+                <a:ea typeface="メイリオ"/>
+                <a:cs typeface="メイリオ"/>
+              </a:rPr>
+              <a:t>あいさつ・職種を聞く</a:t>
+            </a:r>
+            <a:r>
+              <a:rPr sz="1000" dirty="0">
+                <a:solidFill>
+                  <a:srgbClr val="333333"/>
+                </a:solidFill>
+                <a:latin typeface="メイリオ"/>
+                <a:ea typeface="メイリオ"/>
+                <a:cs typeface="メイリオ"/>
+              </a:rPr>
+              <a:t> → 1日 </a:t>
+            </a:r>
+            <a:r>
+              <a:rPr sz="1000" dirty="0" err="1">
+                <a:solidFill>
+                  <a:srgbClr val="333333"/>
+                </a:solidFill>
+                <a:latin typeface="メイリオ"/>
+                <a:ea typeface="メイリオ"/>
+                <a:cs typeface="メイリオ"/>
+              </a:rPr>
+              <a:t>職種の違い</a:t>
+            </a:r>
+            <a:r>
+              <a:rPr sz="1000" dirty="0">
+                <a:solidFill>
+                  <a:srgbClr val="333333"/>
+                </a:solidFill>
+                <a:latin typeface="メイリオ"/>
+                <a:ea typeface="メイリオ"/>
+                <a:cs typeface="メイリオ"/>
+              </a:rPr>
+              <a:t> → 2日 </a:t>
+            </a:r>
+            <a:r>
+              <a:rPr sz="1000" dirty="0" err="1">
+                <a:solidFill>
+                  <a:srgbClr val="333333"/>
+                </a:solidFill>
+                <a:latin typeface="メイリオ"/>
+                <a:ea typeface="メイリオ"/>
+                <a:cs typeface="メイリオ"/>
+              </a:rPr>
+              <a:t>働き方</a:t>
+            </a:r>
+            <a:r>
+              <a:rPr sz="1000" dirty="0">
+                <a:solidFill>
+                  <a:srgbClr val="333333"/>
+                </a:solidFill>
+                <a:latin typeface="メイリオ"/>
+                <a:ea typeface="メイリオ"/>
+                <a:cs typeface="メイリオ"/>
+              </a:rPr>
+              <a:t> → 3日 </a:t>
+            </a:r>
+            <a:r>
+              <a:rPr sz="1000" dirty="0" err="1">
+                <a:solidFill>
+                  <a:srgbClr val="333333"/>
+                </a:solidFill>
+                <a:latin typeface="メイリオ"/>
+                <a:ea typeface="メイリオ"/>
+                <a:cs typeface="メイリオ"/>
+              </a:rPr>
+              <a:t>求人のご案内</a:t>
+            </a:r>
+            <a:r>
+              <a:rPr sz="1000" dirty="0">
+                <a:solidFill>
+                  <a:srgbClr val="333333"/>
+                </a:solidFill>
+                <a:latin typeface="メイリオ"/>
+                <a:ea typeface="メイリオ"/>
+                <a:cs typeface="メイリオ"/>
+              </a:rPr>
+              <a:t>① → 4日 </a:t>
+            </a:r>
+            <a:r>
+              <a:rPr sz="1000" dirty="0" err="1">
+                <a:solidFill>
+                  <a:srgbClr val="333333"/>
+                </a:solidFill>
+                <a:latin typeface="メイリオ"/>
+                <a:ea typeface="メイリオ"/>
+                <a:cs typeface="メイリオ"/>
+              </a:rPr>
+              <a:t>資格取得支援</a:t>
+            </a:r>
+            <a:r>
+              <a:rPr sz="1000" dirty="0">
+                <a:solidFill>
+                  <a:srgbClr val="333333"/>
+                </a:solidFill>
+                <a:latin typeface="メイリオ"/>
+                <a:ea typeface="メイリオ"/>
+                <a:cs typeface="メイリオ"/>
+              </a:rPr>
+              <a:t> → 5日 </a:t>
+            </a:r>
+            <a:r>
+              <a:rPr sz="1000" dirty="0" err="1">
+                <a:solidFill>
+                  <a:srgbClr val="333333"/>
+                </a:solidFill>
+                <a:latin typeface="メイリオ"/>
+                <a:ea typeface="メイリオ"/>
+                <a:cs typeface="メイリオ"/>
+              </a:rPr>
+              <a:t>他の職種との比較</a:t>
+            </a:r>
+            <a:r>
+              <a:rPr sz="1000" dirty="0">
+                <a:solidFill>
+                  <a:srgbClr val="333333"/>
+                </a:solidFill>
+                <a:latin typeface="メイリオ"/>
+                <a:ea typeface="メイリオ"/>
+                <a:cs typeface="メイリオ"/>
+              </a:rPr>
+              <a:t> → 7日 </a:t>
+            </a:r>
+            <a:r>
+              <a:rPr sz="1000" dirty="0" err="1">
+                <a:solidFill>
+                  <a:srgbClr val="333333"/>
+                </a:solidFill>
+                <a:latin typeface="メイリオ"/>
+                <a:ea typeface="メイリオ"/>
+                <a:cs typeface="メイリオ"/>
+              </a:rPr>
+              <a:t>資格別の年収</a:t>
+            </a:r>
+            <a:r>
+              <a:rPr sz="1000" dirty="0">
+                <a:solidFill>
+                  <a:srgbClr val="333333"/>
+                </a:solidFill>
+                <a:latin typeface="メイリオ"/>
+                <a:ea typeface="メイリオ"/>
+                <a:cs typeface="メイリオ"/>
+              </a:rPr>
+              <a:t> → 10日 </a:t>
+            </a:r>
+            <a:r>
+              <a:rPr sz="1000" dirty="0" err="1">
+                <a:solidFill>
+                  <a:srgbClr val="333333"/>
+                </a:solidFill>
+                <a:latin typeface="メイリオ"/>
+                <a:ea typeface="メイリオ"/>
+                <a:cs typeface="メイリオ"/>
+              </a:rPr>
+              <a:t>現場の様子</a:t>
+            </a:r>
+            <a:r>
+              <a:rPr sz="1000" dirty="0">
+                <a:solidFill>
+                  <a:srgbClr val="333333"/>
+                </a:solidFill>
+                <a:latin typeface="メイリオ"/>
+                <a:ea typeface="メイリオ"/>
+                <a:cs typeface="メイリオ"/>
+              </a:rPr>
+              <a:t> → 12日 </a:t>
+            </a:r>
+            <a:r>
+              <a:rPr sz="1000" dirty="0" err="1">
+                <a:solidFill>
+                  <a:srgbClr val="333333"/>
+                </a:solidFill>
+                <a:latin typeface="メイリオ"/>
+                <a:ea typeface="メイリオ"/>
+                <a:cs typeface="メイリオ"/>
+              </a:rPr>
+              <a:t>地域別の新着求人</a:t>
+            </a:r>
+            <a:r>
+              <a:rPr sz="1000" dirty="0">
+                <a:solidFill>
+                  <a:srgbClr val="333333"/>
+                </a:solidFill>
+                <a:latin typeface="メイリオ"/>
+                <a:ea typeface="メイリオ"/>
+                <a:cs typeface="メイリオ"/>
+              </a:rPr>
+              <a:t> → 14日 </a:t>
+            </a:r>
+            <a:r>
+              <a:rPr sz="1000" dirty="0" err="1">
+                <a:solidFill>
+                  <a:srgbClr val="333333"/>
+                </a:solidFill>
+                <a:latin typeface="メイリオ"/>
+                <a:ea typeface="メイリオ"/>
+                <a:cs typeface="メイリオ"/>
+              </a:rPr>
+              <a:t>求人のご案内</a:t>
+            </a:r>
+            <a:r>
+              <a:rPr sz="1000" dirty="0">
+                <a:solidFill>
+                  <a:srgbClr val="333333"/>
+                </a:solidFill>
+                <a:latin typeface="メイリオ"/>
+                <a:ea typeface="メイリオ"/>
+                <a:cs typeface="メイリオ"/>
+              </a:rPr>
+              <a:t>②</a:t>
             </a:r>
           </a:p>
         </p:txBody>
@@ -6254,7 +7151,7 @@
           <a:noFill/>
         </p:spPr>
         <p:txBody>
-          <a:bodyPr wrap="square" lIns="0" rIns="0" tIns="21600" bIns="21600" anchor="t">
+          <a:bodyPr wrap="square" lIns="0" tIns="21600" rIns="0" bIns="21600" anchor="t">
             <a:spAutoFit/>
           </a:bodyPr>
           <a:lstStyle/>
@@ -6273,7 +7170,7 @@
                 <a:ea typeface="メイリオ"/>
                 <a:cs typeface="メイリオ"/>
               </a:rPr>
-              <a:t>※クリック数はSIM ver2.6の9月の値を、動線ごとの友だち数（離脱防止29%・LINEで登録71%）と配信ごとのクリック比率で振り分けたもの。反応率の補正（1.46倍）と複数回のクリック（2.05倍）を含むため、対象×開封率×クリック率の単純な掛け算とは一致しません／コンサル費＝月20万円（初期20万円）、サンクスLINE（完了画面からの友だち追加の仕組み）＝月5万円（初期10万円）／画面はイメージです</a:t>
+              <a:t>※クリック数はSIM ver2.6の9月の値を、動線ごとの友だち数（離脱防止29%・LINEで登録71%）と配信ごとのクリック比率で振り分けたもの。反応率の補正（1.46倍）と複数回のクリック（2.05倍）を含むため、対象×開封率×クリック率の単純な掛け算とは一致しません／コンサル費＝月20万円（初期20万円）、サンクスLINE＝月5万円（初期10万円）／画面はイメージです</a:t>
             </a:r>
           </a:p>
         </p:txBody>
@@ -6291,7 +7188,7 @@
 </p:sld>
 </file>
 
-<file path=ppt/slides/slide13.xml><?xml version="1.0" encoding="utf-8"?>
+<file path=ppt/slides/slide3.xml><?xml version="1.0" encoding="utf-8"?>
 <p:sld xmlns:a="http://schemas.openxmlformats.org/drawingml/2006/main" xmlns:r="http://schemas.openxmlformats.org/officeDocument/2006/relationships" xmlns:p="http://schemas.openxmlformats.org/presentationml/2006/main">
   <p:cSld>
     <p:spTree>
@@ -6331,7 +7228,7 @@
           <a:noFill/>
         </p:spPr>
         <p:txBody>
-          <a:bodyPr wrap="square" lIns="0" rIns="0" tIns="21600" bIns="21600" anchor="ctr">
+          <a:bodyPr wrap="square" lIns="0" tIns="21600" rIns="0" bIns="21600" anchor="ctr">
             <a:spAutoFit/>
           </a:bodyPr>
           <a:lstStyle/>
@@ -6359,8 +7256,8 @@
         </p:nvSpPr>
         <p:spPr>
           <a:xfrm>
-            <a:off x="432000" y="648000"/>
-            <a:ext cx="9036000" cy="684000"/>
+            <a:off x="432000" y="836230"/>
+            <a:ext cx="9036000" cy="307540"/>
           </a:xfrm>
           <a:prstGeom prst="rect">
             <a:avLst/>
@@ -6368,7 +7265,7 @@
           <a:noFill/>
         </p:spPr>
         <p:txBody>
-          <a:bodyPr wrap="square" lIns="0" rIns="0" tIns="21600" bIns="21600" anchor="ctr">
+          <a:bodyPr wrap="square" lIns="0" tIns="21600" rIns="0" bIns="21600" anchor="ctr">
             <a:spAutoFit/>
           </a:bodyPr>
           <a:lstStyle/>
@@ -6379,7 +7276,7 @@
               </a:lnSpc>
             </a:pPr>
             <a:r>
-              <a:rPr sz="1250">
+              <a:rPr sz="1400" dirty="0" err="1">
                 <a:solidFill>
                   <a:srgbClr val="333333"/>
                 </a:solidFill>
@@ -6387,7 +7284,18 @@
                 <a:ea typeface="メイリオ"/>
                 <a:cs typeface="メイリオ"/>
               </a:rPr>
-              <a:t>友だちになった方が、電話なしで迷わず質問・相談できるようにします。</a:t>
+              <a:t>友だちになった方が、電話なしで質問・相談できるようにします</a:t>
+            </a:r>
+            <a:r>
+              <a:rPr sz="1400" dirty="0">
+                <a:solidFill>
+                  <a:srgbClr val="333333"/>
+                </a:solidFill>
+                <a:latin typeface="メイリオ"/>
+                <a:ea typeface="メイリオ"/>
+                <a:cs typeface="メイリオ"/>
+              </a:rPr>
+              <a:t>。</a:t>
             </a:r>
           </a:p>
         </p:txBody>
@@ -6446,14 +7354,32 @@
                 <a:tableStyleId>{5C22544A-7EE6-4342-B048-85BDC9FD1C3A}</a:tableStyleId>
               </a:tblPr>
               <a:tblGrid>
-                <a:gridCol w="2592000"/>
-                <a:gridCol w="2592000"/>
-                <a:gridCol w="2599200"/>
+                <a:gridCol w="2592000">
+                  <a:extLst>
+                    <a:ext uri="{9D8B030D-6E8A-4147-A177-3AD203B41FA5}">
+                      <a16:colId xmlns:a16="http://schemas.microsoft.com/office/drawing/2014/main" val="20000"/>
+                    </a:ext>
+                  </a:extLst>
+                </a:gridCol>
+                <a:gridCol w="2592000">
+                  <a:extLst>
+                    <a:ext uri="{9D8B030D-6E8A-4147-A177-3AD203B41FA5}">
+                      <a16:colId xmlns:a16="http://schemas.microsoft.com/office/drawing/2014/main" val="20001"/>
+                    </a:ext>
+                  </a:extLst>
+                </a:gridCol>
+                <a:gridCol w="2599200">
+                  <a:extLst>
+                    <a:ext uri="{9D8B030D-6E8A-4147-A177-3AD203B41FA5}">
+                      <a16:colId xmlns:a16="http://schemas.microsoft.com/office/drawing/2014/main" val="20002"/>
+                    </a:ext>
+                  </a:extLst>
+                </a:gridCol>
               </a:tblGrid>
               <a:tr h="324000">
                 <a:tc>
                   <a:txBody>
-                    <a:bodyPr wrap="square" lIns="43200" rIns="43200" tIns="7200" bIns="7200" anchor="ctr"/>
+                    <a:bodyPr/>
                     <a:lstStyle/>
                     <a:p>
                       <a:pPr algn="ctr"/>
@@ -6478,7 +7404,7 @@
                 </a:tc>
                 <a:tc>
                   <a:txBody>
-                    <a:bodyPr wrap="square" lIns="43200" rIns="43200" tIns="7200" bIns="7200" anchor="ctr"/>
+                    <a:bodyPr/>
                     <a:lstStyle/>
                     <a:p>
                       <a:pPr algn="ctr"/>
@@ -6503,7 +7429,7 @@
                 </a:tc>
                 <a:tc>
                   <a:txBody>
-                    <a:bodyPr wrap="square" lIns="43200" rIns="43200" tIns="7200" bIns="7200" anchor="ctr"/>
+                    <a:bodyPr/>
                     <a:lstStyle/>
                     <a:p>
                       <a:pPr algn="ctr"/>
@@ -6526,6 +7452,11 @@
                     </a:solidFill>
                   </a:tcPr>
                 </a:tc>
+                <a:extLst>
+                  <a:ext uri="{0D108BD9-81ED-4DB2-BD59-A6C34878D82A}">
+                    <a16:rowId xmlns:a16="http://schemas.microsoft.com/office/drawing/2014/main" val="10000"/>
+                  </a:ext>
+                </a:extLst>
               </a:tr>
             </a:tbl>
           </a:graphicData>
@@ -6570,7 +7501,7 @@
           </a:fontRef>
         </p:style>
         <p:txBody>
-          <a:bodyPr rtlCol="0" anchor="ctr" wrap="square" lIns="36000" rIns="36000" tIns="21600" bIns="21600"/>
+          <a:bodyPr wrap="square" lIns="36000" tIns="21600" rIns="36000" bIns="21600" rtlCol="0" anchor="ctr"/>
           <a:lstStyle/>
           <a:p>
             <a:pPr algn="ctr">
@@ -6579,7 +7510,7 @@
               </a:spcAft>
             </a:pPr>
             <a:r>
-              <a:rPr sz="1100" b="1">
+              <a:rPr sz="1200" b="1" dirty="0">
                 <a:solidFill>
                   <a:srgbClr val="FFFFFF"/>
                 </a:solidFill>
@@ -6593,7 +7524,7 @@
           <a:p>
             <a:pPr algn="ctr"/>
             <a:r>
-              <a:rPr sz="950" b="1">
+              <a:rPr sz="1000" b="1" dirty="0" err="1">
                 <a:solidFill>
                   <a:srgbClr val="FFFFFF"/>
                 </a:solidFill>
@@ -6603,11 +7534,19 @@
               </a:rPr>
               <a:t>離脱防止</a:t>
             </a:r>
+            <a:endParaRPr sz="1000" b="1" dirty="0">
+              <a:solidFill>
+                <a:srgbClr val="FFFFFF"/>
+              </a:solidFill>
+              <a:latin typeface="メイリオ"/>
+              <a:ea typeface="メイリオ"/>
+              <a:cs typeface="メイリオ"/>
+            </a:endParaRPr>
           </a:p>
           <a:p>
             <a:pPr algn="ctr"/>
             <a:r>
-              <a:rPr sz="950" b="1">
+              <a:rPr sz="1000" b="1" dirty="0" err="1">
                 <a:solidFill>
                   <a:srgbClr val="FFFFFF"/>
                 </a:solidFill>
@@ -6617,6 +7556,14 @@
               </a:rPr>
               <a:t>ポップアップ</a:t>
             </a:r>
+            <a:endParaRPr sz="1000" b="1" dirty="0">
+              <a:solidFill>
+                <a:srgbClr val="FFFFFF"/>
+              </a:solidFill>
+              <a:latin typeface="メイリオ"/>
+              <a:ea typeface="メイリオ"/>
+              <a:cs typeface="メイリオ"/>
+            </a:endParaRPr>
           </a:p>
         </p:txBody>
       </p:sp>
@@ -6661,7 +7608,7 @@
           </a:fontRef>
         </p:style>
         <p:txBody>
-          <a:bodyPr rtlCol="0" anchor="ctr" wrap="square" lIns="125999" rIns="108000" tIns="21600" bIns="21600"/>
+          <a:bodyPr wrap="square" lIns="125999" tIns="21600" rIns="108000" bIns="21600" rtlCol="0" anchor="ctr"/>
           <a:lstStyle/>
           <a:p>
             <a:pPr algn="l">
@@ -6670,7 +7617,7 @@
               </a:lnSpc>
             </a:pPr>
             <a:r>
-              <a:rPr sz="1100">
+              <a:rPr sz="1100" dirty="0">
                 <a:solidFill>
                   <a:srgbClr val="333333"/>
                 </a:solidFill>
@@ -6724,7 +7671,7 @@
           </a:fontRef>
         </p:style>
         <p:txBody>
-          <a:bodyPr rtlCol="0" anchor="ctr" wrap="square" lIns="125999" rIns="108000" tIns="21600" bIns="21600"/>
+          <a:bodyPr wrap="square" lIns="125999" tIns="21600" rIns="108000" bIns="21600" rtlCol="0" anchor="ctr"/>
           <a:lstStyle/>
           <a:p>
             <a:pPr algn="l">
@@ -6733,7 +7680,7 @@
               </a:lnSpc>
             </a:pPr>
             <a:r>
-              <a:rPr sz="1100">
+              <a:rPr sz="1100" dirty="0" err="1">
                 <a:solidFill>
                   <a:srgbClr val="333333"/>
                 </a:solidFill>
@@ -6741,8 +7688,16 @@
                 <a:ea typeface="メイリオ"/>
                 <a:cs typeface="メイリオ"/>
               </a:rPr>
-              <a:t>求人の条件や働き方の相談に、LINEで対応（電話は不要）</a:t>
-            </a:r>
+              <a:t>求人の条件や働き方の相談に、LINEで対応</a:t>
+            </a:r>
+            <a:endParaRPr sz="1100" dirty="0">
+              <a:solidFill>
+                <a:srgbClr val="333333"/>
+              </a:solidFill>
+              <a:latin typeface="メイリオ"/>
+              <a:ea typeface="メイリオ"/>
+              <a:cs typeface="メイリオ"/>
+            </a:endParaRPr>
           </a:p>
         </p:txBody>
       </p:sp>
@@ -6787,7 +7742,7 @@
           </a:fontRef>
         </p:style>
         <p:txBody>
-          <a:bodyPr rtlCol="0" anchor="ctr" wrap="square" lIns="125999" rIns="108000" tIns="21600" bIns="21600"/>
+          <a:bodyPr wrap="square" lIns="125999" tIns="21600" rIns="108000" bIns="21600" rtlCol="0" anchor="ctr"/>
           <a:lstStyle/>
           <a:p>
             <a:pPr algn="l">
@@ -6848,7 +7803,7 @@
           </a:fontRef>
         </p:style>
         <p:txBody>
-          <a:bodyPr rtlCol="0" anchor="ctr" wrap="square" lIns="36000" rIns="36000" tIns="21600" bIns="21600"/>
+          <a:bodyPr wrap="square" lIns="36000" tIns="21600" rIns="36000" bIns="21600" rtlCol="0" anchor="ctr"/>
           <a:lstStyle/>
           <a:p>
             <a:pPr algn="ctr">
@@ -6857,7 +7812,7 @@
               </a:spcAft>
             </a:pPr>
             <a:r>
-              <a:rPr sz="1100" b="1">
+              <a:rPr sz="1200" b="1" dirty="0">
                 <a:solidFill>
                   <a:srgbClr val="FFFFFF"/>
                 </a:solidFill>
@@ -6871,7 +7826,7 @@
           <a:p>
             <a:pPr algn="ctr"/>
             <a:r>
-              <a:rPr sz="950" b="1">
+              <a:rPr sz="1000" b="1" dirty="0">
                 <a:solidFill>
                   <a:srgbClr val="FFFFFF"/>
                 </a:solidFill>
@@ -6879,13 +7834,35 @@
                 <a:ea typeface="メイリオ"/>
                 <a:cs typeface="メイリオ"/>
               </a:rPr>
-              <a:t>「LINEで登録」</a:t>
+              <a:t>「</a:t>
+            </a:r>
+            <a:r>
+              <a:rPr sz="1000" b="1" dirty="0" err="1">
+                <a:solidFill>
+                  <a:srgbClr val="FFFFFF"/>
+                </a:solidFill>
+                <a:latin typeface="メイリオ"/>
+                <a:ea typeface="メイリオ"/>
+                <a:cs typeface="メイリオ"/>
+              </a:rPr>
+              <a:t>LINEで登録</a:t>
+            </a:r>
+            <a:r>
+              <a:rPr sz="1000" b="1" dirty="0">
+                <a:solidFill>
+                  <a:srgbClr val="FFFFFF"/>
+                </a:solidFill>
+                <a:latin typeface="メイリオ"/>
+                <a:ea typeface="メイリオ"/>
+                <a:cs typeface="メイリオ"/>
+              </a:rPr>
+              <a:t>」</a:t>
             </a:r>
           </a:p>
           <a:p>
             <a:pPr algn="ctr"/>
             <a:r>
-              <a:rPr sz="950" b="1">
+              <a:rPr sz="1000" b="1" dirty="0" err="1">
                 <a:solidFill>
                   <a:srgbClr val="FFFFFF"/>
                 </a:solidFill>
@@ -6895,6 +7872,14 @@
               </a:rPr>
               <a:t>ボタン</a:t>
             </a:r>
+            <a:endParaRPr sz="1000" b="1" dirty="0">
+              <a:solidFill>
+                <a:srgbClr val="FFFFFF"/>
+              </a:solidFill>
+              <a:latin typeface="メイリオ"/>
+              <a:ea typeface="メイリオ"/>
+              <a:cs typeface="メイリオ"/>
+            </a:endParaRPr>
           </a:p>
         </p:txBody>
       </p:sp>
@@ -6939,7 +7924,7 @@
           </a:fontRef>
         </p:style>
         <p:txBody>
-          <a:bodyPr rtlCol="0" anchor="ctr" wrap="square" lIns="125999" rIns="108000" tIns="21600" bIns="21600"/>
+          <a:bodyPr wrap="square" lIns="125999" tIns="21600" rIns="108000" bIns="21600" rtlCol="0" anchor="ctr"/>
           <a:lstStyle/>
           <a:p>
             <a:pPr algn="l">
@@ -7002,7 +7987,7 @@
           </a:fontRef>
         </p:style>
         <p:txBody>
-          <a:bodyPr rtlCol="0" anchor="ctr" wrap="square" lIns="125999" rIns="108000" tIns="21600" bIns="21600"/>
+          <a:bodyPr wrap="square" lIns="125999" tIns="21600" rIns="108000" bIns="21600" rtlCol="0" anchor="ctr"/>
           <a:lstStyle/>
           <a:p>
             <a:pPr algn="l">
@@ -7011,7 +7996,7 @@
               </a:lnSpc>
             </a:pPr>
             <a:r>
-              <a:rPr sz="1100">
+              <a:rPr sz="1100" dirty="0" err="1">
                 <a:solidFill>
                   <a:srgbClr val="333333"/>
                 </a:solidFill>
@@ -7019,8 +8004,16 @@
                 <a:ea typeface="メイリオ"/>
                 <a:cs typeface="メイリオ"/>
               </a:rPr>
-              <a:t>求人の条件や面談の相談に、LINEで対応（電話は不要）</a:t>
-            </a:r>
+              <a:t>求人の条件や面談の相談に、LINEで対応</a:t>
+            </a:r>
+            <a:endParaRPr sz="1100" dirty="0">
+              <a:solidFill>
+                <a:srgbClr val="333333"/>
+              </a:solidFill>
+              <a:latin typeface="メイリオ"/>
+              <a:ea typeface="メイリオ"/>
+              <a:cs typeface="メイリオ"/>
+            </a:endParaRPr>
           </a:p>
         </p:txBody>
       </p:sp>
@@ -7065,7 +8058,7 @@
           </a:fontRef>
         </p:style>
         <p:txBody>
-          <a:bodyPr rtlCol="0" anchor="ctr" wrap="square" lIns="125999" rIns="108000" tIns="21600" bIns="21600"/>
+          <a:bodyPr wrap="square" lIns="125999" tIns="21600" rIns="108000" bIns="21600" rtlCol="0" anchor="ctr"/>
           <a:lstStyle/>
           <a:p>
             <a:pPr algn="l">
@@ -7126,7 +8119,7 @@
           </a:fontRef>
         </p:style>
         <p:txBody>
-          <a:bodyPr rtlCol="0" anchor="ctr" wrap="square" lIns="36000" rIns="36000" tIns="21600" bIns="21600"/>
+          <a:bodyPr wrap="square" lIns="36000" tIns="21600" rIns="36000" bIns="21600" rtlCol="0" anchor="ctr"/>
           <a:lstStyle/>
           <a:p>
             <a:pPr algn="ctr">
@@ -7135,7 +8128,7 @@
               </a:spcAft>
             </a:pPr>
             <a:r>
-              <a:rPr sz="1100" b="1">
+              <a:rPr sz="1200" b="1">
                 <a:solidFill>
                   <a:srgbClr val="FFFFFF"/>
                 </a:solidFill>
@@ -7149,7 +8142,7 @@
           <a:p>
             <a:pPr algn="ctr"/>
             <a:r>
-              <a:rPr sz="950" b="1">
+              <a:rPr sz="1000" b="1">
                 <a:solidFill>
                   <a:srgbClr val="FFFFFF"/>
                 </a:solidFill>
@@ -7163,7 +8156,7 @@
           <a:p>
             <a:pPr algn="ctr"/>
             <a:r>
-              <a:rPr sz="950" b="1">
+              <a:rPr sz="1000" b="1">
                 <a:solidFill>
                   <a:srgbClr val="FFFFFF"/>
                 </a:solidFill>
@@ -7217,7 +8210,7 @@
           </a:fontRef>
         </p:style>
         <p:txBody>
-          <a:bodyPr rtlCol="0" anchor="ctr" wrap="square" lIns="125999" rIns="108000" tIns="21600" bIns="21600"/>
+          <a:bodyPr wrap="square" lIns="125999" tIns="21600" rIns="108000" bIns="21600" rtlCol="0" anchor="ctr"/>
           <a:lstStyle/>
           <a:p>
             <a:pPr algn="l">
@@ -7280,7 +8273,7 @@
           </a:fontRef>
         </p:style>
         <p:txBody>
-          <a:bodyPr rtlCol="0" anchor="ctr" wrap="square" lIns="125999" rIns="108000" tIns="21600" bIns="21600"/>
+          <a:bodyPr wrap="square" lIns="125999" tIns="21600" rIns="108000" bIns="21600" rtlCol="0" anchor="ctr"/>
           <a:lstStyle/>
           <a:p>
             <a:pPr algn="l">
@@ -7289,7 +8282,7 @@
               </a:lnSpc>
             </a:pPr>
             <a:r>
-              <a:rPr sz="1100">
+              <a:rPr sz="1100" dirty="0" err="1">
                 <a:solidFill>
                   <a:srgbClr val="333333"/>
                 </a:solidFill>
@@ -7297,8 +8290,38 @@
                 <a:ea typeface="メイリオ"/>
                 <a:cs typeface="メイリオ"/>
               </a:rPr>
-              <a:t>日程の変更や相談を、電話なしでLINEで完結</a:t>
-            </a:r>
+              <a:t>日程の変更や相談</a:t>
+            </a:r>
+            <a:r>
+              <a:rPr lang="ja-JP" altLang="en-US" sz="1100" dirty="0">
+                <a:solidFill>
+                  <a:srgbClr val="333333"/>
+                </a:solidFill>
+                <a:latin typeface="メイリオ"/>
+                <a:ea typeface="メイリオ"/>
+                <a:cs typeface="メイリオ"/>
+              </a:rPr>
+              <a:t>が</a:t>
+            </a:r>
+            <a:r>
+              <a:rPr sz="1100" dirty="0" err="1">
+                <a:solidFill>
+                  <a:srgbClr val="333333"/>
+                </a:solidFill>
+                <a:latin typeface="メイリオ"/>
+                <a:ea typeface="メイリオ"/>
+                <a:cs typeface="メイリオ"/>
+              </a:rPr>
+              <a:t>LINEで完結</a:t>
+            </a:r>
+            <a:endParaRPr sz="1100" dirty="0">
+              <a:solidFill>
+                <a:srgbClr val="333333"/>
+              </a:solidFill>
+              <a:latin typeface="メイリオ"/>
+              <a:ea typeface="メイリオ"/>
+              <a:cs typeface="メイリオ"/>
+            </a:endParaRPr>
           </a:p>
         </p:txBody>
       </p:sp>
@@ -7343,7 +8366,7 @@
           </a:fontRef>
         </p:style>
         <p:txBody>
-          <a:bodyPr rtlCol="0" anchor="ctr" wrap="square" lIns="125999" rIns="108000" tIns="21600" bIns="21600"/>
+          <a:bodyPr wrap="square" lIns="125999" tIns="21600" rIns="108000" bIns="21600" rtlCol="0" anchor="ctr"/>
           <a:lstStyle/>
           <a:p>
             <a:pPr algn="l">
@@ -7378,7 +8401,7 @@
 </p:sld>
 </file>
 
-<file path=ppt/slides/slide14.xml><?xml version="1.0" encoding="utf-8"?>
+<file path=ppt/slides/slide4.xml><?xml version="1.0" encoding="utf-8"?>
 <p:sld xmlns:a="http://schemas.openxmlformats.org/drawingml/2006/main" xmlns:r="http://schemas.openxmlformats.org/officeDocument/2006/relationships" xmlns:p="http://schemas.openxmlformats.org/presentationml/2006/main">
   <p:cSld>
     <p:spTree>
@@ -7418,7 +8441,7 @@
           <a:noFill/>
         </p:spPr>
         <p:txBody>
-          <a:bodyPr wrap="square" lIns="0" rIns="0" tIns="21600" bIns="21600" anchor="ctr">
+          <a:bodyPr wrap="square" lIns="0" tIns="21600" rIns="0" bIns="21600" anchor="ctr">
             <a:spAutoFit/>
           </a:bodyPr>
           <a:lstStyle/>
@@ -7446,8 +8469,8 @@
         </p:nvSpPr>
         <p:spPr>
           <a:xfrm>
-            <a:off x="432000" y="648000"/>
-            <a:ext cx="9036000" cy="684000"/>
+            <a:off x="432000" y="836230"/>
+            <a:ext cx="9036000" cy="307540"/>
           </a:xfrm>
           <a:prstGeom prst="rect">
             <a:avLst/>
@@ -7455,7 +8478,7 @@
           <a:noFill/>
         </p:spPr>
         <p:txBody>
-          <a:bodyPr wrap="square" lIns="0" rIns="0" tIns="21600" bIns="21600" anchor="ctr">
+          <a:bodyPr wrap="square" lIns="0" tIns="21600" rIns="0" bIns="21600" anchor="ctr">
             <a:spAutoFit/>
           </a:bodyPr>
           <a:lstStyle/>
@@ -7466,7 +8489,7 @@
               </a:lnSpc>
             </a:pPr>
             <a:r>
-              <a:rPr sz="1250">
+              <a:rPr sz="1400" dirty="0" err="1">
                 <a:solidFill>
                   <a:srgbClr val="333333"/>
                 </a:solidFill>
@@ -7474,7 +8497,18 @@
                 <a:ea typeface="メイリオ"/>
                 <a:cs typeface="メイリオ"/>
               </a:rPr>
-              <a:t>貴社の担当者の対応の手間を増やさずに、友だち・応募者とのやりとりを回せるようにします。</a:t>
+              <a:t>貴社の担当者の対応の手間を増やさずに、友だち・応募者とのやりとりを回せるようにします</a:t>
+            </a:r>
+            <a:r>
+              <a:rPr sz="1400" dirty="0">
+                <a:solidFill>
+                  <a:srgbClr val="333333"/>
+                </a:solidFill>
+                <a:latin typeface="メイリオ"/>
+                <a:ea typeface="メイリオ"/>
+                <a:cs typeface="メイリオ"/>
+              </a:rPr>
+              <a:t>。</a:t>
             </a:r>
           </a:p>
         </p:txBody>
@@ -7533,13 +8567,25 @@
                 <a:tableStyleId>{5C22544A-7EE6-4342-B048-85BDC9FD1C3A}</a:tableStyleId>
               </a:tblPr>
               <a:tblGrid>
-                <a:gridCol w="3891600"/>
-                <a:gridCol w="3891600"/>
+                <a:gridCol w="3891600">
+                  <a:extLst>
+                    <a:ext uri="{9D8B030D-6E8A-4147-A177-3AD203B41FA5}">
+                      <a16:colId xmlns:a16="http://schemas.microsoft.com/office/drawing/2014/main" val="20000"/>
+                    </a:ext>
+                  </a:extLst>
+                </a:gridCol>
+                <a:gridCol w="3891600">
+                  <a:extLst>
+                    <a:ext uri="{9D8B030D-6E8A-4147-A177-3AD203B41FA5}">
+                      <a16:colId xmlns:a16="http://schemas.microsoft.com/office/drawing/2014/main" val="20001"/>
+                    </a:ext>
+                  </a:extLst>
+                </a:gridCol>
               </a:tblGrid>
               <a:tr h="324000">
                 <a:tc>
                   <a:txBody>
-                    <a:bodyPr wrap="square" lIns="43200" rIns="43200" tIns="7200" bIns="7200" anchor="ctr"/>
+                    <a:bodyPr/>
                     <a:lstStyle/>
                     <a:p>
                       <a:pPr algn="ctr"/>
@@ -7564,7 +8610,7 @@
                 </a:tc>
                 <a:tc>
                   <a:txBody>
-                    <a:bodyPr wrap="square" lIns="43200" rIns="43200" tIns="7200" bIns="7200" anchor="ctr"/>
+                    <a:bodyPr/>
                     <a:lstStyle/>
                     <a:p>
                       <a:pPr algn="ctr"/>
@@ -7587,6 +8633,11 @@
                     </a:solidFill>
                   </a:tcPr>
                 </a:tc>
+                <a:extLst>
+                  <a:ext uri="{0D108BD9-81ED-4DB2-BD59-A6C34878D82A}">
+                    <a16:rowId xmlns:a16="http://schemas.microsoft.com/office/drawing/2014/main" val="10000"/>
+                  </a:ext>
+                </a:extLst>
               </a:tr>
             </a:tbl>
           </a:graphicData>
@@ -7631,7 +8682,7 @@
           </a:fontRef>
         </p:style>
         <p:txBody>
-          <a:bodyPr rtlCol="0" anchor="ctr" wrap="square" lIns="36000" rIns="36000" tIns="21600" bIns="21600"/>
+          <a:bodyPr wrap="square" lIns="36000" tIns="21600" rIns="36000" bIns="21600" rtlCol="0" anchor="ctr"/>
           <a:lstStyle/>
           <a:p>
             <a:pPr algn="ctr">
@@ -7640,7 +8691,7 @@
               </a:spcAft>
             </a:pPr>
             <a:r>
-              <a:rPr sz="1100" b="1">
+              <a:rPr sz="1200" b="1">
                 <a:solidFill>
                   <a:srgbClr val="FFFFFF"/>
                 </a:solidFill>
@@ -7654,7 +8705,7 @@
           <a:p>
             <a:pPr algn="ctr"/>
             <a:r>
-              <a:rPr sz="950" b="1">
+              <a:rPr sz="1000" b="1">
                 <a:solidFill>
                   <a:srgbClr val="FFFFFF"/>
                 </a:solidFill>
@@ -7668,7 +8719,7 @@
           <a:p>
             <a:pPr algn="ctr"/>
             <a:r>
-              <a:rPr sz="950" b="1">
+              <a:rPr sz="1000" b="1">
                 <a:solidFill>
                   <a:srgbClr val="FFFFFF"/>
                 </a:solidFill>
@@ -7722,7 +8773,7 @@
           </a:fontRef>
         </p:style>
         <p:txBody>
-          <a:bodyPr rtlCol="0" anchor="ctr" wrap="square" lIns="125999" rIns="108000" tIns="21600" bIns="21600"/>
+          <a:bodyPr wrap="square" lIns="125999" tIns="21600" rIns="108000" bIns="21600" rtlCol="0" anchor="ctr"/>
           <a:lstStyle/>
           <a:p>
             <a:pPr algn="l">
@@ -7731,7 +8782,7 @@
               </a:lnSpc>
             </a:pPr>
             <a:r>
-              <a:rPr sz="1100">
+              <a:rPr sz="1100" dirty="0" err="1">
                 <a:solidFill>
                   <a:srgbClr val="333333"/>
                 </a:solidFill>
@@ -7739,8 +8790,53 @@
                 <a:ea typeface="メイリオ"/>
                 <a:cs typeface="メイリオ"/>
               </a:rPr>
-              <a:t>よくある質問への回答を自動化し、電話・メールでの問い合わせ対応を減らす</a:t>
-            </a:r>
+              <a:t>よくある質問への回答を自動化し</a:t>
+            </a:r>
+            <a:r>
+              <a:rPr sz="1100" dirty="0">
+                <a:solidFill>
+                  <a:srgbClr val="333333"/>
+                </a:solidFill>
+                <a:latin typeface="メイリオ"/>
+                <a:ea typeface="メイリオ"/>
+                <a:cs typeface="メイリオ"/>
+              </a:rPr>
+              <a:t>、</a:t>
+            </a:r>
+            <a:endParaRPr lang="en-US" sz="1100" dirty="0">
+              <a:solidFill>
+                <a:srgbClr val="333333"/>
+              </a:solidFill>
+              <a:latin typeface="メイリオ"/>
+              <a:ea typeface="メイリオ"/>
+              <a:cs typeface="メイリオ"/>
+            </a:endParaRPr>
+          </a:p>
+          <a:p>
+            <a:pPr algn="l">
+              <a:lnSpc>
+                <a:spcPct val="125000"/>
+              </a:lnSpc>
+            </a:pPr>
+            <a:r>
+              <a:rPr sz="1100" dirty="0" err="1">
+                <a:solidFill>
+                  <a:srgbClr val="333333"/>
+                </a:solidFill>
+                <a:latin typeface="メイリオ"/>
+                <a:ea typeface="メイリオ"/>
+                <a:cs typeface="メイリオ"/>
+              </a:rPr>
+              <a:t>電話・メールでの問い合わせ対応を減らす</a:t>
+            </a:r>
+            <a:endParaRPr sz="1100" dirty="0">
+              <a:solidFill>
+                <a:srgbClr val="333333"/>
+              </a:solidFill>
+              <a:latin typeface="メイリオ"/>
+              <a:ea typeface="メイリオ"/>
+              <a:cs typeface="メイリオ"/>
+            </a:endParaRPr>
           </a:p>
         </p:txBody>
       </p:sp>
@@ -7785,7 +8881,7 @@
           </a:fontRef>
         </p:style>
         <p:txBody>
-          <a:bodyPr rtlCol="0" anchor="ctr" wrap="square" lIns="125999" rIns="108000" tIns="21600" bIns="21600"/>
+          <a:bodyPr wrap="square" lIns="125999" tIns="21600" rIns="108000" bIns="21600" rtlCol="0" anchor="ctr"/>
           <a:lstStyle/>
           <a:p>
             <a:pPr algn="l">
@@ -7794,7 +8890,7 @@
               </a:lnSpc>
             </a:pPr>
             <a:r>
-              <a:rPr sz="1100">
+              <a:rPr sz="1100" dirty="0" err="1">
                 <a:solidFill>
                   <a:srgbClr val="333333"/>
                 </a:solidFill>
@@ -7802,7 +8898,55 @@
                 <a:ea typeface="メイリオ"/>
                 <a:cs typeface="メイリオ"/>
               </a:rPr>
-              <a:t>クリックの履歴で、興味別のグループを自動で作る（クリックリターゲティング）</a:t>
+              <a:t>クリックの履歴で、興味別のグループを自動で作る</a:t>
+            </a:r>
+            <a:endParaRPr lang="en-US" sz="1100" dirty="0">
+              <a:solidFill>
+                <a:srgbClr val="333333"/>
+              </a:solidFill>
+              <a:latin typeface="メイリオ"/>
+              <a:ea typeface="メイリオ"/>
+              <a:cs typeface="メイリオ"/>
+            </a:endParaRPr>
+          </a:p>
+          <a:p>
+            <a:pPr algn="l">
+              <a:lnSpc>
+                <a:spcPct val="125000"/>
+              </a:lnSpc>
+            </a:pPr>
+            <a:r>
+              <a:rPr sz="1100" dirty="0">
+                <a:solidFill>
+                  <a:srgbClr val="333333"/>
+                </a:solidFill>
+                <a:latin typeface="メイリオ"/>
+                <a:ea typeface="メイリオ"/>
+                <a:cs typeface="メイリオ"/>
+              </a:rPr>
+              <a:t>（</a:t>
+            </a:r>
+            <a:r>
+              <a:rPr sz="1100" dirty="0" err="1">
+                <a:solidFill>
+                  <a:srgbClr val="333333"/>
+                </a:solidFill>
+                <a:latin typeface="メイリオ"/>
+                <a:ea typeface="メイリオ"/>
+                <a:cs typeface="メイリオ"/>
+              </a:rPr>
+              <a:t>クリックリターゲティング</a:t>
+            </a:r>
+            <a:r>
+              <a:rPr sz="1100" dirty="0">
+                <a:solidFill>
+                  <a:srgbClr val="333333"/>
+                </a:solidFill>
+                <a:latin typeface="メイリオ"/>
+                <a:ea typeface="メイリオ"/>
+                <a:cs typeface="メイリオ"/>
+              </a:rPr>
+              <a:t>）</a:t>
             </a:r>
           </a:p>
         </p:txBody>
@@ -7846,7 +8990,7 @@
           </a:fontRef>
         </p:style>
         <p:txBody>
-          <a:bodyPr rtlCol="0" anchor="ctr" wrap="square" lIns="36000" rIns="36000" tIns="21600" bIns="21600"/>
+          <a:bodyPr wrap="square" lIns="36000" tIns="21600" rIns="36000" bIns="21600" rtlCol="0" anchor="ctr"/>
           <a:lstStyle/>
           <a:p>
             <a:pPr algn="ctr">
@@ -7855,7 +8999,7 @@
               </a:spcAft>
             </a:pPr>
             <a:r>
-              <a:rPr sz="1100" b="1">
+              <a:rPr sz="1200" b="1">
                 <a:solidFill>
                   <a:srgbClr val="FFFFFF"/>
                 </a:solidFill>
@@ -7869,7 +9013,7 @@
           <a:p>
             <a:pPr algn="ctr"/>
             <a:r>
-              <a:rPr sz="950" b="1">
+              <a:rPr sz="1000" b="1">
                 <a:solidFill>
                   <a:srgbClr val="FFFFFF"/>
                 </a:solidFill>
@@ -7883,7 +9027,7 @@
           <a:p>
             <a:pPr algn="ctr"/>
             <a:r>
-              <a:rPr sz="950" b="1">
+              <a:rPr sz="1000" b="1">
                 <a:solidFill>
                   <a:srgbClr val="FFFFFF"/>
                 </a:solidFill>
@@ -7937,7 +9081,7 @@
           </a:fontRef>
         </p:style>
         <p:txBody>
-          <a:bodyPr rtlCol="0" anchor="ctr" wrap="square" lIns="125999" rIns="108000" tIns="21600" bIns="21600"/>
+          <a:bodyPr wrap="square" lIns="125999" tIns="21600" rIns="108000" bIns="21600" rtlCol="0" anchor="ctr"/>
           <a:lstStyle/>
           <a:p>
             <a:pPr algn="l">
@@ -7946,7 +9090,7 @@
               </a:lnSpc>
             </a:pPr>
             <a:r>
-              <a:rPr sz="1100">
+              <a:rPr sz="1100" dirty="0" err="1">
                 <a:solidFill>
                   <a:srgbClr val="333333"/>
                 </a:solidFill>
@@ -7954,8 +9098,53 @@
                 <a:ea typeface="メイリオ"/>
                 <a:cs typeface="メイリオ"/>
               </a:rPr>
-              <a:t>よくある質問への回答を自動化し、問い合わせ対応を減らす</a:t>
-            </a:r>
+              <a:t>よくある質問への回答を自動化し</a:t>
+            </a:r>
+            <a:r>
+              <a:rPr sz="1100" dirty="0">
+                <a:solidFill>
+                  <a:srgbClr val="333333"/>
+                </a:solidFill>
+                <a:latin typeface="メイリオ"/>
+                <a:ea typeface="メイリオ"/>
+                <a:cs typeface="メイリオ"/>
+              </a:rPr>
+              <a:t>、</a:t>
+            </a:r>
+            <a:endParaRPr lang="en-US" sz="1100" dirty="0">
+              <a:solidFill>
+                <a:srgbClr val="333333"/>
+              </a:solidFill>
+              <a:latin typeface="メイリオ"/>
+              <a:ea typeface="メイリオ"/>
+              <a:cs typeface="メイリオ"/>
+            </a:endParaRPr>
+          </a:p>
+          <a:p>
+            <a:pPr algn="l">
+              <a:lnSpc>
+                <a:spcPct val="125000"/>
+              </a:lnSpc>
+            </a:pPr>
+            <a:r>
+              <a:rPr sz="1100" dirty="0" err="1">
+                <a:solidFill>
+                  <a:srgbClr val="333333"/>
+                </a:solidFill>
+                <a:latin typeface="メイリオ"/>
+                <a:ea typeface="メイリオ"/>
+                <a:cs typeface="メイリオ"/>
+              </a:rPr>
+              <a:t>問い合わせ対応を減らす</a:t>
+            </a:r>
+            <a:endParaRPr sz="1100" dirty="0">
+              <a:solidFill>
+                <a:srgbClr val="333333"/>
+              </a:solidFill>
+              <a:latin typeface="メイリオ"/>
+              <a:ea typeface="メイリオ"/>
+              <a:cs typeface="メイリオ"/>
+            </a:endParaRPr>
           </a:p>
         </p:txBody>
       </p:sp>
@@ -8000,7 +9189,7 @@
           </a:fontRef>
         </p:style>
         <p:txBody>
-          <a:bodyPr rtlCol="0" anchor="ctr" wrap="square" lIns="125999" rIns="108000" tIns="21600" bIns="21600"/>
+          <a:bodyPr wrap="square" lIns="125999" tIns="21600" rIns="108000" bIns="21600" rtlCol="0" anchor="ctr"/>
           <a:lstStyle/>
           <a:p>
             <a:pPr algn="l">
@@ -8009,7 +9198,7 @@
               </a:lnSpc>
             </a:pPr>
             <a:r>
-              <a:rPr sz="1100">
+              <a:rPr sz="1100" dirty="0" err="1">
                 <a:solidFill>
                   <a:srgbClr val="333333"/>
                 </a:solidFill>
@@ -8017,8 +9206,53 @@
                 <a:ea typeface="メイリオ"/>
                 <a:cs typeface="メイリオ"/>
               </a:rPr>
-              <a:t>会員の情報とLINEをひもづけ、条件別の配信を自動化する</a:t>
-            </a:r>
+              <a:t>会員の情報とLINEをひもづけ</a:t>
+            </a:r>
+            <a:r>
+              <a:rPr sz="1100" dirty="0">
+                <a:solidFill>
+                  <a:srgbClr val="333333"/>
+                </a:solidFill>
+                <a:latin typeface="メイリオ"/>
+                <a:ea typeface="メイリオ"/>
+                <a:cs typeface="メイリオ"/>
+              </a:rPr>
+              <a:t>、</a:t>
+            </a:r>
+            <a:endParaRPr lang="en-US" sz="1100" dirty="0">
+              <a:solidFill>
+                <a:srgbClr val="333333"/>
+              </a:solidFill>
+              <a:latin typeface="メイリオ"/>
+              <a:ea typeface="メイリオ"/>
+              <a:cs typeface="メイリオ"/>
+            </a:endParaRPr>
+          </a:p>
+          <a:p>
+            <a:pPr algn="l">
+              <a:lnSpc>
+                <a:spcPct val="125000"/>
+              </a:lnSpc>
+            </a:pPr>
+            <a:r>
+              <a:rPr sz="1100" dirty="0" err="1">
+                <a:solidFill>
+                  <a:srgbClr val="333333"/>
+                </a:solidFill>
+                <a:latin typeface="メイリオ"/>
+                <a:ea typeface="メイリオ"/>
+                <a:cs typeface="メイリオ"/>
+              </a:rPr>
+              <a:t>条件別の配信を自動化する</a:t>
+            </a:r>
+            <a:endParaRPr sz="1100" dirty="0">
+              <a:solidFill>
+                <a:srgbClr val="333333"/>
+              </a:solidFill>
+              <a:latin typeface="メイリオ"/>
+              <a:ea typeface="メイリオ"/>
+              <a:cs typeface="メイリオ"/>
+            </a:endParaRPr>
           </a:p>
         </p:txBody>
       </p:sp>
@@ -8061,7 +9295,7 @@
           </a:fontRef>
         </p:style>
         <p:txBody>
-          <a:bodyPr rtlCol="0" anchor="ctr" wrap="square" lIns="36000" rIns="36000" tIns="21600" bIns="21600"/>
+          <a:bodyPr wrap="square" lIns="36000" tIns="21600" rIns="36000" bIns="21600" rtlCol="0" anchor="ctr"/>
           <a:lstStyle/>
           <a:p>
             <a:pPr algn="ctr">
@@ -8070,7 +9304,7 @@
               </a:spcAft>
             </a:pPr>
             <a:r>
-              <a:rPr sz="1100" b="1">
+              <a:rPr sz="1200" b="1">
                 <a:solidFill>
                   <a:srgbClr val="FFFFFF"/>
                 </a:solidFill>
@@ -8084,7 +9318,7 @@
           <a:p>
             <a:pPr algn="ctr"/>
             <a:r>
-              <a:rPr sz="950" b="1">
+              <a:rPr sz="1000" b="1">
                 <a:solidFill>
                   <a:srgbClr val="FFFFFF"/>
                 </a:solidFill>
@@ -8098,7 +9332,7 @@
           <a:p>
             <a:pPr algn="ctr"/>
             <a:r>
-              <a:rPr sz="950" b="1">
+              <a:rPr sz="1000" b="1">
                 <a:solidFill>
                   <a:srgbClr val="FFFFFF"/>
                 </a:solidFill>
@@ -8152,7 +9386,7 @@
           </a:fontRef>
         </p:style>
         <p:txBody>
-          <a:bodyPr rtlCol="0" anchor="ctr" wrap="square" lIns="125999" rIns="108000" tIns="21600" bIns="21600"/>
+          <a:bodyPr wrap="square" lIns="125999" tIns="21600" rIns="108000" bIns="21600" rtlCol="0" anchor="ctr"/>
           <a:lstStyle/>
           <a:p>
             <a:pPr algn="l">
@@ -8161,7 +9395,7 @@
               </a:lnSpc>
             </a:pPr>
             <a:r>
-              <a:rPr sz="1100">
+              <a:rPr sz="1100" dirty="0" err="1">
                 <a:solidFill>
                   <a:srgbClr val="333333"/>
                 </a:solidFill>
@@ -8169,8 +9403,53 @@
                 <a:ea typeface="メイリオ"/>
                 <a:cs typeface="メイリオ"/>
               </a:rPr>
-              <a:t>面談日程の確認・変更の受付を自動化し、電話でのやりとりを減らす</a:t>
-            </a:r>
+              <a:t>面談日程の確認・変更の受付を自動化し</a:t>
+            </a:r>
+            <a:r>
+              <a:rPr sz="1100" dirty="0">
+                <a:solidFill>
+                  <a:srgbClr val="333333"/>
+                </a:solidFill>
+                <a:latin typeface="メイリオ"/>
+                <a:ea typeface="メイリオ"/>
+                <a:cs typeface="メイリオ"/>
+              </a:rPr>
+              <a:t>、</a:t>
+            </a:r>
+            <a:endParaRPr lang="en-US" sz="1100" dirty="0">
+              <a:solidFill>
+                <a:srgbClr val="333333"/>
+              </a:solidFill>
+              <a:latin typeface="メイリオ"/>
+              <a:ea typeface="メイリオ"/>
+              <a:cs typeface="メイリオ"/>
+            </a:endParaRPr>
+          </a:p>
+          <a:p>
+            <a:pPr algn="l">
+              <a:lnSpc>
+                <a:spcPct val="125000"/>
+              </a:lnSpc>
+            </a:pPr>
+            <a:r>
+              <a:rPr sz="1100" dirty="0" err="1">
+                <a:solidFill>
+                  <a:srgbClr val="333333"/>
+                </a:solidFill>
+                <a:latin typeface="メイリオ"/>
+                <a:ea typeface="メイリオ"/>
+                <a:cs typeface="メイリオ"/>
+              </a:rPr>
+              <a:t>電話でのやりとりを減らす</a:t>
+            </a:r>
+            <a:endParaRPr sz="1100" dirty="0">
+              <a:solidFill>
+                <a:srgbClr val="333333"/>
+              </a:solidFill>
+              <a:latin typeface="メイリオ"/>
+              <a:ea typeface="メイリオ"/>
+              <a:cs typeface="メイリオ"/>
+            </a:endParaRPr>
           </a:p>
         </p:txBody>
       </p:sp>
@@ -8215,7 +9494,7 @@
           </a:fontRef>
         </p:style>
         <p:txBody>
-          <a:bodyPr rtlCol="0" anchor="ctr" wrap="square" lIns="125999" rIns="108000" tIns="21600" bIns="21600"/>
+          <a:bodyPr wrap="square" lIns="125999" tIns="21600" rIns="108000" bIns="21600" rtlCol="0" anchor="ctr"/>
           <a:lstStyle/>
           <a:p>
             <a:pPr algn="l">
@@ -8224,7 +9503,7 @@
               </a:lnSpc>
             </a:pPr>
             <a:r>
-              <a:rPr sz="1100">
+              <a:rPr sz="1100" dirty="0" err="1">
                 <a:solidFill>
                   <a:srgbClr val="333333"/>
                 </a:solidFill>
@@ -8232,8 +9511,53 @@
                 <a:ea typeface="メイリオ"/>
                 <a:cs typeface="メイリオ"/>
               </a:rPr>
-              <a:t>応募者への連絡をLINEにまとめ、電話がつながらない手間を減らす</a:t>
-            </a:r>
+              <a:t>応募者への連絡をLINEにまとめ</a:t>
+            </a:r>
+            <a:r>
+              <a:rPr sz="1100" dirty="0">
+                <a:solidFill>
+                  <a:srgbClr val="333333"/>
+                </a:solidFill>
+                <a:latin typeface="メイリオ"/>
+                <a:ea typeface="メイリオ"/>
+                <a:cs typeface="メイリオ"/>
+              </a:rPr>
+              <a:t>、</a:t>
+            </a:r>
+            <a:endParaRPr lang="en-US" sz="1100" dirty="0">
+              <a:solidFill>
+                <a:srgbClr val="333333"/>
+              </a:solidFill>
+              <a:latin typeface="メイリオ"/>
+              <a:ea typeface="メイリオ"/>
+              <a:cs typeface="メイリオ"/>
+            </a:endParaRPr>
+          </a:p>
+          <a:p>
+            <a:pPr algn="l">
+              <a:lnSpc>
+                <a:spcPct val="125000"/>
+              </a:lnSpc>
+            </a:pPr>
+            <a:r>
+              <a:rPr sz="1100" dirty="0" err="1">
+                <a:solidFill>
+                  <a:srgbClr val="333333"/>
+                </a:solidFill>
+                <a:latin typeface="メイリオ"/>
+                <a:ea typeface="メイリオ"/>
+                <a:cs typeface="メイリオ"/>
+              </a:rPr>
+              <a:t>電話がつながらない手間を減らす</a:t>
+            </a:r>
+            <a:endParaRPr sz="1100" dirty="0">
+              <a:solidFill>
+                <a:srgbClr val="333333"/>
+              </a:solidFill>
+              <a:latin typeface="メイリオ"/>
+              <a:ea typeface="メイリオ"/>
+              <a:cs typeface="メイリオ"/>
+            </a:endParaRPr>
           </a:p>
         </p:txBody>
       </p:sp>
